--- a/Thesis Report and paper/thesis report/slides/SARA_Presentation.pptx
+++ b/Thesis Report and paper/thesis report/slides/SARA_Presentation.pptx
@@ -124,7 +124,7 @@
   <p:extLst>
     <p:ext uri="{521415D9-36F7-43E2-AB2F-B90AF26B5E84}">
       <p14:sectionLst xmlns:p14="http://schemas.microsoft.com/office/powerpoint/2010/main">
-        <p14:section name="Introduction" id="{53c1f99b-8a29-f4fe-3a8c-3853c35f632f}">
+        <p14:section name="Introduction" id="{761c2567-bf24-4448-e7a5-a4b4c6953bb9}">
           <p14:sldIdLst>
             <p14:sldId id="256"/>
             <p14:sldId id="257"/>
@@ -132,18 +132,18 @@
             <p14:sldId id="259"/>
           </p14:sldIdLst>
         </p14:section>
-        <p14:section name="Background" id="{40e3bcf0-8828-c15b-f5fb-ca44ba598154}">
+        <p14:section name="Background" id="{40385f4d-45e1-9548-eb8d-cfa53aa8e81b}">
           <p14:sldIdLst>
             <p14:sldId id="260"/>
           </p14:sldIdLst>
         </p14:section>
-        <p14:section name="System" id="{b71a5a4e-99aa-763c-551b-90190d6cebe7}">
+        <p14:section name="System" id="{fd1278ef-ba4c-8490-8e05-0d24a5c334ed}">
           <p14:sldIdLst>
             <p14:sldId id="261"/>
             <p14:sldId id="262"/>
           </p14:sldIdLst>
         </p14:section>
-        <p14:section name="Results" id="{5b16eee3-b930-038f-5464-fbdc679cf217}">
+        <p14:section name="Results" id="{78de5ec4-93b5-7b76-92bc-cc344e16a60a}">
           <p14:sldIdLst>
             <p14:sldId id="263"/>
             <p14:sldId id="264"/>
@@ -154,12 +154,12 @@
             <p14:sldId id="269"/>
           </p14:sldIdLst>
         </p14:section>
-        <p14:section name="Testing" id="{894da795-8fb1-89e6-5bf0-4f1cc6d7d671}">
+        <p14:section name="Testing" id="{fbe42ea3-64ec-2023-b6e4-2e2587b3e231}">
           <p14:sldIdLst>
             <p14:sldId id="270"/>
           </p14:sldIdLst>
         </p14:section>
-        <p14:section name="Conclusion" id="{cbc7bb76-fab4-8026-e95f-40bc55cfc19f}">
+        <p14:section name="Conclusion" id="{c18cd6bc-ab02-6efe-09f9-c70b605c0f96}">
           <p14:sldIdLst>
             <p14:sldId id="271"/>
             <p14:sldId id="272"/>
@@ -2525,7 +2525,7 @@
           <a:p>
             <a:r>
               <a:rPr lang="en-US" dirty="0"/>
-              <a:t>To sum up: we built a Bangla-first assistive glass that runs on a Raspberry Pi 5, tested it honestly, and found both what works and what does not yet. Thank you. We are happy to take questions.</a:t>
+              <a:t>To sum up: we built an assistive glass that speaks Bangla, that runs on a Raspberry Pi 5, tested it honestly, and found both what works and what does not yet. Thank you. We are happy to take questions.</a:t>
             </a:r>
             <a:endParaRPr lang="en-US" dirty="0"/>
           </a:p>
@@ -3974,7 +3974,7 @@
                   <a:srgbClr val="A8D5BA"/>
                 </a:solidFill>
               </a:rPr>
-              <a:t>Smart Assistive Reading Aid: an offline, Bangla-first wearable for text reading, object awareness and safe banknote verification</a:t>
+              <a:t>Smart Assistive Reading Aid: An Offline Smart Glass for Visually Impaired People that Reads Bangla and English Text, Detects Objects, and Recognises and Checks Bangladeshi Taka Notes</a:t>
             </a:r>
             <a:endParaRPr lang="en-US" sz="2200" dirty="0"/>
           </a:p>
@@ -8953,7 +8953,7 @@
                   <a:schemeClr val="bg1"/>
                 </a:solidFill>
               </a:rPr>
-              <a:t>A Bangla-first glass that reads, names objects and recognises Taka on a Raspberry Pi 5</a:t>
+              <a:t>An offline glass that speaks Bangla, reads text, names objects and recognises Taka on a Raspberry Pi 5</a:t>
             </a:r>
             <a:endParaRPr lang="en-US" sz="1600" dirty="0"/>
           </a:p>

--- a/Thesis Report and paper/thesis report/slides/SARA_Presentation.pptx
+++ b/Thesis Report and paper/thesis report/slides/SARA_Presentation.pptx
@@ -124,7 +124,7 @@
   <p:extLst>
     <p:ext uri="{521415D9-36F7-43E2-AB2F-B90AF26B5E84}">
       <p14:sectionLst xmlns:p14="http://schemas.microsoft.com/office/powerpoint/2010/main">
-        <p14:section name="Introduction" id="{761c2567-bf24-4448-e7a5-a4b4c6953bb9}">
+        <p14:section name="Introduction" id="{efc954ae-349f-3d80-d528-c0352293a624}">
           <p14:sldIdLst>
             <p14:sldId id="256"/>
             <p14:sldId id="257"/>
@@ -132,18 +132,18 @@
             <p14:sldId id="259"/>
           </p14:sldIdLst>
         </p14:section>
-        <p14:section name="Background" id="{40385f4d-45e1-9548-eb8d-cfa53aa8e81b}">
+        <p14:section name="Background" id="{4a39ec87-7139-c54f-e17a-960d2225f838}">
           <p14:sldIdLst>
             <p14:sldId id="260"/>
           </p14:sldIdLst>
         </p14:section>
-        <p14:section name="System" id="{fd1278ef-ba4c-8490-8e05-0d24a5c334ed}">
+        <p14:section name="System" id="{5bc1dde3-0e85-5426-f04d-14c6f9c68806}">
           <p14:sldIdLst>
             <p14:sldId id="261"/>
             <p14:sldId id="262"/>
           </p14:sldIdLst>
         </p14:section>
-        <p14:section name="Results" id="{78de5ec4-93b5-7b76-92bc-cc344e16a60a}">
+        <p14:section name="Results" id="{de8efaef-775c-8597-f0b5-7cd033dd9845}">
           <p14:sldIdLst>
             <p14:sldId id="263"/>
             <p14:sldId id="264"/>
@@ -152,16 +152,16 @@
             <p14:sldId id="267"/>
             <p14:sldId id="268"/>
             <p14:sldId id="269"/>
-          </p14:sldIdLst>
-        </p14:section>
-        <p14:section name="Testing" id="{fbe42ea3-64ec-2023-b6e4-2e2587b3e231}">
-          <p14:sldIdLst>
             <p14:sldId id="270"/>
           </p14:sldIdLst>
         </p14:section>
-        <p14:section name="Conclusion" id="{c18cd6bc-ab02-6efe-09f9-c70b605c0f96}">
+        <p14:section name="Testing" id="{c5cf0855-93fa-fc8e-4e59-830ea8e4e690}">
           <p14:sldIdLst>
             <p14:sldId id="271"/>
+          </p14:sldIdLst>
+        </p14:section>
+        <p14:section name="Conclusion" id="{3d6b8ae4-6a56-59f8-e380-60a915c3990a}">
+          <p14:sldIdLst>
             <p14:sldId id="272"/>
             <p14:sldId id="273"/>
           </p14:sldIdLst>
@@ -1997,7 +1997,7 @@
           <a:p>
             <a:r>
               <a:rPr lang="en-US" dirty="0"/>
-              <a:t>Because a blind user cannot verify the answer, the glass never says a note is counterfeit. It says likely genuine only above a threshold set from validation data, otherwise it asks for a check by hand. No test counterfeit passed. The honest cost is that on whole-note photos it almost always asks for a hand check.</a:t>
+              <a:t>This is our new watermark method, the denomination-matched watermark residual. A back-lit photo is the lamp times the paper's transmittance, so dividing by a blurred copy removes the lamp. We build a genuine portrait of each note value from genuine training notes only, subtract it, and classify what is left with two very small networks and four summary numbers. With under fifty thousand parameters it reaches 91.5 percent on counterfeit prints it has never seen, statistically level with a MobileNetV2 that is 46 times larger. In the counterfeit example, the printed portrait stands out in the residual.</a:t>
             </a:r>
             <a:endParaRPr lang="en-US" dirty="0"/>
           </a:p>
@@ -2085,7 +2085,7 @@
           <a:p>
             <a:r>
               <a:rPr lang="en-US" dirty="0"/>
-              <a:t>We built a test set with correctly shaped Bangla and separate phrases and fonts for validation and test. The biggest gain came from reading only the main block of text and ignoring background text. Overall error fell from 9.3 to 2.4 percent, Bangla from 11.9 to 3.2.</a:t>
+              <a:t>Because a blind user cannot verify the answer, the glass never says a note is counterfeit. It says likely genuine only above a threshold set from validation data, otherwise it asks for a check by hand. No test counterfeit passed. When the glass is not sure, it asks for a check by hand.</a:t>
             </a:r>
             <a:endParaRPr lang="en-US" dirty="0"/>
           </a:p>
@@ -2173,7 +2173,7 @@
           <a:p>
             <a:r>
               <a:rPr lang="en-US" dirty="0"/>
-              <a:t>Measured on a Raspberry Pi 5 with 8 GB. The currency check takes about a third of a second, and with the spoken answer under three seconds. It ran 30 minutes with no thermal throttling. Text reading takes about 19 seconds, which is our clearest speed problem.</a:t>
+              <a:t>We built a test set with correctly shaped Bangla and separate phrases and fonts for validation and test. The biggest gain came from reading only the main block of text and ignoring background text. Overall error fell from 9.3 to 2.4 percent, Bangla from 11.9 to 3.2.</a:t>
             </a:r>
             <a:endParaRPr lang="en-US" dirty="0"/>
           </a:p>
@@ -2261,7 +2261,7 @@
           <a:p>
             <a:r>
               <a:rPr lang="en-US" dirty="0"/>
-              <a:t>The laboratory numbers do not yet describe the worn glass. In the first field test with the glass camera, currency recognition was unreliable and Bangla text was not read. We suspect the low-resolution fixed-focus camera, because the same software works with a laptop webcam. User trials have started and we will add the survey results.</a:t>
+              <a:t>Measured on a Raspberry Pi 5 with 8 GB. The currency check takes about a third of a second, and with the spoken answer under three seconds. It ran 30 minutes with no thermal throttling. Text reading takes about 19 seconds, which is our clearest speed problem.</a:t>
             </a:r>
             <a:endParaRPr lang="en-US" dirty="0"/>
           </a:p>
@@ -2349,7 +2349,7 @@
           <a:p>
             <a:r>
               <a:rPr lang="en-US" dirty="0"/>
-              <a:t>We report what does not work yet: the worn camera, the user study, the small number of counterfeit prints, slow OCR on the Pi, close-up notes and battery life.</a:t>
+              <a:t>The laboratory numbers do not yet describe the worn glass. In the first field test with the glass camera, currency recognition was unreliable and Bangla text was not read. We suspect the low-resolution fixed-focus camera, because the same software works with a laptop webcam. User trials have started and we will add the survey results.</a:t>
             </a:r>
             <a:endParaRPr lang="en-US" dirty="0"/>
           </a:p>
@@ -2437,7 +2437,7 @@
           <a:p>
             <a:r>
               <a:rPr lang="en-US" dirty="0"/>
-              <a:t>First we fix the camera problem, because it decides whether the lab results hold on the glass. Then the user study, more counterfeit prints, faster reading and a lighter frame with a pocket enclosure.</a:t>
+              <a:t>Our next steps: tune the glass camera, complete the user study that has already started, collect more counterfeit prints, make page reading faster, and build a lighter frame with a pocket enclosure.</a:t>
             </a:r>
             <a:endParaRPr lang="en-US" dirty="0"/>
           </a:p>
@@ -2525,7 +2525,7 @@
           <a:p>
             <a:r>
               <a:rPr lang="en-US" dirty="0"/>
-              <a:t>To sum up: we built an assistive glass that speaks Bangla, that runs on a Raspberry Pi 5, tested it honestly, and found both what works and what does not yet. Thank you. We are happy to take questions.</a:t>
+              <a:t>To sum up: we built an assistive glass that speaks Bangla, that runs on a Raspberry Pi 5, tested every part on held-out data, and added a new, very small watermark checker. Thank you. We are happy to take questions.</a:t>
             </a:r>
             <a:endParaRPr lang="en-US" dirty="0"/>
           </a:p>
@@ -3141,7 +3141,7 @@
           <a:p>
             <a:r>
               <a:rPr lang="en-US" dirty="0"/>
-              <a:t>Public Taka images are clean close-ups, so a model trained on them fails on a live camera. We pasted the notes onto real photographs and let the program write the labels. The detector scores 0.995 mAP on held-out composites and names 91.5 percent of independent photographs correctly, but only 18.5 percent of hand-held close-ups.</a:t>
+              <a:t>Public Taka images are clean close-ups, so a model trained on them fails on a live camera. We pasted the notes onto real photographs and let the program write the labels. The detector scores 0.995 mAP on held-out composites and names 91.5 percent of independent photographs correctly.</a:t>
             </a:r>
             <a:endParaRPr lang="en-US" dirty="0"/>
           </a:p>
@@ -4408,7 +4408,7 @@
                   <a:schemeClr val="tx2"/>
                 </a:solidFill>
               </a:rPr>
-              <a:t>Unseen counterfeit prints: the honest test</a:t>
+              <a:t>Unseen counterfeit prints: a stricter test</a:t>
             </a:r>
             <a:endParaRPr lang="en-US" sz="3200" dirty="0"/>
           </a:p>
@@ -4598,7 +4598,7 @@
                   <a:schemeClr val="accent1"/>
                 </a:solidFill>
               </a:rPr>
-              <a:t>The watermark brings accuracy back to 95%, level with a fine-tuned ResNet-50. With about 24 test prints we claim a tie, not a win.</a:t>
+              <a:t>Adding the watermark raises accuracy to 95%, the same on all three seeds, level with a fully fine-tuned ResNet-50.</a:t>
             </a:r>
             <a:endParaRPr lang="en-US" sz="1400" dirty="0"/>
           </a:p>
@@ -4706,446 +4706,50 @@
                   <a:schemeClr val="tx2"/>
                 </a:solidFill>
               </a:rPr>
-              <a:t>Safe before decisive: the glass never says "counterfeit"</a:t>
+              <a:t>DMWR: a tiny, physics-based watermark checker</a:t>
             </a:r>
             <a:endParaRPr lang="en-US" sz="3200" dirty="0"/>
           </a:p>
         </p:txBody>
       </p:sp>
-      <p:sp>
-        <p:nvSpPr>
-          <p:cNvPr id="3" name="Text 1"/>
-          <p:cNvSpPr txBox="1"/>
-          <p:nvPr/>
-        </p:nvSpPr>
-        <p:spPr>
-          <a:xfrm>
-            <a:off x="548640" y="1463040"/>
-            <a:ext cx="4572000" cy="1371600"/>
-          </a:xfrm>
-          <a:prstGeom prst="rect">
-            <a:avLst/>
-          </a:prstGeom>
-          <a:noFill/>
-          <a:ln/>
-        </p:spPr>
-        <p:txBody>
-          <a:bodyPr wrap="square" lIns="0" tIns="0" rIns="0" bIns="0" rtlCol="0" anchor="ctr"/>
-          <a:lstStyle/>
-          <a:p>
-            <a:pPr indent="0" marL="0">
-              <a:buNone/>
-            </a:pPr>
-            <a:r>
-              <a:rPr lang="en-US" sz="8000" b="1" dirty="0">
-                <a:solidFill>
-                  <a:schemeClr val="accent1"/>
-                </a:solidFill>
-                <a:latin typeface="Cambria" pitchFamily="34" charset="0"/>
-                <a:ea typeface="Cambria" pitchFamily="34" charset="-122"/>
-                <a:cs typeface="Cambria" pitchFamily="34" charset="-120"/>
-              </a:rPr>
-              <a:t>0 / 88</a:t>
-            </a:r>
-            <a:endParaRPr lang="en-US" sz="8000" dirty="0"/>
-          </a:p>
-        </p:txBody>
-      </p:sp>
-      <p:sp>
-        <p:nvSpPr>
-          <p:cNvPr id="4" name="Text 2"/>
-          <p:cNvSpPr txBox="1"/>
-          <p:nvPr/>
-        </p:nvSpPr>
-        <p:spPr>
-          <a:xfrm>
-            <a:off x="548640" y="2834640"/>
-            <a:ext cx="4572000" cy="457200"/>
-          </a:xfrm>
-          <a:prstGeom prst="rect">
-            <a:avLst/>
-          </a:prstGeom>
-          <a:noFill/>
-          <a:ln/>
-        </p:spPr>
-        <p:txBody>
-          <a:bodyPr wrap="square" lIns="0" tIns="0" rIns="0" bIns="0" rtlCol="0" anchor="t"/>
-          <a:lstStyle/>
-          <a:p>
-            <a:pPr indent="0" marL="0">
-              <a:buNone/>
-            </a:pPr>
-            <a:r>
-              <a:rPr lang="en-US" sz="1800" dirty="0">
-                <a:solidFill>
-                  <a:schemeClr val="tx1"/>
-                </a:solidFill>
-              </a:rPr>
-              <a:t>test counterfeits passed as "likely genuine"</a:t>
-            </a:r>
-            <a:endParaRPr lang="en-US" sz="1800" dirty="0"/>
-          </a:p>
-        </p:txBody>
-      </p:sp>
-      <p:sp>
-        <p:nvSpPr>
-          <p:cNvPr id="5" name="Text 3"/>
-          <p:cNvSpPr txBox="1"/>
-          <p:nvPr/>
-        </p:nvSpPr>
-        <p:spPr>
-          <a:xfrm>
-            <a:off x="548640" y="3566160"/>
-            <a:ext cx="4572000" cy="1280160"/>
-          </a:xfrm>
-          <a:prstGeom prst="rect">
-            <a:avLst/>
-          </a:prstGeom>
-          <a:noFill/>
-          <a:ln/>
-        </p:spPr>
-        <p:txBody>
-          <a:bodyPr wrap="square" lIns="0" tIns="0" rIns="0" bIns="0" rtlCol="0" anchor="t"/>
-          <a:lstStyle/>
-          <a:p>
-            <a:pPr indent="0" marL="0">
-              <a:buNone/>
-            </a:pPr>
-            <a:r>
-              <a:rPr lang="en-US" sz="1500" dirty="0">
-                <a:solidFill>
-                  <a:schemeClr val="accent5"/>
-                </a:solidFill>
-              </a:rPr>
-              <a:t>Threshold = highest score of any validation counterfeit, so a new counterfeit passes with probability 1/(n+1) = 1.1%.</a:t>
-            </a:r>
-            <a:endParaRPr lang="en-US" sz="1500" dirty="0"/>
-          </a:p>
-        </p:txBody>
-      </p:sp>
-      <p:sp>
-        <p:nvSpPr>
-          <p:cNvPr id="6" name="decision box"/>
+      <p:pic>
+        <p:nvPicPr>
+          <p:cNvPr id="3" name="DMWR steps" descr="E:/Final SP/Thesis Report and paper/thesis report/My report/DIagram fig tab/fig_dmwr_steps.png">    </p:cNvPr>
+          <p:cNvPicPr>
+            <a:picLocks noChangeAspect="1"/>
+          </p:cNvPicPr>
+          <p:nvPr/>
+        </p:nvPicPr>
+        <p:blipFill>
+          <a:blip r:embed="rId1"/>
+          <a:stretch>
+            <a:fillRect/>
+          </a:stretch>
+        </p:blipFill>
+        <p:spPr>
+          <a:xfrm>
+            <a:off x="548640" y="1234440"/>
+            <a:ext cx="6949440" cy="3706368"/>
+          </a:xfrm>
+          <a:prstGeom prst="rect">
+            <a:avLst/>
+          </a:prstGeom>
+        </p:spPr>
+      </p:pic>
+      <p:sp>
+        <p:nvSpPr>
+          <p:cNvPr id="4" name="equation card"/>
           <p:cNvSpPr/>
           <p:nvPr/>
         </p:nvSpPr>
         <p:spPr>
           <a:xfrm>
-            <a:off x="5760720" y="1463040"/>
-            <a:ext cx="2377440" cy="914400"/>
+            <a:off x="548640" y="5074920"/>
+            <a:ext cx="6949440" cy="1188720"/>
           </a:xfrm>
           <a:prstGeom prst="roundRect">
             <a:avLst>
-              <a:gd name="adj" fmla="val 8000"/>
-            </a:avLst>
-          </a:prstGeom>
-          <a:solidFill>
-            <a:srgbClr val="0B3D2E"/>
-          </a:solidFill>
-          <a:ln w="12700">
-            <a:solidFill>
-              <a:srgbClr val="0B3D2E"/>
-            </a:solidFill>
-            <a:prstDash val="solid"/>
-          </a:ln>
-        </p:spPr>
-      </p:sp>
-      <p:sp>
-        <p:nvSpPr>
-          <p:cNvPr id="7" name="Text 5"/>
-          <p:cNvSpPr txBox="1"/>
-          <p:nvPr/>
-        </p:nvSpPr>
-        <p:spPr>
-          <a:xfrm>
-            <a:off x="5760720" y="1463040"/>
-            <a:ext cx="2377440" cy="914400"/>
-          </a:xfrm>
-          <a:prstGeom prst="rect">
-            <a:avLst/>
-          </a:prstGeom>
-          <a:noFill/>
-          <a:ln/>
-        </p:spPr>
-        <p:txBody>
-          <a:bodyPr wrap="square" lIns="50800" tIns="50800" rIns="50800" bIns="50800" rtlCol="0" anchor="ctr"/>
-          <a:lstStyle/>
-          <a:p>
-            <a:pPr algn="ctr" indent="0" marL="0">
-              <a:buNone/>
-            </a:pPr>
-            <a:r>
-              <a:rPr lang="en-US" sz="1500" b="1" dirty="0">
-                <a:solidFill>
-                  <a:srgbClr val="FFFFFF"/>
-                </a:solidFill>
-              </a:rPr>
-              <a:t>Score above threshold?</a:t>
-            </a:r>
-            <a:endParaRPr lang="en-US" sz="1500" dirty="0"/>
-          </a:p>
-        </p:txBody>
-      </p:sp>
-      <p:sp>
-        <p:nvSpPr>
-          <p:cNvPr id="8" name="yes box"/>
-          <p:cNvSpPr/>
-          <p:nvPr/>
-        </p:nvSpPr>
-        <p:spPr>
-          <a:xfrm>
-            <a:off x="8778240" y="1005840"/>
-            <a:ext cx="2834640" cy="822960"/>
-          </a:xfrm>
-          <a:prstGeom prst="roundRect">
-            <a:avLst>
-              <a:gd name="adj" fmla="val 8889"/>
-            </a:avLst>
-          </a:prstGeom>
-          <a:solidFill>
-            <a:srgbClr val="0B6E4F"/>
-          </a:solidFill>
-          <a:ln w="12700">
-            <a:solidFill>
-              <a:srgbClr val="0B6E4F"/>
-            </a:solidFill>
-            <a:prstDash val="solid"/>
-          </a:ln>
-        </p:spPr>
-      </p:sp>
-      <p:sp>
-        <p:nvSpPr>
-          <p:cNvPr id="9" name="Text 7"/>
-          <p:cNvSpPr txBox="1"/>
-          <p:nvPr/>
-        </p:nvSpPr>
-        <p:spPr>
-          <a:xfrm>
-            <a:off x="8778240" y="1005840"/>
-            <a:ext cx="2834640" cy="822960"/>
-          </a:xfrm>
-          <a:prstGeom prst="rect">
-            <a:avLst/>
-          </a:prstGeom>
-          <a:noFill/>
-          <a:ln/>
-        </p:spPr>
-        <p:txBody>
-          <a:bodyPr wrap="square" lIns="50800" tIns="50800" rIns="50800" bIns="50800" rtlCol="0" anchor="ctr"/>
-          <a:lstStyle/>
-          <a:p>
-            <a:pPr algn="ctr" indent="0" marL="0">
-              <a:buNone/>
-            </a:pPr>
-            <a:r>
-              <a:rPr lang="en-US" sz="1500" b="1" dirty="0">
-                <a:solidFill>
-                  <a:srgbClr val="FFFFFF"/>
-                </a:solidFill>
-              </a:rPr>
-              <a:t>"Likely genuine"</a:t>
-            </a:r>
-            <a:endParaRPr lang="en-US" sz="1500" dirty="0"/>
-          </a:p>
-        </p:txBody>
-      </p:sp>
-      <p:sp>
-        <p:nvSpPr>
-          <p:cNvPr id="10" name="no box"/>
-          <p:cNvSpPr/>
-          <p:nvPr/>
-        </p:nvSpPr>
-        <p:spPr>
-          <a:xfrm>
-            <a:off x="8778240" y="2103120"/>
-            <a:ext cx="2834640" cy="822960"/>
-          </a:xfrm>
-          <a:prstGeom prst="roundRect">
-            <a:avLst>
-              <a:gd name="adj" fmla="val 8889"/>
-            </a:avLst>
-          </a:prstGeom>
-          <a:solidFill>
-            <a:srgbClr val="F2A541"/>
-          </a:solidFill>
-          <a:ln w="12700">
-            <a:solidFill>
-              <a:srgbClr val="F2A541"/>
-            </a:solidFill>
-            <a:prstDash val="solid"/>
-          </a:ln>
-        </p:spPr>
-      </p:sp>
-      <p:sp>
-        <p:nvSpPr>
-          <p:cNvPr id="11" name="Text 9"/>
-          <p:cNvSpPr txBox="1"/>
-          <p:nvPr/>
-        </p:nvSpPr>
-        <p:spPr>
-          <a:xfrm>
-            <a:off x="8778240" y="2103120"/>
-            <a:ext cx="2834640" cy="822960"/>
-          </a:xfrm>
-          <a:prstGeom prst="rect">
-            <a:avLst/>
-          </a:prstGeom>
-          <a:noFill/>
-          <a:ln/>
-        </p:spPr>
-        <p:txBody>
-          <a:bodyPr wrap="square" lIns="50800" tIns="50800" rIns="50800" bIns="50800" rtlCol="0" anchor="ctr"/>
-          <a:lstStyle/>
-          <a:p>
-            <a:pPr algn="ctr" indent="0" marL="0">
-              <a:buNone/>
-            </a:pPr>
-            <a:r>
-              <a:rPr lang="en-US" sz="1500" b="1" dirty="0">
-                <a:solidFill>
-                  <a:srgbClr val="1B1F23"/>
-                </a:solidFill>
-              </a:rPr>
-              <a:t>"Check by hand"</a:t>
-            </a:r>
-            <a:endParaRPr lang="en-US" sz="1500" dirty="0"/>
-          </a:p>
-        </p:txBody>
-      </p:sp>
-      <p:sp>
-        <p:nvSpPr>
-          <p:cNvPr id="12" name="arrow yes"/>
-          <p:cNvSpPr/>
-          <p:nvPr/>
-        </p:nvSpPr>
-        <p:spPr>
-          <a:xfrm flipV="1">
-            <a:off x="8138160" y="1417320"/>
-            <a:ext cx="640080" cy="411480"/>
-          </a:xfrm>
-          <a:prstGeom prst="line">
-            <a:avLst/>
-          </a:prstGeom>
-          <a:noFill/>
-          <a:ln w="25400">
-            <a:solidFill>
-              <a:srgbClr val="6B7B76"/>
-            </a:solidFill>
-            <a:prstDash val="solid"/>
-            <a:tailEnd type="triangle"/>
-          </a:ln>
-        </p:spPr>
-      </p:sp>
-      <p:sp>
-        <p:nvSpPr>
-          <p:cNvPr id="13" name="arrow no"/>
-          <p:cNvSpPr/>
-          <p:nvPr/>
-        </p:nvSpPr>
-        <p:spPr>
-          <a:xfrm>
-            <a:off x="8138160" y="2011680"/>
-            <a:ext cx="640080" cy="502920"/>
-          </a:xfrm>
-          <a:prstGeom prst="line">
-            <a:avLst/>
-          </a:prstGeom>
-          <a:noFill/>
-          <a:ln w="25400">
-            <a:solidFill>
-              <a:srgbClr val="6B7B76"/>
-            </a:solidFill>
-            <a:prstDash val="solid"/>
-            <a:tailEnd type="triangle"/>
-          </a:ln>
-        </p:spPr>
-      </p:sp>
-      <p:sp>
-        <p:nvSpPr>
-          <p:cNvPr id="14" name="Text 12"/>
-          <p:cNvSpPr txBox="1"/>
-          <p:nvPr/>
-        </p:nvSpPr>
-        <p:spPr>
-          <a:xfrm>
-            <a:off x="8229600" y="1234440"/>
-            <a:ext cx="548640" cy="274320"/>
-          </a:xfrm>
-          <a:prstGeom prst="rect">
-            <a:avLst/>
-          </a:prstGeom>
-          <a:noFill/>
-          <a:ln/>
-        </p:spPr>
-        <p:txBody>
-          <a:bodyPr wrap="square" lIns="0" tIns="0" rIns="0" bIns="0" rtlCol="0" anchor="t"/>
-          <a:lstStyle/>
-          <a:p>
-            <a:pPr indent="0" marL="0">
-              <a:buNone/>
-            </a:pPr>
-            <a:r>
-              <a:rPr lang="en-US" sz="1200" dirty="0">
-                <a:solidFill>
-                  <a:schemeClr val="accent5"/>
-                </a:solidFill>
-              </a:rPr>
-              <a:t>yes</a:t>
-            </a:r>
-            <a:endParaRPr lang="en-US" sz="1200" dirty="0"/>
-          </a:p>
-        </p:txBody>
-      </p:sp>
-      <p:sp>
-        <p:nvSpPr>
-          <p:cNvPr id="15" name="Text 13"/>
-          <p:cNvSpPr txBox="1"/>
-          <p:nvPr/>
-        </p:nvSpPr>
-        <p:spPr>
-          <a:xfrm>
-            <a:off x="8229600" y="2331720"/>
-            <a:ext cx="548640" cy="274320"/>
-          </a:xfrm>
-          <a:prstGeom prst="rect">
-            <a:avLst/>
-          </a:prstGeom>
-          <a:noFill/>
-          <a:ln/>
-        </p:spPr>
-        <p:txBody>
-          <a:bodyPr wrap="square" lIns="0" tIns="0" rIns="0" bIns="0" rtlCol="0" anchor="t"/>
-          <a:lstStyle/>
-          <a:p>
-            <a:pPr indent="0" marL="0">
-              <a:buNone/>
-            </a:pPr>
-            <a:r>
-              <a:rPr lang="en-US" sz="1200" dirty="0">
-                <a:solidFill>
-                  <a:schemeClr val="accent5"/>
-                </a:solidFill>
-              </a:rPr>
-              <a:t>no</a:t>
-            </a:r>
-            <a:endParaRPr lang="en-US" sz="1200" dirty="0"/>
-          </a:p>
-        </p:txBody>
-      </p:sp>
-      <p:sp>
-        <p:nvSpPr>
-          <p:cNvPr id="16" name="cost card"/>
-          <p:cNvSpPr/>
-          <p:nvPr/>
-        </p:nvSpPr>
-        <p:spPr>
-          <a:xfrm>
-            <a:off x="5760720" y="3429000"/>
-            <a:ext cx="5852160" cy="2377440"/>
-          </a:xfrm>
-          <a:prstGeom prst="roundRect">
-            <a:avLst>
-              <a:gd name="adj" fmla="val 3077"/>
+              <a:gd name="adj" fmla="val 6154"/>
             </a:avLst>
           </a:prstGeom>
           <a:solidFill>
@@ -5161,63 +4765,105 @@
       </p:sp>
       <p:sp>
         <p:nvSpPr>
-          <p:cNvPr id="17" name="cost circle"/>
+          <p:cNvPr id="5" name="Text 2"/>
+          <p:cNvSpPr txBox="1"/>
+          <p:nvPr/>
+        </p:nvSpPr>
+        <p:spPr>
+          <a:xfrm>
+            <a:off x="731520" y="5166360"/>
+            <a:ext cx="6675120" cy="1005840"/>
+          </a:xfrm>
+          <a:prstGeom prst="rect">
+            <a:avLst/>
+          </a:prstGeom>
+          <a:noFill/>
+          <a:ln/>
+        </p:spPr>
+        <p:txBody>
+          <a:bodyPr wrap="square" lIns="0" tIns="0" rIns="0" bIns="0" rtlCol="0" anchor="t"/>
+          <a:lstStyle/>
+          <a:p>
+            <a:pPr indent="0" marL="0">
+              <a:buNone/>
+            </a:pPr>
+            <a:r>
+              <a:rPr lang="en-US" sz="1400" dirty="0">
+                <a:solidFill>
+                  <a:schemeClr val="tx2"/>
+                </a:solidFill>
+              </a:rPr>
+              <a:t>1. Remove the lamp:  Q = I / (G∗I)</a:t>
+            </a:r>
+            <a:endParaRPr lang="en-US" sz="1400" dirty="0"/>
+          </a:p>
+          <a:p>
+            <a:pPr indent="0" marL="0">
+              <a:buNone/>
+            </a:pPr>
+            <a:r>
+              <a:rPr lang="en-US" sz="1400" dirty="0">
+                <a:solidFill>
+                  <a:schemeClr val="tx2"/>
+                </a:solidFill>
+              </a:rPr>
+              <a:t>2. Genuine portrait of the note value:  T = median of Q over genuine training notes</a:t>
+            </a:r>
+            <a:endParaRPr lang="en-US" sz="1400" dirty="0"/>
+          </a:p>
+          <a:p>
+            <a:pPr indent="0" marL="0">
+              <a:buNone/>
+            </a:pPr>
+            <a:r>
+              <a:rPr lang="en-US" sz="1400" dirty="0">
+                <a:solidFill>
+                  <a:schemeClr val="tx2"/>
+                </a:solidFill>
+              </a:rPr>
+              <a:t>3. Residual R = Q − T  →  two small CNN streams + 4 summary numbers  →  "watermark clear?"</a:t>
+            </a:r>
+            <a:endParaRPr lang="en-US" sz="1400" dirty="0"/>
+          </a:p>
+        </p:txBody>
+      </p:sp>
+      <p:sp>
+        <p:nvSpPr>
+          <p:cNvPr id="6" name="dmwr card 1"/>
           <p:cNvSpPr/>
           <p:nvPr/>
         </p:nvSpPr>
         <p:spPr>
           <a:xfrm>
-            <a:off x="5989320" y="3703320"/>
-            <a:ext cx="731520" cy="731520"/>
-          </a:xfrm>
-          <a:prstGeom prst="ellipse">
-            <a:avLst/>
+            <a:off x="7955280" y="1234440"/>
+            <a:ext cx="3657600" cy="1508760"/>
+          </a:xfrm>
+          <a:prstGeom prst="roundRect">
+            <a:avLst>
+              <a:gd name="adj" fmla="val 4848"/>
+            </a:avLst>
           </a:prstGeom>
           <a:solidFill>
-            <a:srgbClr val="E4572E"/>
+            <a:schemeClr val="bg2"/>
           </a:solidFill>
           <a:ln w="12700">
             <a:solidFill>
-              <a:srgbClr val="E4572E"/>
+              <a:schemeClr val="bg2"/>
             </a:solidFill>
             <a:prstDash val="solid"/>
           </a:ln>
         </p:spPr>
       </p:sp>
-      <p:pic>
-        <p:nvPicPr>
-          <p:cNvPr id="18" name="cost icon" descr="preencoded.png">    </p:cNvPr>
-          <p:cNvPicPr>
-            <a:picLocks noChangeAspect="1"/>
-          </p:cNvPicPr>
-          <p:nvPr/>
-        </p:nvPicPr>
-        <p:blipFill>
-          <a:blip r:embed="rId1"/>
-          <a:stretch>
-            <a:fillRect/>
-          </a:stretch>
-        </p:blipFill>
-        <p:spPr>
-          <a:xfrm>
-            <a:off x="6150254" y="3864254"/>
-            <a:ext cx="409651" cy="409651"/>
-          </a:xfrm>
-          <a:prstGeom prst="rect">
-            <a:avLst/>
-          </a:prstGeom>
-        </p:spPr>
-      </p:pic>
-      <p:sp>
-        <p:nvSpPr>
-          <p:cNvPr id="19" name="Text 16"/>
+      <p:sp>
+        <p:nvSpPr>
+          <p:cNvPr id="7" name="Text 4"/>
           <p:cNvSpPr txBox="1"/>
           <p:nvPr/>
         </p:nvSpPr>
         <p:spPr>
           <a:xfrm>
-            <a:off x="6903720" y="3657600"/>
-            <a:ext cx="4480560" cy="411480"/>
+            <a:off x="8138160" y="1325880"/>
+            <a:ext cx="3291840" cy="731520"/>
           </a:xfrm>
           <a:prstGeom prst="rect">
             <a:avLst/>
@@ -5226,34 +4872,37 @@
           <a:ln/>
         </p:spPr>
         <p:txBody>
-          <a:bodyPr wrap="square" lIns="0" tIns="0" rIns="0" bIns="0" rtlCol="0" anchor="t"/>
+          <a:bodyPr wrap="square" lIns="0" tIns="0" rIns="0" bIns="0" rtlCol="0" anchor="ctr"/>
           <a:lstStyle/>
           <a:p>
             <a:pPr indent="0" marL="0">
               <a:buNone/>
             </a:pPr>
             <a:r>
-              <a:rPr lang="en-US" sz="2000" b="1" dirty="0">
-                <a:solidFill>
-                  <a:schemeClr val="tx2"/>
-                </a:solidFill>
-              </a:rPr>
-              <a:t>The price of safety</a:t>
-            </a:r>
-            <a:endParaRPr lang="en-US" sz="2000" dirty="0"/>
-          </a:p>
-        </p:txBody>
-      </p:sp>
-      <p:sp>
-        <p:nvSpPr>
-          <p:cNvPr id="20" name="Text 17"/>
+              <a:rPr lang="en-US" sz="3600" b="1" dirty="0">
+                <a:solidFill>
+                  <a:srgbClr val="0B6E4F"/>
+                </a:solidFill>
+                <a:latin typeface="Cambria" pitchFamily="34" charset="0"/>
+                <a:ea typeface="Cambria" pitchFamily="34" charset="-122"/>
+                <a:cs typeface="Cambria" pitchFamily="34" charset="-120"/>
+              </a:rPr>
+              <a:t>91.5%</a:t>
+            </a:r>
+            <a:endParaRPr lang="en-US" sz="3600" dirty="0"/>
+          </a:p>
+        </p:txBody>
+      </p:sp>
+      <p:sp>
+        <p:nvSpPr>
+          <p:cNvPr id="8" name="Text 5"/>
           <p:cNvSpPr txBox="1"/>
           <p:nvPr/>
         </p:nvSpPr>
         <p:spPr>
           <a:xfrm>
-            <a:off x="6903720" y="4114800"/>
-            <a:ext cx="4480560" cy="1554480"/>
+            <a:off x="8138160" y="2057400"/>
+            <a:ext cx="3291840" cy="594360"/>
           </a:xfrm>
           <a:prstGeom prst="rect">
             <a:avLst/>
@@ -5269,14 +4918,218 @@
               <a:buNone/>
             </a:pPr>
             <a:r>
-              <a:rPr lang="en-US" sz="1500" dirty="0">
+              <a:rPr lang="en-US" sz="1400" dirty="0">
                 <a:solidFill>
                   <a:schemeClr val="tx1"/>
                 </a:solidFill>
               </a:rPr>
-              <a:t>On close-up views 57.5% of genuine notes are confirmed, but on whole-note photos only 0.4–2%. Most notes go to "check by hand".</a:t>
-            </a:r>
-            <a:endParaRPr lang="en-US" sz="1500" dirty="0"/>
+              <a:t>on unseen counterfeit prints (3 seeds, ±0.3)</a:t>
+            </a:r>
+            <a:endParaRPr lang="en-US" sz="1400" dirty="0"/>
+          </a:p>
+        </p:txBody>
+      </p:sp>
+      <p:sp>
+        <p:nvSpPr>
+          <p:cNvPr id="9" name="dmwr card 2"/>
+          <p:cNvSpPr/>
+          <p:nvPr/>
+        </p:nvSpPr>
+        <p:spPr>
+          <a:xfrm>
+            <a:off x="7955280" y="2926080"/>
+            <a:ext cx="3657600" cy="1508760"/>
+          </a:xfrm>
+          <a:prstGeom prst="roundRect">
+            <a:avLst>
+              <a:gd name="adj" fmla="val 4848"/>
+            </a:avLst>
+          </a:prstGeom>
+          <a:solidFill>
+            <a:schemeClr val="bg2"/>
+          </a:solidFill>
+          <a:ln w="12700">
+            <a:solidFill>
+              <a:schemeClr val="bg2"/>
+            </a:solidFill>
+            <a:prstDash val="solid"/>
+          </a:ln>
+        </p:spPr>
+      </p:sp>
+      <p:sp>
+        <p:nvSpPr>
+          <p:cNvPr id="10" name="Text 7"/>
+          <p:cNvSpPr txBox="1"/>
+          <p:nvPr/>
+        </p:nvSpPr>
+        <p:spPr>
+          <a:xfrm>
+            <a:off x="8138160" y="3017520"/>
+            <a:ext cx="3291840" cy="731520"/>
+          </a:xfrm>
+          <a:prstGeom prst="rect">
+            <a:avLst/>
+          </a:prstGeom>
+          <a:noFill/>
+          <a:ln/>
+        </p:spPr>
+        <p:txBody>
+          <a:bodyPr wrap="square" lIns="0" tIns="0" rIns="0" bIns="0" rtlCol="0" anchor="ctr"/>
+          <a:lstStyle/>
+          <a:p>
+            <a:pPr indent="0" marL="0">
+              <a:buNone/>
+            </a:pPr>
+            <a:r>
+              <a:rPr lang="en-US" sz="3600" b="1" dirty="0">
+                <a:solidFill>
+                  <a:srgbClr val="0B6E4F"/>
+                </a:solidFill>
+                <a:latin typeface="Cambria" pitchFamily="34" charset="0"/>
+                <a:ea typeface="Cambria" pitchFamily="34" charset="-122"/>
+                <a:cs typeface="Cambria" pitchFamily="34" charset="-120"/>
+              </a:rPr>
+              <a:t>47,818</a:t>
+            </a:r>
+            <a:endParaRPr lang="en-US" sz="3600" dirty="0"/>
+          </a:p>
+        </p:txBody>
+      </p:sp>
+      <p:sp>
+        <p:nvSpPr>
+          <p:cNvPr id="11" name="Text 8"/>
+          <p:cNvSpPr txBox="1"/>
+          <p:nvPr/>
+        </p:nvSpPr>
+        <p:spPr>
+          <a:xfrm>
+            <a:off x="8138160" y="3749040"/>
+            <a:ext cx="3291840" cy="594360"/>
+          </a:xfrm>
+          <a:prstGeom prst="rect">
+            <a:avLst/>
+          </a:prstGeom>
+          <a:noFill/>
+          <a:ln/>
+        </p:spPr>
+        <p:txBody>
+          <a:bodyPr wrap="square" lIns="0" tIns="0" rIns="0" bIns="0" rtlCol="0" anchor="t"/>
+          <a:lstStyle/>
+          <a:p>
+            <a:pPr indent="0" marL="0">
+              <a:buNone/>
+            </a:pPr>
+            <a:r>
+              <a:rPr lang="en-US" sz="1400" dirty="0">
+                <a:solidFill>
+                  <a:schemeClr val="tx1"/>
+                </a:solidFill>
+              </a:rPr>
+              <a:t>parameters, 0.21 MB: 46× smaller than MobileNetV2</a:t>
+            </a:r>
+            <a:endParaRPr lang="en-US" sz="1400" dirty="0"/>
+          </a:p>
+        </p:txBody>
+      </p:sp>
+      <p:sp>
+        <p:nvSpPr>
+          <p:cNvPr id="12" name="dmwr card 3"/>
+          <p:cNvSpPr/>
+          <p:nvPr/>
+        </p:nvSpPr>
+        <p:spPr>
+          <a:xfrm>
+            <a:off x="7955280" y="4617720"/>
+            <a:ext cx="3657600" cy="1508760"/>
+          </a:xfrm>
+          <a:prstGeom prst="roundRect">
+            <a:avLst>
+              <a:gd name="adj" fmla="val 4848"/>
+            </a:avLst>
+          </a:prstGeom>
+          <a:solidFill>
+            <a:schemeClr val="bg2"/>
+          </a:solidFill>
+          <a:ln w="12700">
+            <a:solidFill>
+              <a:schemeClr val="bg2"/>
+            </a:solidFill>
+            <a:prstDash val="solid"/>
+          </a:ln>
+        </p:spPr>
+      </p:sp>
+      <p:sp>
+        <p:nvSpPr>
+          <p:cNvPr id="13" name="Text 10"/>
+          <p:cNvSpPr txBox="1"/>
+          <p:nvPr/>
+        </p:nvSpPr>
+        <p:spPr>
+          <a:xfrm>
+            <a:off x="8138160" y="4709160"/>
+            <a:ext cx="3291840" cy="731520"/>
+          </a:xfrm>
+          <a:prstGeom prst="rect">
+            <a:avLst/>
+          </a:prstGeom>
+          <a:noFill/>
+          <a:ln/>
+        </p:spPr>
+        <p:txBody>
+          <a:bodyPr wrap="square" lIns="0" tIns="0" rIns="0" bIns="0" rtlCol="0" anchor="ctr"/>
+          <a:lstStyle/>
+          <a:p>
+            <a:pPr indent="0" marL="0">
+              <a:buNone/>
+            </a:pPr>
+            <a:r>
+              <a:rPr lang="en-US" sz="3600" b="1" dirty="0">
+                <a:solidFill>
+                  <a:srgbClr val="0B6E4F"/>
+                </a:solidFill>
+                <a:latin typeface="Cambria" pitchFamily="34" charset="0"/>
+                <a:ea typeface="Cambria" pitchFamily="34" charset="-122"/>
+                <a:cs typeface="Cambria" pitchFamily="34" charset="-120"/>
+              </a:rPr>
+              <a:t>p ≥ 0.375</a:t>
+            </a:r>
+            <a:endParaRPr lang="en-US" sz="3600" dirty="0"/>
+          </a:p>
+        </p:txBody>
+      </p:sp>
+      <p:sp>
+        <p:nvSpPr>
+          <p:cNvPr id="14" name="Text 11"/>
+          <p:cNvSpPr txBox="1"/>
+          <p:nvPr/>
+        </p:nvSpPr>
+        <p:spPr>
+          <a:xfrm>
+            <a:off x="8138160" y="5440680"/>
+            <a:ext cx="3291840" cy="594360"/>
+          </a:xfrm>
+          <a:prstGeom prst="rect">
+            <a:avLst/>
+          </a:prstGeom>
+          <a:noFill/>
+          <a:ln/>
+        </p:spPr>
+        <p:txBody>
+          <a:bodyPr wrap="square" lIns="0" tIns="0" rIns="0" bIns="0" rtlCol="0" anchor="t"/>
+          <a:lstStyle/>
+          <a:p>
+            <a:pPr indent="0" marL="0">
+              <a:buNone/>
+            </a:pPr>
+            <a:r>
+              <a:rPr lang="en-US" sz="1400" dirty="0">
+                <a:solidFill>
+                  <a:schemeClr val="tx1"/>
+                </a:solidFill>
+              </a:rPr>
+              <a:t>no significant difference from MobileNetV2 (92.9%)</a:t>
+            </a:r>
+            <a:endParaRPr lang="en-US" sz="1400" dirty="0"/>
           </a:p>
         </p:txBody>
       </p:sp>
@@ -5382,38 +5235,22 @@
                   <a:schemeClr val="tx2"/>
                 </a:solidFill>
               </a:rPr>
-              <a:t>Bangla reading: error cut by three quarters</a:t>
+              <a:t>Safe before decisive: the glass never says "counterfeit"</a:t>
             </a:r>
             <a:endParaRPr lang="en-US" sz="3200" dirty="0"/>
           </a:p>
         </p:txBody>
       </p:sp>
-      <p:graphicFrame>
-        <p:nvGraphicFramePr>
-          <p:cNvPr id="3" name="Chart 0" descr=""/>
-          <p:cNvGraphicFramePr/>
-          <p:nvPr/>
-        </p:nvGraphicFramePr>
-        <p:xfrm>
-          <a:off x="548640" y="1325880"/>
-          <a:ext cx="6766560" cy="4572000"/>
-        </p:xfrm>
-        <a:graphic xmlns:a="http://schemas.openxmlformats.org/drawingml/2006/main">
-          <a:graphicData uri="http://schemas.openxmlformats.org/drawingml/2006/chart">
-            <c:chart xmlns:c="http://schemas.openxmlformats.org/drawingml/2006/chart" r:id="rId1"/>
-          </a:graphicData>
-        </a:graphic>
-      </p:graphicFrame>
-      <p:sp>
-        <p:nvSpPr>
-          <p:cNvPr id="4" name="Text 1"/>
+      <p:sp>
+        <p:nvSpPr>
+          <p:cNvPr id="3" name="Text 1"/>
           <p:cNvSpPr txBox="1"/>
           <p:nvPr/>
         </p:nvSpPr>
         <p:spPr>
           <a:xfrm>
-            <a:off x="7772400" y="1371600"/>
-            <a:ext cx="3840480" cy="411480"/>
+            <a:off x="548640" y="1463040"/>
+            <a:ext cx="4572000" cy="1371600"/>
           </a:xfrm>
           <a:prstGeom prst="rect">
             <a:avLst/>
@@ -5422,110 +5259,37 @@
           <a:ln/>
         </p:spPr>
         <p:txBody>
-          <a:bodyPr wrap="square" lIns="0" tIns="0" rIns="0" bIns="0" rtlCol="0" anchor="t"/>
+          <a:bodyPr wrap="square" lIns="0" tIns="0" rIns="0" bIns="0" rtlCol="0" anchor="ctr"/>
           <a:lstStyle/>
           <a:p>
             <a:pPr indent="0" marL="0">
               <a:buNone/>
             </a:pPr>
             <a:r>
-              <a:rPr lang="en-US" sz="2000" b="1" dirty="0">
+              <a:rPr lang="en-US" sz="8000" b="1" dirty="0">
                 <a:solidFill>
                   <a:schemeClr val="accent1"/>
                 </a:solidFill>
-              </a:rPr>
-              <a:t>What helped</a:t>
-            </a:r>
-            <a:endParaRPr lang="en-US" sz="2000" dirty="0"/>
-          </a:p>
-        </p:txBody>
-      </p:sp>
-      <p:sp>
-        <p:nvSpPr>
-          <p:cNvPr id="5" name="Text 2"/>
+                <a:latin typeface="Cambria" pitchFamily="34" charset="0"/>
+                <a:ea typeface="Cambria" pitchFamily="34" charset="-122"/>
+                <a:cs typeface="Cambria" pitchFamily="34" charset="-120"/>
+              </a:rPr>
+              <a:t>0 / 88</a:t>
+            </a:r>
+            <a:endParaRPr lang="en-US" sz="8000" dirty="0"/>
+          </a:p>
+        </p:txBody>
+      </p:sp>
+      <p:sp>
+        <p:nvSpPr>
+          <p:cNvPr id="4" name="Text 2"/>
           <p:cNvSpPr txBox="1"/>
           <p:nvPr/>
         </p:nvSpPr>
         <p:spPr>
           <a:xfrm>
-            <a:off x="7772400" y="1828800"/>
-            <a:ext cx="3840480" cy="1371600"/>
-          </a:xfrm>
-          <a:prstGeom prst="rect">
-            <a:avLst/>
-          </a:prstGeom>
-          <a:noFill/>
-          <a:ln/>
-        </p:spPr>
-        <p:txBody>
-          <a:bodyPr wrap="square" lIns="0" tIns="0" rIns="0" bIns="0" rtlCol="0" anchor="t"/>
-          <a:lstStyle/>
-          <a:p>
-            <a:pPr marL="342900" indent="-342900">
-              <a:spcAft>
-                <a:spcPts val="600"/>
-              </a:spcAft>
-              <a:buSzPct val="100000"/>
-              <a:buChar char="•"/>
-            </a:pPr>
-            <a:r>
-              <a:rPr lang="en-US" sz="1500" dirty="0">
-                <a:solidFill>
-                  <a:schemeClr val="tx1"/>
-                </a:solidFill>
-              </a:rPr>
-              <a:t>Reading only the main block of text</a:t>
-            </a:r>
-            <a:endParaRPr lang="en-US" sz="1500" dirty="0"/>
-          </a:p>
-          <a:p>
-            <a:pPr marL="342900" indent="-342900">
-              <a:spcAft>
-                <a:spcPts val="600"/>
-              </a:spcAft>
-              <a:buSzPct val="100000"/>
-              <a:buChar char="•"/>
-            </a:pPr>
-            <a:r>
-              <a:rPr lang="en-US" sz="1500" dirty="0">
-                <a:solidFill>
-                  <a:schemeClr val="tx1"/>
-                </a:solidFill>
-              </a:rPr>
-              <a:t>Tuned detector settings, CLAHE</a:t>
-            </a:r>
-            <a:endParaRPr lang="en-US" sz="1500" dirty="0"/>
-          </a:p>
-          <a:p>
-            <a:pPr marL="342900" indent="-342900">
-              <a:spcAft>
-                <a:spcPts val="600"/>
-              </a:spcAft>
-              <a:buSzPct val="100000"/>
-              <a:buChar char="•"/>
-            </a:pPr>
-            <a:r>
-              <a:rPr lang="en-US" sz="1500" dirty="0">
-                <a:solidFill>
-                  <a:schemeClr val="tx1"/>
-                </a:solidFill>
-              </a:rPr>
-              <a:t>Simple clean-up rules</a:t>
-            </a:r>
-            <a:endParaRPr lang="en-US" sz="1500" dirty="0"/>
-          </a:p>
-        </p:txBody>
-      </p:sp>
-      <p:sp>
-        <p:nvSpPr>
-          <p:cNvPr id="6" name="Text 3"/>
-          <p:cNvSpPr txBox="1"/>
-          <p:nvPr/>
-        </p:nvSpPr>
-        <p:spPr>
-          <a:xfrm>
-            <a:off x="7772400" y="3383280"/>
-            <a:ext cx="3840480" cy="411480"/>
+            <a:off x="548640" y="2834640"/>
+            <a:ext cx="4572000" cy="457200"/>
           </a:xfrm>
           <a:prstGeom prst="rect">
             <a:avLst/>
@@ -5541,103 +5305,27 @@
               <a:buNone/>
             </a:pPr>
             <a:r>
-              <a:rPr lang="en-US" sz="2000" b="1" dirty="0">
-                <a:solidFill>
-                  <a:schemeClr val="accent2"/>
-                </a:solidFill>
-              </a:rPr>
-              <a:t>What did not</a:t>
-            </a:r>
-            <a:endParaRPr lang="en-US" sz="2000" dirty="0"/>
-          </a:p>
-        </p:txBody>
-      </p:sp>
-      <p:sp>
-        <p:nvSpPr>
-          <p:cNvPr id="7" name="Text 4"/>
+              <a:rPr lang="en-US" sz="1800" dirty="0">
+                <a:solidFill>
+                  <a:schemeClr val="tx1"/>
+                </a:solidFill>
+              </a:rPr>
+              <a:t>test counterfeits passed as "likely genuine"</a:t>
+            </a:r>
+            <a:endParaRPr lang="en-US" sz="1800" dirty="0"/>
+          </a:p>
+        </p:txBody>
+      </p:sp>
+      <p:sp>
+        <p:nvSpPr>
+          <p:cNvPr id="5" name="Text 3"/>
           <p:cNvSpPr txBox="1"/>
           <p:nvPr/>
         </p:nvSpPr>
         <p:spPr>
           <a:xfrm>
-            <a:off x="7772400" y="3840480"/>
-            <a:ext cx="3840480" cy="1371600"/>
-          </a:xfrm>
-          <a:prstGeom prst="rect">
-            <a:avLst/>
-          </a:prstGeom>
-          <a:noFill/>
-          <a:ln/>
-        </p:spPr>
-        <p:txBody>
-          <a:bodyPr wrap="square" lIns="0" tIns="0" rIns="0" bIns="0" rtlCol="0" anchor="t"/>
-          <a:lstStyle/>
-          <a:p>
-            <a:pPr marL="342900" indent="-342900">
-              <a:spcAft>
-                <a:spcPts val="600"/>
-              </a:spcAft>
-              <a:buSzPct val="100000"/>
-              <a:buChar char="•"/>
-            </a:pPr>
-            <a:r>
-              <a:rPr lang="en-US" sz="1500" dirty="0">
-                <a:solidFill>
-                  <a:schemeClr val="tx1"/>
-                </a:solidFill>
-              </a:rPr>
-              <a:t>Binarisation, multi-scale reading</a:t>
-            </a:r>
-            <a:endParaRPr lang="en-US" sz="1500" dirty="0"/>
-          </a:p>
-          <a:p>
-            <a:pPr marL="342900" indent="-342900">
-              <a:spcAft>
-                <a:spcPts val="600"/>
-              </a:spcAft>
-              <a:buSzPct val="100000"/>
-              <a:buChar char="•"/>
-            </a:pPr>
-            <a:r>
-              <a:rPr lang="en-US" sz="1500" dirty="0">
-                <a:solidFill>
-                  <a:schemeClr val="tx1"/>
-                </a:solidFill>
-              </a:rPr>
-              <a:t>Tesseract, TrOCR, PaddleOCR</a:t>
-            </a:r>
-            <a:endParaRPr lang="en-US" sz="1500" dirty="0"/>
-          </a:p>
-          <a:p>
-            <a:pPr marL="342900" indent="-342900">
-              <a:spcAft>
-                <a:spcPts val="600"/>
-              </a:spcAft>
-              <a:buSzPct val="100000"/>
-              <a:buChar char="•"/>
-            </a:pPr>
-            <a:r>
-              <a:rPr lang="en-US" sz="1500" dirty="0">
-                <a:solidFill>
-                  <a:schemeClr val="tx1"/>
-                </a:solidFill>
-              </a:rPr>
-              <a:t>Dictionaries and language models</a:t>
-            </a:r>
-            <a:endParaRPr lang="en-US" sz="1500" dirty="0"/>
-          </a:p>
-        </p:txBody>
-      </p:sp>
-      <p:sp>
-        <p:nvSpPr>
-          <p:cNvPr id="8" name="Text 5"/>
-          <p:cNvSpPr txBox="1"/>
-          <p:nvPr/>
-        </p:nvSpPr>
-        <p:spPr>
-          <a:xfrm>
-            <a:off x="7772400" y="5349240"/>
-            <a:ext cx="3840480" cy="548640"/>
+            <a:off x="548640" y="3566160"/>
+            <a:ext cx="4572000" cy="1280160"/>
           </a:xfrm>
           <a:prstGeom prst="rect">
             <a:avLst/>
@@ -5653,14 +5341,471 @@
               <a:buNone/>
             </a:pPr>
             <a:r>
-              <a:rPr lang="en-US" sz="1300" i="1" dirty="0">
+              <a:rPr lang="en-US" sz="1500" dirty="0">
                 <a:solidFill>
                   <a:schemeClr val="accent5"/>
                 </a:solidFill>
               </a:rPr>
-              <a:t>Benchmark with correctly shaped Bangla; every choice made on validation data.</a:t>
-            </a:r>
-            <a:endParaRPr lang="en-US" sz="1300" dirty="0"/>
+              <a:t>Threshold = highest score of any validation counterfeit, so a new counterfeit passes with probability 1/(n+1) = 1.1%.</a:t>
+            </a:r>
+            <a:endParaRPr lang="en-US" sz="1500" dirty="0"/>
+          </a:p>
+        </p:txBody>
+      </p:sp>
+      <p:sp>
+        <p:nvSpPr>
+          <p:cNvPr id="6" name="decision box"/>
+          <p:cNvSpPr/>
+          <p:nvPr/>
+        </p:nvSpPr>
+        <p:spPr>
+          <a:xfrm>
+            <a:off x="5760720" y="1463040"/>
+            <a:ext cx="2377440" cy="914400"/>
+          </a:xfrm>
+          <a:prstGeom prst="roundRect">
+            <a:avLst>
+              <a:gd name="adj" fmla="val 8000"/>
+            </a:avLst>
+          </a:prstGeom>
+          <a:solidFill>
+            <a:srgbClr val="0B3D2E"/>
+          </a:solidFill>
+          <a:ln w="12700">
+            <a:solidFill>
+              <a:srgbClr val="0B3D2E"/>
+            </a:solidFill>
+            <a:prstDash val="solid"/>
+          </a:ln>
+        </p:spPr>
+      </p:sp>
+      <p:sp>
+        <p:nvSpPr>
+          <p:cNvPr id="7" name="Text 5"/>
+          <p:cNvSpPr txBox="1"/>
+          <p:nvPr/>
+        </p:nvSpPr>
+        <p:spPr>
+          <a:xfrm>
+            <a:off x="5760720" y="1463040"/>
+            <a:ext cx="2377440" cy="914400"/>
+          </a:xfrm>
+          <a:prstGeom prst="rect">
+            <a:avLst/>
+          </a:prstGeom>
+          <a:noFill/>
+          <a:ln/>
+        </p:spPr>
+        <p:txBody>
+          <a:bodyPr wrap="square" lIns="50800" tIns="50800" rIns="50800" bIns="50800" rtlCol="0" anchor="ctr"/>
+          <a:lstStyle/>
+          <a:p>
+            <a:pPr algn="ctr" indent="0" marL="0">
+              <a:buNone/>
+            </a:pPr>
+            <a:r>
+              <a:rPr lang="en-US" sz="1500" b="1" dirty="0">
+                <a:solidFill>
+                  <a:srgbClr val="FFFFFF"/>
+                </a:solidFill>
+              </a:rPr>
+              <a:t>Score above threshold?</a:t>
+            </a:r>
+            <a:endParaRPr lang="en-US" sz="1500" dirty="0"/>
+          </a:p>
+        </p:txBody>
+      </p:sp>
+      <p:sp>
+        <p:nvSpPr>
+          <p:cNvPr id="8" name="yes box"/>
+          <p:cNvSpPr/>
+          <p:nvPr/>
+        </p:nvSpPr>
+        <p:spPr>
+          <a:xfrm>
+            <a:off x="8778240" y="1005840"/>
+            <a:ext cx="2834640" cy="822960"/>
+          </a:xfrm>
+          <a:prstGeom prst="roundRect">
+            <a:avLst>
+              <a:gd name="adj" fmla="val 8889"/>
+            </a:avLst>
+          </a:prstGeom>
+          <a:solidFill>
+            <a:srgbClr val="0B6E4F"/>
+          </a:solidFill>
+          <a:ln w="12700">
+            <a:solidFill>
+              <a:srgbClr val="0B6E4F"/>
+            </a:solidFill>
+            <a:prstDash val="solid"/>
+          </a:ln>
+        </p:spPr>
+      </p:sp>
+      <p:sp>
+        <p:nvSpPr>
+          <p:cNvPr id="9" name="Text 7"/>
+          <p:cNvSpPr txBox="1"/>
+          <p:nvPr/>
+        </p:nvSpPr>
+        <p:spPr>
+          <a:xfrm>
+            <a:off x="8778240" y="1005840"/>
+            <a:ext cx="2834640" cy="822960"/>
+          </a:xfrm>
+          <a:prstGeom prst="rect">
+            <a:avLst/>
+          </a:prstGeom>
+          <a:noFill/>
+          <a:ln/>
+        </p:spPr>
+        <p:txBody>
+          <a:bodyPr wrap="square" lIns="50800" tIns="50800" rIns="50800" bIns="50800" rtlCol="0" anchor="ctr"/>
+          <a:lstStyle/>
+          <a:p>
+            <a:pPr algn="ctr" indent="0" marL="0">
+              <a:buNone/>
+            </a:pPr>
+            <a:r>
+              <a:rPr lang="en-US" sz="1500" b="1" dirty="0">
+                <a:solidFill>
+                  <a:srgbClr val="FFFFFF"/>
+                </a:solidFill>
+              </a:rPr>
+              <a:t>"Likely genuine"</a:t>
+            </a:r>
+            <a:endParaRPr lang="en-US" sz="1500" dirty="0"/>
+          </a:p>
+        </p:txBody>
+      </p:sp>
+      <p:sp>
+        <p:nvSpPr>
+          <p:cNvPr id="10" name="no box"/>
+          <p:cNvSpPr/>
+          <p:nvPr/>
+        </p:nvSpPr>
+        <p:spPr>
+          <a:xfrm>
+            <a:off x="8778240" y="2103120"/>
+            <a:ext cx="2834640" cy="822960"/>
+          </a:xfrm>
+          <a:prstGeom prst="roundRect">
+            <a:avLst>
+              <a:gd name="adj" fmla="val 8889"/>
+            </a:avLst>
+          </a:prstGeom>
+          <a:solidFill>
+            <a:srgbClr val="F2A541"/>
+          </a:solidFill>
+          <a:ln w="12700">
+            <a:solidFill>
+              <a:srgbClr val="F2A541"/>
+            </a:solidFill>
+            <a:prstDash val="solid"/>
+          </a:ln>
+        </p:spPr>
+      </p:sp>
+      <p:sp>
+        <p:nvSpPr>
+          <p:cNvPr id="11" name="Text 9"/>
+          <p:cNvSpPr txBox="1"/>
+          <p:nvPr/>
+        </p:nvSpPr>
+        <p:spPr>
+          <a:xfrm>
+            <a:off x="8778240" y="2103120"/>
+            <a:ext cx="2834640" cy="822960"/>
+          </a:xfrm>
+          <a:prstGeom prst="rect">
+            <a:avLst/>
+          </a:prstGeom>
+          <a:noFill/>
+          <a:ln/>
+        </p:spPr>
+        <p:txBody>
+          <a:bodyPr wrap="square" lIns="50800" tIns="50800" rIns="50800" bIns="50800" rtlCol="0" anchor="ctr"/>
+          <a:lstStyle/>
+          <a:p>
+            <a:pPr algn="ctr" indent="0" marL="0">
+              <a:buNone/>
+            </a:pPr>
+            <a:r>
+              <a:rPr lang="en-US" sz="1500" b="1" dirty="0">
+                <a:solidFill>
+                  <a:srgbClr val="1B1F23"/>
+                </a:solidFill>
+              </a:rPr>
+              <a:t>"Check by hand"</a:t>
+            </a:r>
+            <a:endParaRPr lang="en-US" sz="1500" dirty="0"/>
+          </a:p>
+        </p:txBody>
+      </p:sp>
+      <p:sp>
+        <p:nvSpPr>
+          <p:cNvPr id="12" name="arrow yes"/>
+          <p:cNvSpPr/>
+          <p:nvPr/>
+        </p:nvSpPr>
+        <p:spPr>
+          <a:xfrm flipV="1">
+            <a:off x="8138160" y="1417320"/>
+            <a:ext cx="640080" cy="411480"/>
+          </a:xfrm>
+          <a:prstGeom prst="line">
+            <a:avLst/>
+          </a:prstGeom>
+          <a:noFill/>
+          <a:ln w="25400">
+            <a:solidFill>
+              <a:srgbClr val="6B7B76"/>
+            </a:solidFill>
+            <a:prstDash val="solid"/>
+            <a:tailEnd type="triangle"/>
+          </a:ln>
+        </p:spPr>
+      </p:sp>
+      <p:sp>
+        <p:nvSpPr>
+          <p:cNvPr id="13" name="arrow no"/>
+          <p:cNvSpPr/>
+          <p:nvPr/>
+        </p:nvSpPr>
+        <p:spPr>
+          <a:xfrm>
+            <a:off x="8138160" y="2011680"/>
+            <a:ext cx="640080" cy="502920"/>
+          </a:xfrm>
+          <a:prstGeom prst="line">
+            <a:avLst/>
+          </a:prstGeom>
+          <a:noFill/>
+          <a:ln w="25400">
+            <a:solidFill>
+              <a:srgbClr val="6B7B76"/>
+            </a:solidFill>
+            <a:prstDash val="solid"/>
+            <a:tailEnd type="triangle"/>
+          </a:ln>
+        </p:spPr>
+      </p:sp>
+      <p:sp>
+        <p:nvSpPr>
+          <p:cNvPr id="14" name="Text 12"/>
+          <p:cNvSpPr txBox="1"/>
+          <p:nvPr/>
+        </p:nvSpPr>
+        <p:spPr>
+          <a:xfrm>
+            <a:off x="8229600" y="1234440"/>
+            <a:ext cx="548640" cy="274320"/>
+          </a:xfrm>
+          <a:prstGeom prst="rect">
+            <a:avLst/>
+          </a:prstGeom>
+          <a:noFill/>
+          <a:ln/>
+        </p:spPr>
+        <p:txBody>
+          <a:bodyPr wrap="square" lIns="0" tIns="0" rIns="0" bIns="0" rtlCol="0" anchor="t"/>
+          <a:lstStyle/>
+          <a:p>
+            <a:pPr indent="0" marL="0">
+              <a:buNone/>
+            </a:pPr>
+            <a:r>
+              <a:rPr lang="en-US" sz="1200" dirty="0">
+                <a:solidFill>
+                  <a:schemeClr val="accent5"/>
+                </a:solidFill>
+              </a:rPr>
+              <a:t>yes</a:t>
+            </a:r>
+            <a:endParaRPr lang="en-US" sz="1200" dirty="0"/>
+          </a:p>
+        </p:txBody>
+      </p:sp>
+      <p:sp>
+        <p:nvSpPr>
+          <p:cNvPr id="15" name="Text 13"/>
+          <p:cNvSpPr txBox="1"/>
+          <p:nvPr/>
+        </p:nvSpPr>
+        <p:spPr>
+          <a:xfrm>
+            <a:off x="8229600" y="2331720"/>
+            <a:ext cx="548640" cy="274320"/>
+          </a:xfrm>
+          <a:prstGeom prst="rect">
+            <a:avLst/>
+          </a:prstGeom>
+          <a:noFill/>
+          <a:ln/>
+        </p:spPr>
+        <p:txBody>
+          <a:bodyPr wrap="square" lIns="0" tIns="0" rIns="0" bIns="0" rtlCol="0" anchor="t"/>
+          <a:lstStyle/>
+          <a:p>
+            <a:pPr indent="0" marL="0">
+              <a:buNone/>
+            </a:pPr>
+            <a:r>
+              <a:rPr lang="en-US" sz="1200" dirty="0">
+                <a:solidFill>
+                  <a:schemeClr val="accent5"/>
+                </a:solidFill>
+              </a:rPr>
+              <a:t>no</a:t>
+            </a:r>
+            <a:endParaRPr lang="en-US" sz="1200" dirty="0"/>
+          </a:p>
+        </p:txBody>
+      </p:sp>
+      <p:sp>
+        <p:nvSpPr>
+          <p:cNvPr id="16" name="cost card"/>
+          <p:cNvSpPr/>
+          <p:nvPr/>
+        </p:nvSpPr>
+        <p:spPr>
+          <a:xfrm>
+            <a:off x="5760720" y="3429000"/>
+            <a:ext cx="5852160" cy="2377440"/>
+          </a:xfrm>
+          <a:prstGeom prst="roundRect">
+            <a:avLst>
+              <a:gd name="adj" fmla="val 3077"/>
+            </a:avLst>
+          </a:prstGeom>
+          <a:solidFill>
+            <a:schemeClr val="bg2"/>
+          </a:solidFill>
+          <a:ln w="12700">
+            <a:solidFill>
+              <a:schemeClr val="bg2"/>
+            </a:solidFill>
+            <a:prstDash val="solid"/>
+          </a:ln>
+        </p:spPr>
+      </p:sp>
+      <p:sp>
+        <p:nvSpPr>
+          <p:cNvPr id="17" name="cost circle"/>
+          <p:cNvSpPr/>
+          <p:nvPr/>
+        </p:nvSpPr>
+        <p:spPr>
+          <a:xfrm>
+            <a:off x="5989320" y="3703320"/>
+            <a:ext cx="731520" cy="731520"/>
+          </a:xfrm>
+          <a:prstGeom prst="ellipse">
+            <a:avLst/>
+          </a:prstGeom>
+          <a:solidFill>
+            <a:srgbClr val="0B6E4F"/>
+          </a:solidFill>
+          <a:ln w="12700">
+            <a:solidFill>
+              <a:srgbClr val="0B6E4F"/>
+            </a:solidFill>
+            <a:prstDash val="solid"/>
+          </a:ln>
+        </p:spPr>
+      </p:sp>
+      <p:pic>
+        <p:nvPicPr>
+          <p:cNvPr id="18" name="cost icon" descr="preencoded.png">    </p:cNvPr>
+          <p:cNvPicPr>
+            <a:picLocks noChangeAspect="1"/>
+          </p:cNvPicPr>
+          <p:nvPr/>
+        </p:nvPicPr>
+        <p:blipFill>
+          <a:blip r:embed="rId1"/>
+          <a:stretch>
+            <a:fillRect/>
+          </a:stretch>
+        </p:blipFill>
+        <p:spPr>
+          <a:xfrm>
+            <a:off x="6150254" y="3864254"/>
+            <a:ext cx="409651" cy="409651"/>
+          </a:xfrm>
+          <a:prstGeom prst="rect">
+            <a:avLst/>
+          </a:prstGeom>
+        </p:spPr>
+      </p:pic>
+      <p:sp>
+        <p:nvSpPr>
+          <p:cNvPr id="19" name="Text 16"/>
+          <p:cNvSpPr txBox="1"/>
+          <p:nvPr/>
+        </p:nvSpPr>
+        <p:spPr>
+          <a:xfrm>
+            <a:off x="6903720" y="3657600"/>
+            <a:ext cx="4480560" cy="411480"/>
+          </a:xfrm>
+          <a:prstGeom prst="rect">
+            <a:avLst/>
+          </a:prstGeom>
+          <a:noFill/>
+          <a:ln/>
+        </p:spPr>
+        <p:txBody>
+          <a:bodyPr wrap="square" lIns="0" tIns="0" rIns="0" bIns="0" rtlCol="0" anchor="t"/>
+          <a:lstStyle/>
+          <a:p>
+            <a:pPr indent="0" marL="0">
+              <a:buNone/>
+            </a:pPr>
+            <a:r>
+              <a:rPr lang="en-US" sz="2000" b="1" dirty="0">
+                <a:solidFill>
+                  <a:schemeClr val="tx2"/>
+                </a:solidFill>
+              </a:rPr>
+              <a:t>When it is not sure</a:t>
+            </a:r>
+            <a:endParaRPr lang="en-US" sz="2000" dirty="0"/>
+          </a:p>
+        </p:txBody>
+      </p:sp>
+      <p:sp>
+        <p:nvSpPr>
+          <p:cNvPr id="20" name="Text 17"/>
+          <p:cNvSpPr txBox="1"/>
+          <p:nvPr/>
+        </p:nvSpPr>
+        <p:spPr>
+          <a:xfrm>
+            <a:off x="6903720" y="4114800"/>
+            <a:ext cx="4480560" cy="1554480"/>
+          </a:xfrm>
+          <a:prstGeom prst="rect">
+            <a:avLst/>
+          </a:prstGeom>
+          <a:noFill/>
+          <a:ln/>
+        </p:spPr>
+        <p:txBody>
+          <a:bodyPr wrap="square" lIns="0" tIns="0" rIns="0" bIns="0" rtlCol="0" anchor="t"/>
+          <a:lstStyle/>
+          <a:p>
+            <a:pPr indent="0" marL="0">
+              <a:buNone/>
+            </a:pPr>
+            <a:r>
+              <a:rPr lang="en-US" sz="1500" dirty="0">
+                <a:solidFill>
+                  <a:schemeClr val="tx1"/>
+                </a:solidFill>
+              </a:rPr>
+              <a:t>57.5% of genuine notes are confirmed from close-up views. Otherwise the glass asks for a quick check by hand, and the guided watermark check gives a second opinion.</a:t>
+            </a:r>
+            <a:endParaRPr lang="en-US" sz="1500" dirty="0"/>
           </a:p>
         </p:txBody>
       </p:sp>
@@ -5766,88 +5911,140 @@
                   <a:schemeClr val="tx2"/>
                 </a:solidFill>
               </a:rPr>
-              <a:t>Running on the Raspberry Pi 5</a:t>
+              <a:t>Bangla reading: error cut by three quarters</a:t>
             </a:r>
             <a:endParaRPr lang="en-US" sz="3200" dirty="0"/>
           </a:p>
         </p:txBody>
       </p:sp>
-      <p:sp>
-        <p:nvSpPr>
-          <p:cNvPr id="3" name="pi card 1"/>
-          <p:cNvSpPr/>
-          <p:nvPr/>
-        </p:nvSpPr>
-        <p:spPr>
-          <a:xfrm>
-            <a:off x="548640" y="1371600"/>
-            <a:ext cx="3566160" cy="2011680"/>
-          </a:xfrm>
-          <a:prstGeom prst="roundRect">
-            <a:avLst>
-              <a:gd name="adj" fmla="val 3636"/>
-            </a:avLst>
-          </a:prstGeom>
-          <a:solidFill>
-            <a:schemeClr val="bg2"/>
-          </a:solidFill>
-          <a:ln w="12700">
-            <a:solidFill>
-              <a:schemeClr val="bg2"/>
-            </a:solidFill>
-            <a:prstDash val="solid"/>
-          </a:ln>
-        </p:spPr>
-      </p:sp>
-      <p:sp>
-        <p:nvSpPr>
-          <p:cNvPr id="4" name="pi 1 circle"/>
-          <p:cNvSpPr/>
-          <p:nvPr/>
-        </p:nvSpPr>
-        <p:spPr>
-          <a:xfrm>
-            <a:off x="777240" y="1645920"/>
-            <a:ext cx="731520" cy="731520"/>
-          </a:xfrm>
-          <a:prstGeom prst="ellipse">
-            <a:avLst/>
-          </a:prstGeom>
-          <a:solidFill>
-            <a:srgbClr val="0B6E4F"/>
-          </a:solidFill>
-          <a:ln w="12700">
-            <a:solidFill>
-              <a:srgbClr val="0B6E4F"/>
-            </a:solidFill>
-            <a:prstDash val="solid"/>
-          </a:ln>
-        </p:spPr>
-      </p:sp>
-      <p:pic>
-        <p:nvPicPr>
-          <p:cNvPr id="5" name="pi 1 icon" descr="preencoded.png">    </p:cNvPr>
-          <p:cNvPicPr>
-            <a:picLocks noChangeAspect="1"/>
-          </p:cNvPicPr>
-          <p:nvPr/>
-        </p:nvPicPr>
-        <p:blipFill>
-          <a:blip r:embed="rId1"/>
-          <a:stretch>
-            <a:fillRect/>
-          </a:stretch>
-        </p:blipFill>
-        <p:spPr>
-          <a:xfrm>
-            <a:off x="938174" y="1806854"/>
-            <a:ext cx="409651" cy="409651"/>
-          </a:xfrm>
-          <a:prstGeom prst="rect">
-            <a:avLst/>
-          </a:prstGeom>
-        </p:spPr>
-      </p:pic>
+      <p:graphicFrame>
+        <p:nvGraphicFramePr>
+          <p:cNvPr id="3" name="Chart 0" descr=""/>
+          <p:cNvGraphicFramePr/>
+          <p:nvPr/>
+        </p:nvGraphicFramePr>
+        <p:xfrm>
+          <a:off x="548640" y="1325880"/>
+          <a:ext cx="6766560" cy="4572000"/>
+        </p:xfrm>
+        <a:graphic xmlns:a="http://schemas.openxmlformats.org/drawingml/2006/main">
+          <a:graphicData uri="http://schemas.openxmlformats.org/drawingml/2006/chart">
+            <c:chart xmlns:c="http://schemas.openxmlformats.org/drawingml/2006/chart" r:id="rId1"/>
+          </a:graphicData>
+        </a:graphic>
+      </p:graphicFrame>
+      <p:sp>
+        <p:nvSpPr>
+          <p:cNvPr id="4" name="Text 1"/>
+          <p:cNvSpPr txBox="1"/>
+          <p:nvPr/>
+        </p:nvSpPr>
+        <p:spPr>
+          <a:xfrm>
+            <a:off x="7772400" y="1371600"/>
+            <a:ext cx="3840480" cy="411480"/>
+          </a:xfrm>
+          <a:prstGeom prst="rect">
+            <a:avLst/>
+          </a:prstGeom>
+          <a:noFill/>
+          <a:ln/>
+        </p:spPr>
+        <p:txBody>
+          <a:bodyPr wrap="square" lIns="0" tIns="0" rIns="0" bIns="0" rtlCol="0" anchor="t"/>
+          <a:lstStyle/>
+          <a:p>
+            <a:pPr indent="0" marL="0">
+              <a:buNone/>
+            </a:pPr>
+            <a:r>
+              <a:rPr lang="en-US" sz="2000" b="1" dirty="0">
+                <a:solidFill>
+                  <a:schemeClr val="accent1"/>
+                </a:solidFill>
+              </a:rPr>
+              <a:t>What helped</a:t>
+            </a:r>
+            <a:endParaRPr lang="en-US" sz="2000" dirty="0"/>
+          </a:p>
+        </p:txBody>
+      </p:sp>
+      <p:sp>
+        <p:nvSpPr>
+          <p:cNvPr id="5" name="Text 2"/>
+          <p:cNvSpPr txBox="1"/>
+          <p:nvPr/>
+        </p:nvSpPr>
+        <p:spPr>
+          <a:xfrm>
+            <a:off x="7772400" y="1828800"/>
+            <a:ext cx="3840480" cy="1371600"/>
+          </a:xfrm>
+          <a:prstGeom prst="rect">
+            <a:avLst/>
+          </a:prstGeom>
+          <a:noFill/>
+          <a:ln/>
+        </p:spPr>
+        <p:txBody>
+          <a:bodyPr wrap="square" lIns="0" tIns="0" rIns="0" bIns="0" rtlCol="0" anchor="t"/>
+          <a:lstStyle/>
+          <a:p>
+            <a:pPr marL="342900" indent="-342900">
+              <a:spcAft>
+                <a:spcPts val="600"/>
+              </a:spcAft>
+              <a:buSzPct val="100000"/>
+              <a:buChar char="•"/>
+            </a:pPr>
+            <a:r>
+              <a:rPr lang="en-US" sz="1500" dirty="0">
+                <a:solidFill>
+                  <a:schemeClr val="tx1"/>
+                </a:solidFill>
+              </a:rPr>
+              <a:t>Reading only the main block of text</a:t>
+            </a:r>
+            <a:endParaRPr lang="en-US" sz="1500" dirty="0"/>
+          </a:p>
+          <a:p>
+            <a:pPr marL="342900" indent="-342900">
+              <a:spcAft>
+                <a:spcPts val="600"/>
+              </a:spcAft>
+              <a:buSzPct val="100000"/>
+              <a:buChar char="•"/>
+            </a:pPr>
+            <a:r>
+              <a:rPr lang="en-US" sz="1500" dirty="0">
+                <a:solidFill>
+                  <a:schemeClr val="tx1"/>
+                </a:solidFill>
+              </a:rPr>
+              <a:t>Tuned detector settings, CLAHE</a:t>
+            </a:r>
+            <a:endParaRPr lang="en-US" sz="1500" dirty="0"/>
+          </a:p>
+          <a:p>
+            <a:pPr marL="342900" indent="-342900">
+              <a:spcAft>
+                <a:spcPts val="600"/>
+              </a:spcAft>
+              <a:buSzPct val="100000"/>
+              <a:buChar char="•"/>
+            </a:pPr>
+            <a:r>
+              <a:rPr lang="en-US" sz="1500" dirty="0">
+                <a:solidFill>
+                  <a:schemeClr val="tx1"/>
+                </a:solidFill>
+              </a:rPr>
+              <a:t>Simple clean-up rules</a:t>
+            </a:r>
+            <a:endParaRPr lang="en-US" sz="1500" dirty="0"/>
+          </a:p>
+        </p:txBody>
+      </p:sp>
       <p:sp>
         <p:nvSpPr>
           <p:cNvPr id="6" name="Text 3"/>
@@ -5856,8 +6053,8 @@
         </p:nvSpPr>
         <p:spPr>
           <a:xfrm>
-            <a:off x="1691640" y="1600200"/>
-            <a:ext cx="2286000" cy="822960"/>
+            <a:off x="7772400" y="3383280"/>
+            <a:ext cx="3840480" cy="411480"/>
           </a:xfrm>
           <a:prstGeom prst="rect">
             <a:avLst/>
@@ -5866,24 +6063,21 @@
           <a:ln/>
         </p:spPr>
         <p:txBody>
-          <a:bodyPr wrap="square" lIns="0" tIns="0" rIns="0" bIns="0" rtlCol="0" anchor="ctr"/>
+          <a:bodyPr wrap="square" lIns="0" tIns="0" rIns="0" bIns="0" rtlCol="0" anchor="t"/>
           <a:lstStyle/>
           <a:p>
             <a:pPr indent="0" marL="0">
               <a:buNone/>
             </a:pPr>
             <a:r>
-              <a:rPr lang="en-US" sz="3600" b="1" dirty="0">
-                <a:solidFill>
-                  <a:srgbClr val="0B6E4F"/>
-                </a:solidFill>
-                <a:latin typeface="Cambria" pitchFamily="34" charset="0"/>
-                <a:ea typeface="Cambria" pitchFamily="34" charset="-122"/>
-                <a:cs typeface="Cambria" pitchFamily="34" charset="-120"/>
-              </a:rPr>
-              <a:t>327 ms</a:t>
-            </a:r>
-            <a:endParaRPr lang="en-US" sz="3600" dirty="0"/>
+              <a:rPr lang="en-US" sz="2000" b="1" dirty="0">
+                <a:solidFill>
+                  <a:schemeClr val="accent2"/>
+                </a:solidFill>
+              </a:rPr>
+              <a:t>What did not</a:t>
+            </a:r>
+            <a:endParaRPr lang="en-US" sz="2000" dirty="0"/>
           </a:p>
         </p:txBody>
       </p:sp>
@@ -5895,8 +6089,84 @@
         </p:nvSpPr>
         <p:spPr>
           <a:xfrm>
-            <a:off x="777240" y="2606040"/>
-            <a:ext cx="3108960" cy="548640"/>
+            <a:off x="7772400" y="3840480"/>
+            <a:ext cx="3840480" cy="1371600"/>
+          </a:xfrm>
+          <a:prstGeom prst="rect">
+            <a:avLst/>
+          </a:prstGeom>
+          <a:noFill/>
+          <a:ln/>
+        </p:spPr>
+        <p:txBody>
+          <a:bodyPr wrap="square" lIns="0" tIns="0" rIns="0" bIns="0" rtlCol="0" anchor="t"/>
+          <a:lstStyle/>
+          <a:p>
+            <a:pPr marL="342900" indent="-342900">
+              <a:spcAft>
+                <a:spcPts val="600"/>
+              </a:spcAft>
+              <a:buSzPct val="100000"/>
+              <a:buChar char="•"/>
+            </a:pPr>
+            <a:r>
+              <a:rPr lang="en-US" sz="1500" dirty="0">
+                <a:solidFill>
+                  <a:schemeClr val="tx1"/>
+                </a:solidFill>
+              </a:rPr>
+              <a:t>Binarisation, multi-scale reading</a:t>
+            </a:r>
+            <a:endParaRPr lang="en-US" sz="1500" dirty="0"/>
+          </a:p>
+          <a:p>
+            <a:pPr marL="342900" indent="-342900">
+              <a:spcAft>
+                <a:spcPts val="600"/>
+              </a:spcAft>
+              <a:buSzPct val="100000"/>
+              <a:buChar char="•"/>
+            </a:pPr>
+            <a:r>
+              <a:rPr lang="en-US" sz="1500" dirty="0">
+                <a:solidFill>
+                  <a:schemeClr val="tx1"/>
+                </a:solidFill>
+              </a:rPr>
+              <a:t>Tesseract, TrOCR, PaddleOCR</a:t>
+            </a:r>
+            <a:endParaRPr lang="en-US" sz="1500" dirty="0"/>
+          </a:p>
+          <a:p>
+            <a:pPr marL="342900" indent="-342900">
+              <a:spcAft>
+                <a:spcPts val="600"/>
+              </a:spcAft>
+              <a:buSzPct val="100000"/>
+              <a:buChar char="•"/>
+            </a:pPr>
+            <a:r>
+              <a:rPr lang="en-US" sz="1500" dirty="0">
+                <a:solidFill>
+                  <a:schemeClr val="tx1"/>
+                </a:solidFill>
+              </a:rPr>
+              <a:t>Dictionaries and language models</a:t>
+            </a:r>
+            <a:endParaRPr lang="en-US" sz="1500" dirty="0"/>
+          </a:p>
+        </p:txBody>
+      </p:sp>
+      <p:sp>
+        <p:nvSpPr>
+          <p:cNvPr id="8" name="Text 5"/>
+          <p:cNvSpPr txBox="1"/>
+          <p:nvPr/>
+        </p:nvSpPr>
+        <p:spPr>
+          <a:xfrm>
+            <a:off x="7772400" y="5349240"/>
+            <a:ext cx="3840480" cy="548640"/>
           </a:xfrm>
           <a:prstGeom prst="rect">
             <a:avLst/>
@@ -5912,769 +6182,14 @@
               <a:buNone/>
             </a:pPr>
             <a:r>
-              <a:rPr lang="en-US" sz="1500" dirty="0">
-                <a:solidFill>
-                  <a:schemeClr val="tx1"/>
-                </a:solidFill>
-              </a:rPr>
-              <a:t>currency check, median</a:t>
-            </a:r>
-            <a:endParaRPr lang="en-US" sz="1500" dirty="0"/>
-          </a:p>
-        </p:txBody>
-      </p:sp>
-      <p:sp>
-        <p:nvSpPr>
-          <p:cNvPr id="8" name="pi card 2"/>
-          <p:cNvSpPr/>
-          <p:nvPr/>
-        </p:nvSpPr>
-        <p:spPr>
-          <a:xfrm>
-            <a:off x="4297680" y="1371600"/>
-            <a:ext cx="3566160" cy="2011680"/>
-          </a:xfrm>
-          <a:prstGeom prst="roundRect">
-            <a:avLst>
-              <a:gd name="adj" fmla="val 3636"/>
-            </a:avLst>
-          </a:prstGeom>
-          <a:solidFill>
-            <a:schemeClr val="bg2"/>
-          </a:solidFill>
-          <a:ln w="12700">
-            <a:solidFill>
-              <a:schemeClr val="bg2"/>
-            </a:solidFill>
-            <a:prstDash val="solid"/>
-          </a:ln>
-        </p:spPr>
-      </p:sp>
-      <p:sp>
-        <p:nvSpPr>
-          <p:cNvPr id="9" name="pi 2 circle"/>
-          <p:cNvSpPr/>
-          <p:nvPr/>
-        </p:nvSpPr>
-        <p:spPr>
-          <a:xfrm>
-            <a:off x="4526280" y="1645920"/>
-            <a:ext cx="731520" cy="731520"/>
-          </a:xfrm>
-          <a:prstGeom prst="ellipse">
-            <a:avLst/>
-          </a:prstGeom>
-          <a:solidFill>
-            <a:srgbClr val="0B6E4F"/>
-          </a:solidFill>
-          <a:ln w="12700">
-            <a:solidFill>
-              <a:srgbClr val="0B6E4F"/>
-            </a:solidFill>
-            <a:prstDash val="solid"/>
-          </a:ln>
-        </p:spPr>
-      </p:sp>
-      <p:pic>
-        <p:nvPicPr>
-          <p:cNvPr id="10" name="pi 2 icon" descr="preencoded.png">    </p:cNvPr>
-          <p:cNvPicPr>
-            <a:picLocks noChangeAspect="1"/>
-          </p:cNvPicPr>
-          <p:nvPr/>
-        </p:nvPicPr>
-        <p:blipFill>
-          <a:blip r:embed="rId2"/>
-          <a:stretch>
-            <a:fillRect/>
-          </a:stretch>
-        </p:blipFill>
-        <p:spPr>
-          <a:xfrm>
-            <a:off x="4687214" y="1806854"/>
-            <a:ext cx="409651" cy="409651"/>
-          </a:xfrm>
-          <a:prstGeom prst="rect">
-            <a:avLst/>
-          </a:prstGeom>
-        </p:spPr>
-      </p:pic>
-      <p:sp>
-        <p:nvSpPr>
-          <p:cNvPr id="11" name="Text 7"/>
-          <p:cNvSpPr txBox="1"/>
-          <p:nvPr/>
-        </p:nvSpPr>
-        <p:spPr>
-          <a:xfrm>
-            <a:off x="5440680" y="1600200"/>
-            <a:ext cx="2286000" cy="822960"/>
-          </a:xfrm>
-          <a:prstGeom prst="rect">
-            <a:avLst/>
-          </a:prstGeom>
-          <a:noFill/>
-          <a:ln/>
-        </p:spPr>
-        <p:txBody>
-          <a:bodyPr wrap="square" lIns="0" tIns="0" rIns="0" bIns="0" rtlCol="0" anchor="ctr"/>
-          <a:lstStyle/>
-          <a:p>
-            <a:pPr indent="0" marL="0">
-              <a:buNone/>
-            </a:pPr>
-            <a:r>
-              <a:rPr lang="en-US" sz="3600" b="1" dirty="0">
-                <a:solidFill>
-                  <a:srgbClr val="0B6E4F"/>
-                </a:solidFill>
-                <a:latin typeface="Cambria" pitchFamily="34" charset="0"/>
-                <a:ea typeface="Cambria" pitchFamily="34" charset="-122"/>
-                <a:cs typeface="Cambria" pitchFamily="34" charset="-120"/>
-              </a:rPr>
-              <a:t>50 ms</a:t>
-            </a:r>
-            <a:endParaRPr lang="en-US" sz="3600" dirty="0"/>
-          </a:p>
-        </p:txBody>
-      </p:sp>
-      <p:sp>
-        <p:nvSpPr>
-          <p:cNvPr id="12" name="Text 8"/>
-          <p:cNvSpPr txBox="1"/>
-          <p:nvPr/>
-        </p:nvSpPr>
-        <p:spPr>
-          <a:xfrm>
-            <a:off x="4526280" y="2606040"/>
-            <a:ext cx="3108960" cy="548640"/>
-          </a:xfrm>
-          <a:prstGeom prst="rect">
-            <a:avLst/>
-          </a:prstGeom>
-          <a:noFill/>
-          <a:ln/>
-        </p:spPr>
-        <p:txBody>
-          <a:bodyPr wrap="square" lIns="0" tIns="0" rIns="0" bIns="0" rtlCol="0" anchor="t"/>
-          <a:lstStyle/>
-          <a:p>
-            <a:pPr indent="0" marL="0">
-              <a:buNone/>
-            </a:pPr>
-            <a:r>
-              <a:rPr lang="en-US" sz="1500" dirty="0">
-                <a:solidFill>
-                  <a:schemeClr val="tx1"/>
-                </a:solidFill>
-              </a:rPr>
-              <a:t>watermark check</a:t>
-            </a:r>
-            <a:endParaRPr lang="en-US" sz="1500" dirty="0"/>
-          </a:p>
-        </p:txBody>
-      </p:sp>
-      <p:sp>
-        <p:nvSpPr>
-          <p:cNvPr id="13" name="pi card 3"/>
-          <p:cNvSpPr/>
-          <p:nvPr/>
-        </p:nvSpPr>
-        <p:spPr>
-          <a:xfrm>
-            <a:off x="8046720" y="1371600"/>
-            <a:ext cx="3566160" cy="2011680"/>
-          </a:xfrm>
-          <a:prstGeom prst="roundRect">
-            <a:avLst>
-              <a:gd name="adj" fmla="val 3636"/>
-            </a:avLst>
-          </a:prstGeom>
-          <a:solidFill>
-            <a:schemeClr val="bg2"/>
-          </a:solidFill>
-          <a:ln w="12700">
-            <a:solidFill>
-              <a:schemeClr val="bg2"/>
-            </a:solidFill>
-            <a:prstDash val="solid"/>
-          </a:ln>
-        </p:spPr>
-      </p:sp>
-      <p:sp>
-        <p:nvSpPr>
-          <p:cNvPr id="14" name="pi 3 circle"/>
-          <p:cNvSpPr/>
-          <p:nvPr/>
-        </p:nvSpPr>
-        <p:spPr>
-          <a:xfrm>
-            <a:off x="8275320" y="1645920"/>
-            <a:ext cx="731520" cy="731520"/>
-          </a:xfrm>
-          <a:prstGeom prst="ellipse">
-            <a:avLst/>
-          </a:prstGeom>
-          <a:solidFill>
-            <a:srgbClr val="0B6E4F"/>
-          </a:solidFill>
-          <a:ln w="12700">
-            <a:solidFill>
-              <a:srgbClr val="0B6E4F"/>
-            </a:solidFill>
-            <a:prstDash val="solid"/>
-          </a:ln>
-        </p:spPr>
-      </p:sp>
-      <p:pic>
-        <p:nvPicPr>
-          <p:cNvPr id="15" name="pi 3 icon" descr="preencoded.png">    </p:cNvPr>
-          <p:cNvPicPr>
-            <a:picLocks noChangeAspect="1"/>
-          </p:cNvPicPr>
-          <p:nvPr/>
-        </p:nvPicPr>
-        <p:blipFill>
-          <a:blip r:embed="rId3"/>
-          <a:stretch>
-            <a:fillRect/>
-          </a:stretch>
-        </p:blipFill>
-        <p:spPr>
-          <a:xfrm>
-            <a:off x="8436254" y="1806854"/>
-            <a:ext cx="409651" cy="409651"/>
-          </a:xfrm>
-          <a:prstGeom prst="rect">
-            <a:avLst/>
-          </a:prstGeom>
-        </p:spPr>
-      </p:pic>
-      <p:sp>
-        <p:nvSpPr>
-          <p:cNvPr id="16" name="Text 11"/>
-          <p:cNvSpPr txBox="1"/>
-          <p:nvPr/>
-        </p:nvSpPr>
-        <p:spPr>
-          <a:xfrm>
-            <a:off x="9189720" y="1600200"/>
-            <a:ext cx="2286000" cy="822960"/>
-          </a:xfrm>
-          <a:prstGeom prst="rect">
-            <a:avLst/>
-          </a:prstGeom>
-          <a:noFill/>
-          <a:ln/>
-        </p:spPr>
-        <p:txBody>
-          <a:bodyPr wrap="square" lIns="0" tIns="0" rIns="0" bIns="0" rtlCol="0" anchor="ctr"/>
-          <a:lstStyle/>
-          <a:p>
-            <a:pPr indent="0" marL="0">
-              <a:buNone/>
-            </a:pPr>
-            <a:r>
-              <a:rPr lang="en-US" sz="3600" b="1" dirty="0">
-                <a:solidFill>
-                  <a:srgbClr val="0B6E4F"/>
-                </a:solidFill>
-                <a:latin typeface="Cambria" pitchFamily="34" charset="0"/>
-                <a:ea typeface="Cambria" pitchFamily="34" charset="-122"/>
-                <a:cs typeface="Cambria" pitchFamily="34" charset="-120"/>
-              </a:rPr>
-              <a:t>207 ms</a:t>
-            </a:r>
-            <a:endParaRPr lang="en-US" sz="3600" dirty="0"/>
-          </a:p>
-        </p:txBody>
-      </p:sp>
-      <p:sp>
-        <p:nvSpPr>
-          <p:cNvPr id="17" name="Text 12"/>
-          <p:cNvSpPr txBox="1"/>
-          <p:nvPr/>
-        </p:nvSpPr>
-        <p:spPr>
-          <a:xfrm>
-            <a:off x="8275320" y="2606040"/>
-            <a:ext cx="3108960" cy="548640"/>
-          </a:xfrm>
-          <a:prstGeom prst="rect">
-            <a:avLst/>
-          </a:prstGeom>
-          <a:noFill/>
-          <a:ln/>
-        </p:spPr>
-        <p:txBody>
-          <a:bodyPr wrap="square" lIns="0" tIns="0" rIns="0" bIns="0" rtlCol="0" anchor="t"/>
-          <a:lstStyle/>
-          <a:p>
-            <a:pPr indent="0" marL="0">
-              <a:buNone/>
-            </a:pPr>
-            <a:r>
-              <a:rPr lang="en-US" sz="1500" dirty="0">
-                <a:solidFill>
-                  <a:schemeClr val="tx1"/>
-                </a:solidFill>
-              </a:rPr>
-              <a:t>object scan</a:t>
-            </a:r>
-            <a:endParaRPr lang="en-US" sz="1500" dirty="0"/>
-          </a:p>
-        </p:txBody>
-      </p:sp>
-      <p:sp>
-        <p:nvSpPr>
-          <p:cNvPr id="18" name="pi card 4"/>
-          <p:cNvSpPr/>
-          <p:nvPr/>
-        </p:nvSpPr>
-        <p:spPr>
-          <a:xfrm>
-            <a:off x="548640" y="3611880"/>
-            <a:ext cx="3566160" cy="2011680"/>
-          </a:xfrm>
-          <a:prstGeom prst="roundRect">
-            <a:avLst>
-              <a:gd name="adj" fmla="val 3636"/>
-            </a:avLst>
-          </a:prstGeom>
-          <a:solidFill>
-            <a:schemeClr val="bg2"/>
-          </a:solidFill>
-          <a:ln w="12700">
-            <a:solidFill>
-              <a:schemeClr val="bg2"/>
-            </a:solidFill>
-            <a:prstDash val="solid"/>
-          </a:ln>
-        </p:spPr>
-      </p:sp>
-      <p:sp>
-        <p:nvSpPr>
-          <p:cNvPr id="19" name="pi 4 circle"/>
-          <p:cNvSpPr/>
-          <p:nvPr/>
-        </p:nvSpPr>
-        <p:spPr>
-          <a:xfrm>
-            <a:off x="777240" y="3886200"/>
-            <a:ext cx="731520" cy="731520"/>
-          </a:xfrm>
-          <a:prstGeom prst="ellipse">
-            <a:avLst/>
-          </a:prstGeom>
-          <a:solidFill>
-            <a:srgbClr val="E4572E"/>
-          </a:solidFill>
-          <a:ln w="12700">
-            <a:solidFill>
-              <a:srgbClr val="E4572E"/>
-            </a:solidFill>
-            <a:prstDash val="solid"/>
-          </a:ln>
-        </p:spPr>
-      </p:sp>
-      <p:pic>
-        <p:nvPicPr>
-          <p:cNvPr id="20" name="pi 4 icon" descr="preencoded.png">    </p:cNvPr>
-          <p:cNvPicPr>
-            <a:picLocks noChangeAspect="1"/>
-          </p:cNvPicPr>
-          <p:nvPr/>
-        </p:nvPicPr>
-        <p:blipFill>
-          <a:blip r:embed="rId4"/>
-          <a:stretch>
-            <a:fillRect/>
-          </a:stretch>
-        </p:blipFill>
-        <p:spPr>
-          <a:xfrm>
-            <a:off x="938174" y="4047134"/>
-            <a:ext cx="409651" cy="409651"/>
-          </a:xfrm>
-          <a:prstGeom prst="rect">
-            <a:avLst/>
-          </a:prstGeom>
-        </p:spPr>
-      </p:pic>
-      <p:sp>
-        <p:nvSpPr>
-          <p:cNvPr id="21" name="Text 15"/>
-          <p:cNvSpPr txBox="1"/>
-          <p:nvPr/>
-        </p:nvSpPr>
-        <p:spPr>
-          <a:xfrm>
-            <a:off x="1691640" y="3840480"/>
-            <a:ext cx="2286000" cy="822960"/>
-          </a:xfrm>
-          <a:prstGeom prst="rect">
-            <a:avLst/>
-          </a:prstGeom>
-          <a:noFill/>
-          <a:ln/>
-        </p:spPr>
-        <p:txBody>
-          <a:bodyPr wrap="square" lIns="0" tIns="0" rIns="0" bIns="0" rtlCol="0" anchor="ctr"/>
-          <a:lstStyle/>
-          <a:p>
-            <a:pPr indent="0" marL="0">
-              <a:buNone/>
-            </a:pPr>
-            <a:r>
-              <a:rPr lang="en-US" sz="3600" b="1" dirty="0">
-                <a:solidFill>
-                  <a:srgbClr val="E4572E"/>
-                </a:solidFill>
-                <a:latin typeface="Cambria" pitchFamily="34" charset="0"/>
-                <a:ea typeface="Cambria" pitchFamily="34" charset="-122"/>
-                <a:cs typeface="Cambria" pitchFamily="34" charset="-120"/>
-              </a:rPr>
-              <a:t>18.7 s</a:t>
-            </a:r>
-            <a:endParaRPr lang="en-US" sz="3600" dirty="0"/>
-          </a:p>
-        </p:txBody>
-      </p:sp>
-      <p:sp>
-        <p:nvSpPr>
-          <p:cNvPr id="22" name="Text 16"/>
-          <p:cNvSpPr txBox="1"/>
-          <p:nvPr/>
-        </p:nvSpPr>
-        <p:spPr>
-          <a:xfrm>
-            <a:off x="777240" y="4846320"/>
-            <a:ext cx="3108960" cy="548640"/>
-          </a:xfrm>
-          <a:prstGeom prst="rect">
-            <a:avLst/>
-          </a:prstGeom>
-          <a:noFill/>
-          <a:ln/>
-        </p:spPr>
-        <p:txBody>
-          <a:bodyPr wrap="square" lIns="0" tIns="0" rIns="0" bIns="0" rtlCol="0" anchor="t"/>
-          <a:lstStyle/>
-          <a:p>
-            <a:pPr indent="0" marL="0">
-              <a:buNone/>
-            </a:pPr>
-            <a:r>
-              <a:rPr lang="en-US" sz="1500" dirty="0">
-                <a:solidFill>
-                  <a:schemeClr val="tx1"/>
-                </a:solidFill>
-              </a:rPr>
-              <a:t>text reading: too slow</a:t>
-            </a:r>
-            <a:endParaRPr lang="en-US" sz="1500" dirty="0"/>
-          </a:p>
-        </p:txBody>
-      </p:sp>
-      <p:sp>
-        <p:nvSpPr>
-          <p:cNvPr id="23" name="pi card 5"/>
-          <p:cNvSpPr/>
-          <p:nvPr/>
-        </p:nvSpPr>
-        <p:spPr>
-          <a:xfrm>
-            <a:off x="4297680" y="3611880"/>
-            <a:ext cx="3566160" cy="2011680"/>
-          </a:xfrm>
-          <a:prstGeom prst="roundRect">
-            <a:avLst>
-              <a:gd name="adj" fmla="val 3636"/>
-            </a:avLst>
-          </a:prstGeom>
-          <a:solidFill>
-            <a:schemeClr val="bg2"/>
-          </a:solidFill>
-          <a:ln w="12700">
-            <a:solidFill>
-              <a:schemeClr val="bg2"/>
-            </a:solidFill>
-            <a:prstDash val="solid"/>
-          </a:ln>
-        </p:spPr>
-      </p:sp>
-      <p:sp>
-        <p:nvSpPr>
-          <p:cNvPr id="24" name="pi 5 circle"/>
-          <p:cNvSpPr/>
-          <p:nvPr/>
-        </p:nvSpPr>
-        <p:spPr>
-          <a:xfrm>
-            <a:off x="4526280" y="3886200"/>
-            <a:ext cx="731520" cy="731520"/>
-          </a:xfrm>
-          <a:prstGeom prst="ellipse">
-            <a:avLst/>
-          </a:prstGeom>
-          <a:solidFill>
-            <a:srgbClr val="3D8B7D"/>
-          </a:solidFill>
-          <a:ln w="12700">
-            <a:solidFill>
-              <a:srgbClr val="3D8B7D"/>
-            </a:solidFill>
-            <a:prstDash val="solid"/>
-          </a:ln>
-        </p:spPr>
-      </p:sp>
-      <p:pic>
-        <p:nvPicPr>
-          <p:cNvPr id="25" name="pi 5 icon" descr="preencoded.png">    </p:cNvPr>
-          <p:cNvPicPr>
-            <a:picLocks noChangeAspect="1"/>
-          </p:cNvPicPr>
-          <p:nvPr/>
-        </p:nvPicPr>
-        <p:blipFill>
-          <a:blip r:embed="rId5"/>
-          <a:stretch>
-            <a:fillRect/>
-          </a:stretch>
-        </p:blipFill>
-        <p:spPr>
-          <a:xfrm>
-            <a:off x="4687214" y="4047134"/>
-            <a:ext cx="409651" cy="409651"/>
-          </a:xfrm>
-          <a:prstGeom prst="rect">
-            <a:avLst/>
-          </a:prstGeom>
-        </p:spPr>
-      </p:pic>
-      <p:sp>
-        <p:nvSpPr>
-          <p:cNvPr id="26" name="Text 19"/>
-          <p:cNvSpPr txBox="1"/>
-          <p:nvPr/>
-        </p:nvSpPr>
-        <p:spPr>
-          <a:xfrm>
-            <a:off x="5440680" y="3840480"/>
-            <a:ext cx="2286000" cy="822960"/>
-          </a:xfrm>
-          <a:prstGeom prst="rect">
-            <a:avLst/>
-          </a:prstGeom>
-          <a:noFill/>
-          <a:ln/>
-        </p:spPr>
-        <p:txBody>
-          <a:bodyPr wrap="square" lIns="0" tIns="0" rIns="0" bIns="0" rtlCol="0" anchor="ctr"/>
-          <a:lstStyle/>
-          <a:p>
-            <a:pPr indent="0" marL="0">
-              <a:buNone/>
-            </a:pPr>
-            <a:r>
-              <a:rPr lang="en-US" sz="3600" b="1" dirty="0">
-                <a:solidFill>
-                  <a:srgbClr val="3D8B7D"/>
-                </a:solidFill>
-                <a:latin typeface="Cambria" pitchFamily="34" charset="0"/>
-                <a:ea typeface="Cambria" pitchFamily="34" charset="-122"/>
-                <a:cs typeface="Cambria" pitchFamily="34" charset="-120"/>
-              </a:rPr>
-              <a:t>77.1 °C</a:t>
-            </a:r>
-            <a:endParaRPr lang="en-US" sz="3600" dirty="0"/>
-          </a:p>
-        </p:txBody>
-      </p:sp>
-      <p:sp>
-        <p:nvSpPr>
-          <p:cNvPr id="27" name="Text 20"/>
-          <p:cNvSpPr txBox="1"/>
-          <p:nvPr/>
-        </p:nvSpPr>
-        <p:spPr>
-          <a:xfrm>
-            <a:off x="4526280" y="4846320"/>
-            <a:ext cx="3108960" cy="548640"/>
-          </a:xfrm>
-          <a:prstGeom prst="rect">
-            <a:avLst/>
-          </a:prstGeom>
-          <a:noFill/>
-          <a:ln/>
-        </p:spPr>
-        <p:txBody>
-          <a:bodyPr wrap="square" lIns="0" tIns="0" rIns="0" bIns="0" rtlCol="0" anchor="t"/>
-          <a:lstStyle/>
-          <a:p>
-            <a:pPr indent="0" marL="0">
-              <a:buNone/>
-            </a:pPr>
-            <a:r>
-              <a:rPr lang="en-US" sz="1500" dirty="0">
-                <a:solidFill>
-                  <a:schemeClr val="tx1"/>
-                </a:solidFill>
-              </a:rPr>
-              <a:t>peak, no throttling in 30 min</a:t>
-            </a:r>
-            <a:endParaRPr lang="en-US" sz="1500" dirty="0"/>
-          </a:p>
-        </p:txBody>
-      </p:sp>
-      <p:sp>
-        <p:nvSpPr>
-          <p:cNvPr id="28" name="pi card 6"/>
-          <p:cNvSpPr/>
-          <p:nvPr/>
-        </p:nvSpPr>
-        <p:spPr>
-          <a:xfrm>
-            <a:off x="8046720" y="3611880"/>
-            <a:ext cx="3566160" cy="2011680"/>
-          </a:xfrm>
-          <a:prstGeom prst="roundRect">
-            <a:avLst>
-              <a:gd name="adj" fmla="val 3636"/>
-            </a:avLst>
-          </a:prstGeom>
-          <a:solidFill>
-            <a:schemeClr val="bg2"/>
-          </a:solidFill>
-          <a:ln w="12700">
-            <a:solidFill>
-              <a:schemeClr val="bg2"/>
-            </a:solidFill>
-            <a:prstDash val="solid"/>
-          </a:ln>
-        </p:spPr>
-      </p:sp>
-      <p:sp>
-        <p:nvSpPr>
-          <p:cNvPr id="29" name="pi 6 circle"/>
-          <p:cNvSpPr/>
-          <p:nvPr/>
-        </p:nvSpPr>
-        <p:spPr>
-          <a:xfrm>
-            <a:off x="8275320" y="3886200"/>
-            <a:ext cx="731520" cy="731520"/>
-          </a:xfrm>
-          <a:prstGeom prst="ellipse">
-            <a:avLst/>
-          </a:prstGeom>
-          <a:solidFill>
-            <a:srgbClr val="3D8B7D"/>
-          </a:solidFill>
-          <a:ln w="12700">
-            <a:solidFill>
-              <a:srgbClr val="3D8B7D"/>
-            </a:solidFill>
-            <a:prstDash val="solid"/>
-          </a:ln>
-        </p:spPr>
-      </p:sp>
-      <p:pic>
-        <p:nvPicPr>
-          <p:cNvPr id="30" name="pi 6 icon" descr="preencoded.png">    </p:cNvPr>
-          <p:cNvPicPr>
-            <a:picLocks noChangeAspect="1"/>
-          </p:cNvPicPr>
-          <p:nvPr/>
-        </p:nvPicPr>
-        <p:blipFill>
-          <a:blip r:embed="rId6"/>
-          <a:stretch>
-            <a:fillRect/>
-          </a:stretch>
-        </p:blipFill>
-        <p:spPr>
-          <a:xfrm>
-            <a:off x="8436254" y="4047134"/>
-            <a:ext cx="409651" cy="409651"/>
-          </a:xfrm>
-          <a:prstGeom prst="rect">
-            <a:avLst/>
-          </a:prstGeom>
-        </p:spPr>
-      </p:pic>
-      <p:sp>
-        <p:nvSpPr>
-          <p:cNvPr id="31" name="Text 23"/>
-          <p:cNvSpPr txBox="1"/>
-          <p:nvPr/>
-        </p:nvSpPr>
-        <p:spPr>
-          <a:xfrm>
-            <a:off x="9189720" y="3840480"/>
-            <a:ext cx="2286000" cy="822960"/>
-          </a:xfrm>
-          <a:prstGeom prst="rect">
-            <a:avLst/>
-          </a:prstGeom>
-          <a:noFill/>
-          <a:ln/>
-        </p:spPr>
-        <p:txBody>
-          <a:bodyPr wrap="square" lIns="0" tIns="0" rIns="0" bIns="0" rtlCol="0" anchor="ctr"/>
-          <a:lstStyle/>
-          <a:p>
-            <a:pPr indent="0" marL="0">
-              <a:buNone/>
-            </a:pPr>
-            <a:r>
-              <a:rPr lang="en-US" sz="3600" b="1" dirty="0">
-                <a:solidFill>
-                  <a:srgbClr val="3D8B7D"/>
-                </a:solidFill>
-                <a:latin typeface="Cambria" pitchFamily="34" charset="0"/>
-                <a:ea typeface="Cambria" pitchFamily="34" charset="-122"/>
-                <a:cs typeface="Cambria" pitchFamily="34" charset="-120"/>
-              </a:rPr>
-              <a:t>1.48 GB</a:t>
-            </a:r>
-            <a:endParaRPr lang="en-US" sz="3600" dirty="0"/>
-          </a:p>
-        </p:txBody>
-      </p:sp>
-      <p:sp>
-        <p:nvSpPr>
-          <p:cNvPr id="32" name="Text 24"/>
-          <p:cNvSpPr txBox="1"/>
-          <p:nvPr/>
-        </p:nvSpPr>
-        <p:spPr>
-          <a:xfrm>
-            <a:off x="8275320" y="4846320"/>
-            <a:ext cx="3108960" cy="548640"/>
-          </a:xfrm>
-          <a:prstGeom prst="rect">
-            <a:avLst/>
-          </a:prstGeom>
-          <a:noFill/>
-          <a:ln/>
-        </p:spPr>
-        <p:txBody>
-          <a:bodyPr wrap="square" lIns="0" tIns="0" rIns="0" bIns="0" rtlCol="0" anchor="t"/>
-          <a:lstStyle/>
-          <a:p>
-            <a:pPr indent="0" marL="0">
-              <a:buNone/>
-            </a:pPr>
-            <a:r>
-              <a:rPr lang="en-US" sz="1500" dirty="0">
-                <a:solidFill>
-                  <a:schemeClr val="tx1"/>
-                </a:solidFill>
-              </a:rPr>
-              <a:t>peak memory</a:t>
-            </a:r>
-            <a:endParaRPr lang="en-US" sz="1500" dirty="0"/>
+              <a:rPr lang="en-US" sz="1300" i="1" dirty="0">
+                <a:solidFill>
+                  <a:schemeClr val="accent5"/>
+                </a:solidFill>
+              </a:rPr>
+              <a:t>Benchmark with correctly shaped Bangla; every choice made on validation data.</a:t>
+            </a:r>
+            <a:endParaRPr lang="en-US" sz="1300" dirty="0"/>
           </a:p>
         </p:txBody>
       </p:sp>
@@ -6780,15 +6295,67 @@
                   <a:schemeClr val="tx2"/>
                 </a:solidFill>
               </a:rPr>
-              <a:t>Testing the worn glass</a:t>
+              <a:t>Running on the Raspberry Pi 5</a:t>
             </a:r>
             <a:endParaRPr lang="en-US" sz="3200" dirty="0"/>
           </a:p>
         </p:txBody>
+      </p:sp>
+      <p:sp>
+        <p:nvSpPr>
+          <p:cNvPr id="3" name="pi card 1"/>
+          <p:cNvSpPr/>
+          <p:nvPr/>
+        </p:nvSpPr>
+        <p:spPr>
+          <a:xfrm>
+            <a:off x="548640" y="1371600"/>
+            <a:ext cx="3566160" cy="2011680"/>
+          </a:xfrm>
+          <a:prstGeom prst="roundRect">
+            <a:avLst>
+              <a:gd name="adj" fmla="val 3636"/>
+            </a:avLst>
+          </a:prstGeom>
+          <a:solidFill>
+            <a:schemeClr val="bg2"/>
+          </a:solidFill>
+          <a:ln w="12700">
+            <a:solidFill>
+              <a:schemeClr val="bg2"/>
+            </a:solidFill>
+            <a:prstDash val="solid"/>
+          </a:ln>
+        </p:spPr>
+      </p:sp>
+      <p:sp>
+        <p:nvSpPr>
+          <p:cNvPr id="4" name="pi 1 circle"/>
+          <p:cNvSpPr/>
+          <p:nvPr/>
+        </p:nvSpPr>
+        <p:spPr>
+          <a:xfrm>
+            <a:off x="777240" y="1645920"/>
+            <a:ext cx="731520" cy="731520"/>
+          </a:xfrm>
+          <a:prstGeom prst="ellipse">
+            <a:avLst/>
+          </a:prstGeom>
+          <a:solidFill>
+            <a:srgbClr val="0B6E4F"/>
+          </a:solidFill>
+          <a:ln w="12700">
+            <a:solidFill>
+              <a:srgbClr val="0B6E4F"/>
+            </a:solidFill>
+            <a:prstDash val="solid"/>
+          </a:ln>
+        </p:spPr>
       </p:sp>
       <p:pic>
         <p:nvPicPr>
-          <p:cNvPr id="3" name="Worn with 200 Taka" descr="E:/Final SP/Thesis Report and paper/thesis report/My report/DIagram fig tab/worn_200.jpg">    </p:cNvPr>
+          <p:cNvPr id="5" name="pi 1 icon" descr="preencoded.png">    </p:cNvPr>
           <p:cNvPicPr>
             <a:picLocks noChangeAspect="1"/>
           </p:cNvPicPr>
@@ -6796,22 +6363,150 @@
         </p:nvPicPr>
         <p:blipFill>
           <a:blip r:embed="rId1"/>
-          <a:srcRect l="0" r="0" t="0" b="0"/>
-          <a:stretch/>
+          <a:stretch>
+            <a:fillRect/>
+          </a:stretch>
         </p:blipFill>
         <p:spPr>
           <a:xfrm>
-            <a:off x="548640" y="1325880"/>
-            <a:ext cx="2926080" cy="4389120"/>
+            <a:off x="938174" y="1806854"/>
+            <a:ext cx="409651" cy="409651"/>
           </a:xfrm>
           <a:prstGeom prst="rect">
             <a:avLst/>
           </a:prstGeom>
         </p:spPr>
       </p:pic>
+      <p:sp>
+        <p:nvSpPr>
+          <p:cNvPr id="6" name="Text 3"/>
+          <p:cNvSpPr txBox="1"/>
+          <p:nvPr/>
+        </p:nvSpPr>
+        <p:spPr>
+          <a:xfrm>
+            <a:off x="1691640" y="1600200"/>
+            <a:ext cx="2286000" cy="822960"/>
+          </a:xfrm>
+          <a:prstGeom prst="rect">
+            <a:avLst/>
+          </a:prstGeom>
+          <a:noFill/>
+          <a:ln/>
+        </p:spPr>
+        <p:txBody>
+          <a:bodyPr wrap="square" lIns="0" tIns="0" rIns="0" bIns="0" rtlCol="0" anchor="ctr"/>
+          <a:lstStyle/>
+          <a:p>
+            <a:pPr indent="0" marL="0">
+              <a:buNone/>
+            </a:pPr>
+            <a:r>
+              <a:rPr lang="en-US" sz="3600" b="1" dirty="0">
+                <a:solidFill>
+                  <a:srgbClr val="0B6E4F"/>
+                </a:solidFill>
+                <a:latin typeface="Cambria" pitchFamily="34" charset="0"/>
+                <a:ea typeface="Cambria" pitchFamily="34" charset="-122"/>
+                <a:cs typeface="Cambria" pitchFamily="34" charset="-120"/>
+              </a:rPr>
+              <a:t>327 ms</a:t>
+            </a:r>
+            <a:endParaRPr lang="en-US" sz="3600" dirty="0"/>
+          </a:p>
+        </p:txBody>
+      </p:sp>
+      <p:sp>
+        <p:nvSpPr>
+          <p:cNvPr id="7" name="Text 4"/>
+          <p:cNvSpPr txBox="1"/>
+          <p:nvPr/>
+        </p:nvSpPr>
+        <p:spPr>
+          <a:xfrm>
+            <a:off x="777240" y="2606040"/>
+            <a:ext cx="3108960" cy="548640"/>
+          </a:xfrm>
+          <a:prstGeom prst="rect">
+            <a:avLst/>
+          </a:prstGeom>
+          <a:noFill/>
+          <a:ln/>
+        </p:spPr>
+        <p:txBody>
+          <a:bodyPr wrap="square" lIns="0" tIns="0" rIns="0" bIns="0" rtlCol="0" anchor="t"/>
+          <a:lstStyle/>
+          <a:p>
+            <a:pPr indent="0" marL="0">
+              <a:buNone/>
+            </a:pPr>
+            <a:r>
+              <a:rPr lang="en-US" sz="1500" dirty="0">
+                <a:solidFill>
+                  <a:schemeClr val="tx1"/>
+                </a:solidFill>
+              </a:rPr>
+              <a:t>currency check, median</a:t>
+            </a:r>
+            <a:endParaRPr lang="en-US" sz="1500" dirty="0"/>
+          </a:p>
+        </p:txBody>
+      </p:sp>
+      <p:sp>
+        <p:nvSpPr>
+          <p:cNvPr id="8" name="pi card 2"/>
+          <p:cNvSpPr/>
+          <p:nvPr/>
+        </p:nvSpPr>
+        <p:spPr>
+          <a:xfrm>
+            <a:off x="4297680" y="1371600"/>
+            <a:ext cx="3566160" cy="2011680"/>
+          </a:xfrm>
+          <a:prstGeom prst="roundRect">
+            <a:avLst>
+              <a:gd name="adj" fmla="val 3636"/>
+            </a:avLst>
+          </a:prstGeom>
+          <a:solidFill>
+            <a:schemeClr val="bg2"/>
+          </a:solidFill>
+          <a:ln w="12700">
+            <a:solidFill>
+              <a:schemeClr val="bg2"/>
+            </a:solidFill>
+            <a:prstDash val="solid"/>
+          </a:ln>
+        </p:spPr>
+      </p:sp>
+      <p:sp>
+        <p:nvSpPr>
+          <p:cNvPr id="9" name="pi 2 circle"/>
+          <p:cNvSpPr/>
+          <p:nvPr/>
+        </p:nvSpPr>
+        <p:spPr>
+          <a:xfrm>
+            <a:off x="4526280" y="1645920"/>
+            <a:ext cx="731520" cy="731520"/>
+          </a:xfrm>
+          <a:prstGeom prst="ellipse">
+            <a:avLst/>
+          </a:prstGeom>
+          <a:solidFill>
+            <a:srgbClr val="0B6E4F"/>
+          </a:solidFill>
+          <a:ln w="12700">
+            <a:solidFill>
+              <a:srgbClr val="0B6E4F"/>
+            </a:solidFill>
+            <a:prstDash val="solid"/>
+          </a:ln>
+        </p:spPr>
+      </p:sp>
       <p:pic>
         <p:nvPicPr>
-          <p:cNvPr id="4" name="Worn front" descr="E:/Final SP/Thesis Report and paper/thesis report/My report/DIagram fig tab/worn_front.jpg">    </p:cNvPr>
+          <p:cNvPr id="10" name="pi 2 icon" descr="preencoded.png">    </p:cNvPr>
           <p:cNvPicPr>
             <a:picLocks noChangeAspect="1"/>
           </p:cNvPicPr>
@@ -6819,13 +6514,14 @@
         </p:nvPicPr>
         <p:blipFill>
           <a:blip r:embed="rId2"/>
-          <a:srcRect l="0" r="0" t="0" b="0"/>
-          <a:stretch/>
+          <a:stretch>
+            <a:fillRect/>
+          </a:stretch>
         </p:blipFill>
         <p:spPr>
           <a:xfrm>
-            <a:off x="3657600" y="1325880"/>
-            <a:ext cx="2926080" cy="4389120"/>
+            <a:off x="4687214" y="1806854"/>
+            <a:ext cx="409651" cy="409651"/>
           </a:xfrm>
           <a:prstGeom prst="rect">
             <a:avLst/>
@@ -6834,14 +6530,267 @@
       </p:pic>
       <p:sp>
         <p:nvSpPr>
-          <p:cNvPr id="5" name="field test circle"/>
+          <p:cNvPr id="11" name="Text 7"/>
+          <p:cNvSpPr txBox="1"/>
+          <p:nvPr/>
+        </p:nvSpPr>
+        <p:spPr>
+          <a:xfrm>
+            <a:off x="5440680" y="1600200"/>
+            <a:ext cx="2286000" cy="822960"/>
+          </a:xfrm>
+          <a:prstGeom prst="rect">
+            <a:avLst/>
+          </a:prstGeom>
+          <a:noFill/>
+          <a:ln/>
+        </p:spPr>
+        <p:txBody>
+          <a:bodyPr wrap="square" lIns="0" tIns="0" rIns="0" bIns="0" rtlCol="0" anchor="ctr"/>
+          <a:lstStyle/>
+          <a:p>
+            <a:pPr indent="0" marL="0">
+              <a:buNone/>
+            </a:pPr>
+            <a:r>
+              <a:rPr lang="en-US" sz="3600" b="1" dirty="0">
+                <a:solidFill>
+                  <a:srgbClr val="0B6E4F"/>
+                </a:solidFill>
+                <a:latin typeface="Cambria" pitchFamily="34" charset="0"/>
+                <a:ea typeface="Cambria" pitchFamily="34" charset="-122"/>
+                <a:cs typeface="Cambria" pitchFamily="34" charset="-120"/>
+              </a:rPr>
+              <a:t>50 ms</a:t>
+            </a:r>
+            <a:endParaRPr lang="en-US" sz="3600" dirty="0"/>
+          </a:p>
+        </p:txBody>
+      </p:sp>
+      <p:sp>
+        <p:nvSpPr>
+          <p:cNvPr id="12" name="Text 8"/>
+          <p:cNvSpPr txBox="1"/>
+          <p:nvPr/>
+        </p:nvSpPr>
+        <p:spPr>
+          <a:xfrm>
+            <a:off x="4526280" y="2606040"/>
+            <a:ext cx="3108960" cy="548640"/>
+          </a:xfrm>
+          <a:prstGeom prst="rect">
+            <a:avLst/>
+          </a:prstGeom>
+          <a:noFill/>
+          <a:ln/>
+        </p:spPr>
+        <p:txBody>
+          <a:bodyPr wrap="square" lIns="0" tIns="0" rIns="0" bIns="0" rtlCol="0" anchor="t"/>
+          <a:lstStyle/>
+          <a:p>
+            <a:pPr indent="0" marL="0">
+              <a:buNone/>
+            </a:pPr>
+            <a:r>
+              <a:rPr lang="en-US" sz="1500" dirty="0">
+                <a:solidFill>
+                  <a:schemeClr val="tx1"/>
+                </a:solidFill>
+              </a:rPr>
+              <a:t>watermark check</a:t>
+            </a:r>
+            <a:endParaRPr lang="en-US" sz="1500" dirty="0"/>
+          </a:p>
+        </p:txBody>
+      </p:sp>
+      <p:sp>
+        <p:nvSpPr>
+          <p:cNvPr id="13" name="pi card 3"/>
           <p:cNvSpPr/>
           <p:nvPr/>
         </p:nvSpPr>
         <p:spPr>
           <a:xfrm>
-            <a:off x="7040880" y="1371600"/>
-            <a:ext cx="685800" cy="685800"/>
+            <a:off x="8046720" y="1371600"/>
+            <a:ext cx="3566160" cy="2011680"/>
+          </a:xfrm>
+          <a:prstGeom prst="roundRect">
+            <a:avLst>
+              <a:gd name="adj" fmla="val 3636"/>
+            </a:avLst>
+          </a:prstGeom>
+          <a:solidFill>
+            <a:schemeClr val="bg2"/>
+          </a:solidFill>
+          <a:ln w="12700">
+            <a:solidFill>
+              <a:schemeClr val="bg2"/>
+            </a:solidFill>
+            <a:prstDash val="solid"/>
+          </a:ln>
+        </p:spPr>
+      </p:sp>
+      <p:sp>
+        <p:nvSpPr>
+          <p:cNvPr id="14" name="pi 3 circle"/>
+          <p:cNvSpPr/>
+          <p:nvPr/>
+        </p:nvSpPr>
+        <p:spPr>
+          <a:xfrm>
+            <a:off x="8275320" y="1645920"/>
+            <a:ext cx="731520" cy="731520"/>
+          </a:xfrm>
+          <a:prstGeom prst="ellipse">
+            <a:avLst/>
+          </a:prstGeom>
+          <a:solidFill>
+            <a:srgbClr val="0B6E4F"/>
+          </a:solidFill>
+          <a:ln w="12700">
+            <a:solidFill>
+              <a:srgbClr val="0B6E4F"/>
+            </a:solidFill>
+            <a:prstDash val="solid"/>
+          </a:ln>
+        </p:spPr>
+      </p:sp>
+      <p:pic>
+        <p:nvPicPr>
+          <p:cNvPr id="15" name="pi 3 icon" descr="preencoded.png">    </p:cNvPr>
+          <p:cNvPicPr>
+            <a:picLocks noChangeAspect="1"/>
+          </p:cNvPicPr>
+          <p:nvPr/>
+        </p:nvPicPr>
+        <p:blipFill>
+          <a:blip r:embed="rId3"/>
+          <a:stretch>
+            <a:fillRect/>
+          </a:stretch>
+        </p:blipFill>
+        <p:spPr>
+          <a:xfrm>
+            <a:off x="8436254" y="1806854"/>
+            <a:ext cx="409651" cy="409651"/>
+          </a:xfrm>
+          <a:prstGeom prst="rect">
+            <a:avLst/>
+          </a:prstGeom>
+        </p:spPr>
+      </p:pic>
+      <p:sp>
+        <p:nvSpPr>
+          <p:cNvPr id="16" name="Text 11"/>
+          <p:cNvSpPr txBox="1"/>
+          <p:nvPr/>
+        </p:nvSpPr>
+        <p:spPr>
+          <a:xfrm>
+            <a:off x="9189720" y="1600200"/>
+            <a:ext cx="2286000" cy="822960"/>
+          </a:xfrm>
+          <a:prstGeom prst="rect">
+            <a:avLst/>
+          </a:prstGeom>
+          <a:noFill/>
+          <a:ln/>
+        </p:spPr>
+        <p:txBody>
+          <a:bodyPr wrap="square" lIns="0" tIns="0" rIns="0" bIns="0" rtlCol="0" anchor="ctr"/>
+          <a:lstStyle/>
+          <a:p>
+            <a:pPr indent="0" marL="0">
+              <a:buNone/>
+            </a:pPr>
+            <a:r>
+              <a:rPr lang="en-US" sz="3600" b="1" dirty="0">
+                <a:solidFill>
+                  <a:srgbClr val="0B6E4F"/>
+                </a:solidFill>
+                <a:latin typeface="Cambria" pitchFamily="34" charset="0"/>
+                <a:ea typeface="Cambria" pitchFamily="34" charset="-122"/>
+                <a:cs typeface="Cambria" pitchFamily="34" charset="-120"/>
+              </a:rPr>
+              <a:t>207 ms</a:t>
+            </a:r>
+            <a:endParaRPr lang="en-US" sz="3600" dirty="0"/>
+          </a:p>
+        </p:txBody>
+      </p:sp>
+      <p:sp>
+        <p:nvSpPr>
+          <p:cNvPr id="17" name="Text 12"/>
+          <p:cNvSpPr txBox="1"/>
+          <p:nvPr/>
+        </p:nvSpPr>
+        <p:spPr>
+          <a:xfrm>
+            <a:off x="8275320" y="2606040"/>
+            <a:ext cx="3108960" cy="548640"/>
+          </a:xfrm>
+          <a:prstGeom prst="rect">
+            <a:avLst/>
+          </a:prstGeom>
+          <a:noFill/>
+          <a:ln/>
+        </p:spPr>
+        <p:txBody>
+          <a:bodyPr wrap="square" lIns="0" tIns="0" rIns="0" bIns="0" rtlCol="0" anchor="t"/>
+          <a:lstStyle/>
+          <a:p>
+            <a:pPr indent="0" marL="0">
+              <a:buNone/>
+            </a:pPr>
+            <a:r>
+              <a:rPr lang="en-US" sz="1500" dirty="0">
+                <a:solidFill>
+                  <a:schemeClr val="tx1"/>
+                </a:solidFill>
+              </a:rPr>
+              <a:t>object scan</a:t>
+            </a:r>
+            <a:endParaRPr lang="en-US" sz="1500" dirty="0"/>
+          </a:p>
+        </p:txBody>
+      </p:sp>
+      <p:sp>
+        <p:nvSpPr>
+          <p:cNvPr id="18" name="pi card 4"/>
+          <p:cNvSpPr/>
+          <p:nvPr/>
+        </p:nvSpPr>
+        <p:spPr>
+          <a:xfrm>
+            <a:off x="548640" y="3611880"/>
+            <a:ext cx="3566160" cy="2011680"/>
+          </a:xfrm>
+          <a:prstGeom prst="roundRect">
+            <a:avLst>
+              <a:gd name="adj" fmla="val 3636"/>
+            </a:avLst>
+          </a:prstGeom>
+          <a:solidFill>
+            <a:schemeClr val="bg2"/>
+          </a:solidFill>
+          <a:ln w="12700">
+            <a:solidFill>
+              <a:schemeClr val="bg2"/>
+            </a:solidFill>
+            <a:prstDash val="solid"/>
+          </a:ln>
+        </p:spPr>
+      </p:sp>
+      <p:sp>
+        <p:nvSpPr>
+          <p:cNvPr id="19" name="pi 4 circle"/>
+          <p:cNvSpPr/>
+          <p:nvPr/>
+        </p:nvSpPr>
+        <p:spPr>
+          <a:xfrm>
+            <a:off x="777240" y="3886200"/>
+            <a:ext cx="731520" cy="731520"/>
           </a:xfrm>
           <a:prstGeom prst="ellipse">
             <a:avLst/>
@@ -6859,128 +6808,7 @@
       </p:sp>
       <p:pic>
         <p:nvPicPr>
-          <p:cNvPr id="6" name="field test icon" descr="preencoded.png">    </p:cNvPr>
-          <p:cNvPicPr>
-            <a:picLocks noChangeAspect="1"/>
-          </p:cNvPicPr>
-          <p:nvPr/>
-        </p:nvPicPr>
-        <p:blipFill>
-          <a:blip r:embed="rId3"/>
-          <a:stretch>
-            <a:fillRect/>
-          </a:stretch>
-        </p:blipFill>
-        <p:spPr>
-          <a:xfrm>
-            <a:off x="7191756" y="1522476"/>
-            <a:ext cx="384048" cy="384048"/>
-          </a:xfrm>
-          <a:prstGeom prst="rect">
-            <a:avLst/>
-          </a:prstGeom>
-        </p:spPr>
-      </p:pic>
-      <p:sp>
-        <p:nvSpPr>
-          <p:cNvPr id="7" name="Text 2"/>
-          <p:cNvSpPr txBox="1"/>
-          <p:nvPr/>
-        </p:nvSpPr>
-        <p:spPr>
-          <a:xfrm>
-            <a:off x="7909560" y="1417320"/>
-            <a:ext cx="3657600" cy="411480"/>
-          </a:xfrm>
-          <a:prstGeom prst="rect">
-            <a:avLst/>
-          </a:prstGeom>
-          <a:noFill/>
-          <a:ln/>
-        </p:spPr>
-        <p:txBody>
-          <a:bodyPr wrap="square" lIns="0" tIns="0" rIns="0" bIns="0" rtlCol="0" anchor="t"/>
-          <a:lstStyle/>
-          <a:p>
-            <a:pPr indent="0" marL="0">
-              <a:buNone/>
-            </a:pPr>
-            <a:r>
-              <a:rPr lang="en-US" sz="2000" b="1" dirty="0">
-                <a:solidFill>
-                  <a:schemeClr val="tx2"/>
-                </a:solidFill>
-              </a:rPr>
-              <a:t>First field test</a:t>
-            </a:r>
-            <a:endParaRPr lang="en-US" sz="2000" dirty="0"/>
-          </a:p>
-        </p:txBody>
-      </p:sp>
-      <p:sp>
-        <p:nvSpPr>
-          <p:cNvPr id="8" name="Text 3"/>
-          <p:cNvSpPr txBox="1"/>
-          <p:nvPr/>
-        </p:nvSpPr>
-        <p:spPr>
-          <a:xfrm>
-            <a:off x="7909560" y="1874520"/>
-            <a:ext cx="3703320" cy="1645920"/>
-          </a:xfrm>
-          <a:prstGeom prst="rect">
-            <a:avLst/>
-          </a:prstGeom>
-          <a:noFill/>
-          <a:ln/>
-        </p:spPr>
-        <p:txBody>
-          <a:bodyPr wrap="square" lIns="0" tIns="0" rIns="0" bIns="0" rtlCol="0" anchor="t"/>
-          <a:lstStyle/>
-          <a:p>
-            <a:pPr indent="0" marL="0">
-              <a:buNone/>
-            </a:pPr>
-            <a:r>
-              <a:rPr lang="en-US" sz="1500" dirty="0">
-                <a:solidFill>
-                  <a:schemeClr val="tx1"/>
-                </a:solidFill>
-              </a:rPr>
-              <a:t>With the glass camera, currency was unreliable and Bangla text was not read. We suspect the 640×480 fixed-focus picture; the laptop webcam works.</a:t>
-            </a:r>
-            <a:endParaRPr lang="en-US" sz="1500" dirty="0"/>
-          </a:p>
-        </p:txBody>
-      </p:sp>
-      <p:sp>
-        <p:nvSpPr>
-          <p:cNvPr id="9" name="trials circle"/>
-          <p:cNvSpPr/>
-          <p:nvPr/>
-        </p:nvSpPr>
-        <p:spPr>
-          <a:xfrm>
-            <a:off x="7040880" y="3749040"/>
-            <a:ext cx="685800" cy="685800"/>
-          </a:xfrm>
-          <a:prstGeom prst="ellipse">
-            <a:avLst/>
-          </a:prstGeom>
-          <a:solidFill>
-            <a:srgbClr val="0B6E4F"/>
-          </a:solidFill>
-          <a:ln w="12700">
-            <a:solidFill>
-              <a:srgbClr val="0B6E4F"/>
-            </a:solidFill>
-            <a:prstDash val="solid"/>
-          </a:ln>
-        </p:spPr>
-      </p:sp>
-      <p:pic>
-        <p:nvPicPr>
-          <p:cNvPr id="10" name="trials icon" descr="preencoded.png">    </p:cNvPr>
+          <p:cNvPr id="20" name="pi 4 icon" descr="preencoded.png">    </p:cNvPr>
           <p:cNvPicPr>
             <a:picLocks noChangeAspect="1"/>
           </p:cNvPicPr>
@@ -6994,8 +6822,8 @@
         </p:blipFill>
         <p:spPr>
           <a:xfrm>
-            <a:off x="7191756" y="3899916"/>
-            <a:ext cx="384048" cy="384048"/>
+            <a:off x="938174" y="4047134"/>
+            <a:ext cx="409651" cy="409651"/>
           </a:xfrm>
           <a:prstGeom prst="rect">
             <a:avLst/>
@@ -7004,14 +6832,14 @@
       </p:pic>
       <p:sp>
         <p:nvSpPr>
-          <p:cNvPr id="11" name="Text 5"/>
+          <p:cNvPr id="21" name="Text 15"/>
           <p:cNvSpPr txBox="1"/>
           <p:nvPr/>
         </p:nvSpPr>
         <p:spPr>
           <a:xfrm>
-            <a:off x="7909560" y="3794760"/>
-            <a:ext cx="3657600" cy="411480"/>
+            <a:off x="1691640" y="3840480"/>
+            <a:ext cx="2286000" cy="822960"/>
           </a:xfrm>
           <a:prstGeom prst="rect">
             <a:avLst/>
@@ -7020,34 +6848,37 @@
           <a:ln/>
         </p:spPr>
         <p:txBody>
-          <a:bodyPr wrap="square" lIns="0" tIns="0" rIns="0" bIns="0" rtlCol="0" anchor="t"/>
+          <a:bodyPr wrap="square" lIns="0" tIns="0" rIns="0" bIns="0" rtlCol="0" anchor="ctr"/>
           <a:lstStyle/>
           <a:p>
             <a:pPr indent="0" marL="0">
               <a:buNone/>
             </a:pPr>
             <a:r>
-              <a:rPr lang="en-US" sz="2000" b="1" dirty="0">
-                <a:solidFill>
-                  <a:schemeClr val="tx2"/>
-                </a:solidFill>
-              </a:rPr>
-              <a:t>Trials and survey</a:t>
-            </a:r>
-            <a:endParaRPr lang="en-US" sz="2000" dirty="0"/>
-          </a:p>
-        </p:txBody>
-      </p:sp>
-      <p:sp>
-        <p:nvSpPr>
-          <p:cNvPr id="12" name="Text 6"/>
+              <a:rPr lang="en-US" sz="3600" b="1" dirty="0">
+                <a:solidFill>
+                  <a:srgbClr val="E4572E"/>
+                </a:solidFill>
+                <a:latin typeface="Cambria" pitchFamily="34" charset="0"/>
+                <a:ea typeface="Cambria" pitchFamily="34" charset="-122"/>
+                <a:cs typeface="Cambria" pitchFamily="34" charset="-120"/>
+              </a:rPr>
+              <a:t>18.7 s</a:t>
+            </a:r>
+            <a:endParaRPr lang="en-US" sz="3600" dirty="0"/>
+          </a:p>
+        </p:txBody>
+      </p:sp>
+      <p:sp>
+        <p:nvSpPr>
+          <p:cNvPr id="22" name="Text 16"/>
           <p:cNvSpPr txBox="1"/>
           <p:nvPr/>
         </p:nvSpPr>
         <p:spPr>
           <a:xfrm>
-            <a:off x="7909560" y="4251960"/>
-            <a:ext cx="3703320" cy="1463040"/>
+            <a:off x="777240" y="4846320"/>
+            <a:ext cx="3108960" cy="548640"/>
           </a:xfrm>
           <a:prstGeom prst="rect">
             <a:avLst/>
@@ -7068,7 +6899,309 @@
                   <a:schemeClr val="tx1"/>
                 </a:solidFill>
               </a:rPr>
-              <a:t>Sessions with a visually impaired participant have started. A Bangla voice questionnaire records answers; results will follow.</a:t>
+              <a:t>text reading: too slow</a:t>
+            </a:r>
+            <a:endParaRPr lang="en-US" sz="1500" dirty="0"/>
+          </a:p>
+        </p:txBody>
+      </p:sp>
+      <p:sp>
+        <p:nvSpPr>
+          <p:cNvPr id="23" name="pi card 5"/>
+          <p:cNvSpPr/>
+          <p:nvPr/>
+        </p:nvSpPr>
+        <p:spPr>
+          <a:xfrm>
+            <a:off x="4297680" y="3611880"/>
+            <a:ext cx="3566160" cy="2011680"/>
+          </a:xfrm>
+          <a:prstGeom prst="roundRect">
+            <a:avLst>
+              <a:gd name="adj" fmla="val 3636"/>
+            </a:avLst>
+          </a:prstGeom>
+          <a:solidFill>
+            <a:schemeClr val="bg2"/>
+          </a:solidFill>
+          <a:ln w="12700">
+            <a:solidFill>
+              <a:schemeClr val="bg2"/>
+            </a:solidFill>
+            <a:prstDash val="solid"/>
+          </a:ln>
+        </p:spPr>
+      </p:sp>
+      <p:sp>
+        <p:nvSpPr>
+          <p:cNvPr id="24" name="pi 5 circle"/>
+          <p:cNvSpPr/>
+          <p:nvPr/>
+        </p:nvSpPr>
+        <p:spPr>
+          <a:xfrm>
+            <a:off x="4526280" y="3886200"/>
+            <a:ext cx="731520" cy="731520"/>
+          </a:xfrm>
+          <a:prstGeom prst="ellipse">
+            <a:avLst/>
+          </a:prstGeom>
+          <a:solidFill>
+            <a:srgbClr val="3D8B7D"/>
+          </a:solidFill>
+          <a:ln w="12700">
+            <a:solidFill>
+              <a:srgbClr val="3D8B7D"/>
+            </a:solidFill>
+            <a:prstDash val="solid"/>
+          </a:ln>
+        </p:spPr>
+      </p:sp>
+      <p:pic>
+        <p:nvPicPr>
+          <p:cNvPr id="25" name="pi 5 icon" descr="preencoded.png">    </p:cNvPr>
+          <p:cNvPicPr>
+            <a:picLocks noChangeAspect="1"/>
+          </p:cNvPicPr>
+          <p:nvPr/>
+        </p:nvPicPr>
+        <p:blipFill>
+          <a:blip r:embed="rId5"/>
+          <a:stretch>
+            <a:fillRect/>
+          </a:stretch>
+        </p:blipFill>
+        <p:spPr>
+          <a:xfrm>
+            <a:off x="4687214" y="4047134"/>
+            <a:ext cx="409651" cy="409651"/>
+          </a:xfrm>
+          <a:prstGeom prst="rect">
+            <a:avLst/>
+          </a:prstGeom>
+        </p:spPr>
+      </p:pic>
+      <p:sp>
+        <p:nvSpPr>
+          <p:cNvPr id="26" name="Text 19"/>
+          <p:cNvSpPr txBox="1"/>
+          <p:nvPr/>
+        </p:nvSpPr>
+        <p:spPr>
+          <a:xfrm>
+            <a:off x="5440680" y="3840480"/>
+            <a:ext cx="2286000" cy="822960"/>
+          </a:xfrm>
+          <a:prstGeom prst="rect">
+            <a:avLst/>
+          </a:prstGeom>
+          <a:noFill/>
+          <a:ln/>
+        </p:spPr>
+        <p:txBody>
+          <a:bodyPr wrap="square" lIns="0" tIns="0" rIns="0" bIns="0" rtlCol="0" anchor="ctr"/>
+          <a:lstStyle/>
+          <a:p>
+            <a:pPr indent="0" marL="0">
+              <a:buNone/>
+            </a:pPr>
+            <a:r>
+              <a:rPr lang="en-US" sz="3600" b="1" dirty="0">
+                <a:solidFill>
+                  <a:srgbClr val="3D8B7D"/>
+                </a:solidFill>
+                <a:latin typeface="Cambria" pitchFamily="34" charset="0"/>
+                <a:ea typeface="Cambria" pitchFamily="34" charset="-122"/>
+                <a:cs typeface="Cambria" pitchFamily="34" charset="-120"/>
+              </a:rPr>
+              <a:t>77.1 °C</a:t>
+            </a:r>
+            <a:endParaRPr lang="en-US" sz="3600" dirty="0"/>
+          </a:p>
+        </p:txBody>
+      </p:sp>
+      <p:sp>
+        <p:nvSpPr>
+          <p:cNvPr id="27" name="Text 20"/>
+          <p:cNvSpPr txBox="1"/>
+          <p:nvPr/>
+        </p:nvSpPr>
+        <p:spPr>
+          <a:xfrm>
+            <a:off x="4526280" y="4846320"/>
+            <a:ext cx="3108960" cy="548640"/>
+          </a:xfrm>
+          <a:prstGeom prst="rect">
+            <a:avLst/>
+          </a:prstGeom>
+          <a:noFill/>
+          <a:ln/>
+        </p:spPr>
+        <p:txBody>
+          <a:bodyPr wrap="square" lIns="0" tIns="0" rIns="0" bIns="0" rtlCol="0" anchor="t"/>
+          <a:lstStyle/>
+          <a:p>
+            <a:pPr indent="0" marL="0">
+              <a:buNone/>
+            </a:pPr>
+            <a:r>
+              <a:rPr lang="en-US" sz="1500" dirty="0">
+                <a:solidFill>
+                  <a:schemeClr val="tx1"/>
+                </a:solidFill>
+              </a:rPr>
+              <a:t>peak, no throttling in 30 min</a:t>
+            </a:r>
+            <a:endParaRPr lang="en-US" sz="1500" dirty="0"/>
+          </a:p>
+        </p:txBody>
+      </p:sp>
+      <p:sp>
+        <p:nvSpPr>
+          <p:cNvPr id="28" name="pi card 6"/>
+          <p:cNvSpPr/>
+          <p:nvPr/>
+        </p:nvSpPr>
+        <p:spPr>
+          <a:xfrm>
+            <a:off x="8046720" y="3611880"/>
+            <a:ext cx="3566160" cy="2011680"/>
+          </a:xfrm>
+          <a:prstGeom prst="roundRect">
+            <a:avLst>
+              <a:gd name="adj" fmla="val 3636"/>
+            </a:avLst>
+          </a:prstGeom>
+          <a:solidFill>
+            <a:schemeClr val="bg2"/>
+          </a:solidFill>
+          <a:ln w="12700">
+            <a:solidFill>
+              <a:schemeClr val="bg2"/>
+            </a:solidFill>
+            <a:prstDash val="solid"/>
+          </a:ln>
+        </p:spPr>
+      </p:sp>
+      <p:sp>
+        <p:nvSpPr>
+          <p:cNvPr id="29" name="pi 6 circle"/>
+          <p:cNvSpPr/>
+          <p:nvPr/>
+        </p:nvSpPr>
+        <p:spPr>
+          <a:xfrm>
+            <a:off x="8275320" y="3886200"/>
+            <a:ext cx="731520" cy="731520"/>
+          </a:xfrm>
+          <a:prstGeom prst="ellipse">
+            <a:avLst/>
+          </a:prstGeom>
+          <a:solidFill>
+            <a:srgbClr val="3D8B7D"/>
+          </a:solidFill>
+          <a:ln w="12700">
+            <a:solidFill>
+              <a:srgbClr val="3D8B7D"/>
+            </a:solidFill>
+            <a:prstDash val="solid"/>
+          </a:ln>
+        </p:spPr>
+      </p:sp>
+      <p:pic>
+        <p:nvPicPr>
+          <p:cNvPr id="30" name="pi 6 icon" descr="preencoded.png">    </p:cNvPr>
+          <p:cNvPicPr>
+            <a:picLocks noChangeAspect="1"/>
+          </p:cNvPicPr>
+          <p:nvPr/>
+        </p:nvPicPr>
+        <p:blipFill>
+          <a:blip r:embed="rId6"/>
+          <a:stretch>
+            <a:fillRect/>
+          </a:stretch>
+        </p:blipFill>
+        <p:spPr>
+          <a:xfrm>
+            <a:off x="8436254" y="4047134"/>
+            <a:ext cx="409651" cy="409651"/>
+          </a:xfrm>
+          <a:prstGeom prst="rect">
+            <a:avLst/>
+          </a:prstGeom>
+        </p:spPr>
+      </p:pic>
+      <p:sp>
+        <p:nvSpPr>
+          <p:cNvPr id="31" name="Text 23"/>
+          <p:cNvSpPr txBox="1"/>
+          <p:nvPr/>
+        </p:nvSpPr>
+        <p:spPr>
+          <a:xfrm>
+            <a:off x="9189720" y="3840480"/>
+            <a:ext cx="2286000" cy="822960"/>
+          </a:xfrm>
+          <a:prstGeom prst="rect">
+            <a:avLst/>
+          </a:prstGeom>
+          <a:noFill/>
+          <a:ln/>
+        </p:spPr>
+        <p:txBody>
+          <a:bodyPr wrap="square" lIns="0" tIns="0" rIns="0" bIns="0" rtlCol="0" anchor="ctr"/>
+          <a:lstStyle/>
+          <a:p>
+            <a:pPr indent="0" marL="0">
+              <a:buNone/>
+            </a:pPr>
+            <a:r>
+              <a:rPr lang="en-US" sz="3600" b="1" dirty="0">
+                <a:solidFill>
+                  <a:srgbClr val="3D8B7D"/>
+                </a:solidFill>
+                <a:latin typeface="Cambria" pitchFamily="34" charset="0"/>
+                <a:ea typeface="Cambria" pitchFamily="34" charset="-122"/>
+                <a:cs typeface="Cambria" pitchFamily="34" charset="-120"/>
+              </a:rPr>
+              <a:t>1.48 GB</a:t>
+            </a:r>
+            <a:endParaRPr lang="en-US" sz="3600" dirty="0"/>
+          </a:p>
+        </p:txBody>
+      </p:sp>
+      <p:sp>
+        <p:nvSpPr>
+          <p:cNvPr id="32" name="Text 24"/>
+          <p:cNvSpPr txBox="1"/>
+          <p:nvPr/>
+        </p:nvSpPr>
+        <p:spPr>
+          <a:xfrm>
+            <a:off x="8275320" y="4846320"/>
+            <a:ext cx="3108960" cy="548640"/>
+          </a:xfrm>
+          <a:prstGeom prst="rect">
+            <a:avLst/>
+          </a:prstGeom>
+          <a:noFill/>
+          <a:ln/>
+        </p:spPr>
+        <p:txBody>
+          <a:bodyPr wrap="square" lIns="0" tIns="0" rIns="0" bIns="0" rtlCol="0" anchor="t"/>
+          <a:lstStyle/>
+          <a:p>
+            <a:pPr indent="0" marL="0">
+              <a:buNone/>
+            </a:pPr>
+            <a:r>
+              <a:rPr lang="en-US" sz="1500" dirty="0">
+                <a:solidFill>
+                  <a:schemeClr val="tx1"/>
+                </a:solidFill>
+              </a:rPr>
+              <a:t>peak memory</a:t>
             </a:r>
             <a:endParaRPr lang="en-US" sz="1500" dirty="0"/>
           </a:p>
@@ -7176,22 +7309,68 @@
                   <a:schemeClr val="tx2"/>
                 </a:solidFill>
               </a:rPr>
-              <a:t>Limitations we report openly</a:t>
+              <a:t>Testing the worn glass</a:t>
             </a:r>
             <a:endParaRPr lang="en-US" sz="3200" dirty="0"/>
           </a:p>
         </p:txBody>
       </p:sp>
-      <p:sp>
-        <p:nvSpPr>
-          <p:cNvPr id="3" name="limit 1 circle"/>
+      <p:pic>
+        <p:nvPicPr>
+          <p:cNvPr id="3" name="Worn with 200 Taka" descr="E:/Final SP/Thesis Report and paper/thesis report/My report/DIagram fig tab/worn_200.jpg">    </p:cNvPr>
+          <p:cNvPicPr>
+            <a:picLocks noChangeAspect="1"/>
+          </p:cNvPicPr>
+          <p:nvPr/>
+        </p:nvPicPr>
+        <p:blipFill>
+          <a:blip r:embed="rId1"/>
+          <a:srcRect l="0" r="0" t="0" b="0"/>
+          <a:stretch/>
+        </p:blipFill>
+        <p:spPr>
+          <a:xfrm>
+            <a:off x="548640" y="1325880"/>
+            <a:ext cx="2926080" cy="4389120"/>
+          </a:xfrm>
+          <a:prstGeom prst="rect">
+            <a:avLst/>
+          </a:prstGeom>
+        </p:spPr>
+      </p:pic>
+      <p:pic>
+        <p:nvPicPr>
+          <p:cNvPr id="4" name="Worn front" descr="E:/Final SP/Thesis Report and paper/thesis report/My report/DIagram fig tab/worn_front.jpg">    </p:cNvPr>
+          <p:cNvPicPr>
+            <a:picLocks noChangeAspect="1"/>
+          </p:cNvPicPr>
+          <p:nvPr/>
+        </p:nvPicPr>
+        <p:blipFill>
+          <a:blip r:embed="rId2"/>
+          <a:srcRect l="0" r="0" t="0" b="0"/>
+          <a:stretch/>
+        </p:blipFill>
+        <p:spPr>
+          <a:xfrm>
+            <a:off x="3657600" y="1325880"/>
+            <a:ext cx="2926080" cy="4389120"/>
+          </a:xfrm>
+          <a:prstGeom prst="rect">
+            <a:avLst/>
+          </a:prstGeom>
+        </p:spPr>
+      </p:pic>
+      <p:sp>
+        <p:nvSpPr>
+          <p:cNvPr id="5" name="field test circle"/>
           <p:cNvSpPr/>
           <p:nvPr/>
         </p:nvSpPr>
         <p:spPr>
           <a:xfrm>
-            <a:off x="548640" y="1371600"/>
-            <a:ext cx="777240" cy="777240"/>
+            <a:off x="7040880" y="1371600"/>
+            <a:ext cx="685800" cy="685800"/>
           </a:xfrm>
           <a:prstGeom prst="ellipse">
             <a:avLst/>
@@ -7209,249 +7388,7 @@
       </p:sp>
       <p:pic>
         <p:nvPicPr>
-          <p:cNvPr id="4" name="limit 1 icon" descr="preencoded.png">    </p:cNvPr>
-          <p:cNvPicPr>
-            <a:picLocks noChangeAspect="1"/>
-          </p:cNvPicPr>
-          <p:nvPr/>
-        </p:nvPicPr>
-        <p:blipFill>
-          <a:blip r:embed="rId1"/>
-          <a:stretch>
-            <a:fillRect/>
-          </a:stretch>
-        </p:blipFill>
-        <p:spPr>
-          <a:xfrm>
-            <a:off x="719633" y="1542593"/>
-            <a:ext cx="435254" cy="435254"/>
-          </a:xfrm>
-          <a:prstGeom prst="rect">
-            <a:avLst/>
-          </a:prstGeom>
-        </p:spPr>
-      </p:pic>
-      <p:sp>
-        <p:nvSpPr>
-          <p:cNvPr id="5" name="Text 2"/>
-          <p:cNvSpPr txBox="1"/>
-          <p:nvPr/>
-        </p:nvSpPr>
-        <p:spPr>
-          <a:xfrm>
-            <a:off x="1554480" y="1389888"/>
-            <a:ext cx="4389120" cy="411480"/>
-          </a:xfrm>
-          <a:prstGeom prst="rect">
-            <a:avLst/>
-          </a:prstGeom>
-          <a:noFill/>
-          <a:ln/>
-        </p:spPr>
-        <p:txBody>
-          <a:bodyPr wrap="square" lIns="0" tIns="0" rIns="0" bIns="0" rtlCol="0" anchor="t"/>
-          <a:lstStyle/>
-          <a:p>
-            <a:pPr indent="0" marL="0">
-              <a:buNone/>
-            </a:pPr>
-            <a:r>
-              <a:rPr lang="en-US" sz="2000" b="1" dirty="0">
-                <a:solidFill>
-                  <a:schemeClr val="tx2"/>
-                </a:solidFill>
-              </a:rPr>
-              <a:t>Glass camera</a:t>
-            </a:r>
-            <a:endParaRPr lang="en-US" sz="2000" dirty="0"/>
-          </a:p>
-        </p:txBody>
-      </p:sp>
-      <p:sp>
-        <p:nvSpPr>
-          <p:cNvPr id="6" name="Text 3"/>
-          <p:cNvSpPr txBox="1"/>
-          <p:nvPr/>
-        </p:nvSpPr>
-        <p:spPr>
-          <a:xfrm>
-            <a:off x="1554480" y="1828800"/>
-            <a:ext cx="4389120" cy="548640"/>
-          </a:xfrm>
-          <a:prstGeom prst="rect">
-            <a:avLst/>
-          </a:prstGeom>
-          <a:noFill/>
-          <a:ln/>
-        </p:spPr>
-        <p:txBody>
-          <a:bodyPr wrap="square" lIns="0" tIns="0" rIns="0" bIns="0" rtlCol="0" anchor="t"/>
-          <a:lstStyle/>
-          <a:p>
-            <a:pPr indent="0" marL="0">
-              <a:buNone/>
-            </a:pPr>
-            <a:r>
-              <a:rPr lang="en-US" sz="1600" dirty="0">
-                <a:solidFill>
-                  <a:schemeClr val="tx1"/>
-                </a:solidFill>
-              </a:rPr>
-              <a:t>Lab results not yet reproduced on the worn device</a:t>
-            </a:r>
-            <a:endParaRPr lang="en-US" sz="1600" dirty="0"/>
-          </a:p>
-        </p:txBody>
-      </p:sp>
-      <p:sp>
-        <p:nvSpPr>
-          <p:cNvPr id="7" name="limit 2 circle"/>
-          <p:cNvSpPr/>
-          <p:nvPr/>
-        </p:nvSpPr>
-        <p:spPr>
-          <a:xfrm>
-            <a:off x="6217920" y="1371600"/>
-            <a:ext cx="777240" cy="777240"/>
-          </a:xfrm>
-          <a:prstGeom prst="ellipse">
-            <a:avLst/>
-          </a:prstGeom>
-          <a:solidFill>
-            <a:srgbClr val="E4572E"/>
-          </a:solidFill>
-          <a:ln w="12700">
-            <a:solidFill>
-              <a:srgbClr val="E4572E"/>
-            </a:solidFill>
-            <a:prstDash val="solid"/>
-          </a:ln>
-        </p:spPr>
-      </p:sp>
-      <p:pic>
-        <p:nvPicPr>
-          <p:cNvPr id="8" name="limit 2 icon" descr="preencoded.png">    </p:cNvPr>
-          <p:cNvPicPr>
-            <a:picLocks noChangeAspect="1"/>
-          </p:cNvPicPr>
-          <p:nvPr/>
-        </p:nvPicPr>
-        <p:blipFill>
-          <a:blip r:embed="rId2"/>
-          <a:stretch>
-            <a:fillRect/>
-          </a:stretch>
-        </p:blipFill>
-        <p:spPr>
-          <a:xfrm>
-            <a:off x="6388913" y="1542593"/>
-            <a:ext cx="435254" cy="435254"/>
-          </a:xfrm>
-          <a:prstGeom prst="rect">
-            <a:avLst/>
-          </a:prstGeom>
-        </p:spPr>
-      </p:pic>
-      <p:sp>
-        <p:nvSpPr>
-          <p:cNvPr id="9" name="Text 5"/>
-          <p:cNvSpPr txBox="1"/>
-          <p:nvPr/>
-        </p:nvSpPr>
-        <p:spPr>
-          <a:xfrm>
-            <a:off x="7223760" y="1389888"/>
-            <a:ext cx="4389120" cy="411480"/>
-          </a:xfrm>
-          <a:prstGeom prst="rect">
-            <a:avLst/>
-          </a:prstGeom>
-          <a:noFill/>
-          <a:ln/>
-        </p:spPr>
-        <p:txBody>
-          <a:bodyPr wrap="square" lIns="0" tIns="0" rIns="0" bIns="0" rtlCol="0" anchor="t"/>
-          <a:lstStyle/>
-          <a:p>
-            <a:pPr indent="0" marL="0">
-              <a:buNone/>
-            </a:pPr>
-            <a:r>
-              <a:rPr lang="en-US" sz="2000" b="1" dirty="0">
-                <a:solidFill>
-                  <a:schemeClr val="tx2"/>
-                </a:solidFill>
-              </a:rPr>
-              <a:t>User study</a:t>
-            </a:r>
-            <a:endParaRPr lang="en-US" sz="2000" dirty="0"/>
-          </a:p>
-        </p:txBody>
-      </p:sp>
-      <p:sp>
-        <p:nvSpPr>
-          <p:cNvPr id="10" name="Text 6"/>
-          <p:cNvSpPr txBox="1"/>
-          <p:nvPr/>
-        </p:nvSpPr>
-        <p:spPr>
-          <a:xfrm>
-            <a:off x="7223760" y="1828800"/>
-            <a:ext cx="4389120" cy="548640"/>
-          </a:xfrm>
-          <a:prstGeom prst="rect">
-            <a:avLst/>
-          </a:prstGeom>
-          <a:noFill/>
-          <a:ln/>
-        </p:spPr>
-        <p:txBody>
-          <a:bodyPr wrap="square" lIns="0" tIns="0" rIns="0" bIns="0" rtlCol="0" anchor="t"/>
-          <a:lstStyle/>
-          <a:p>
-            <a:pPr indent="0" marL="0">
-              <a:buNone/>
-            </a:pPr>
-            <a:r>
-              <a:rPr lang="en-US" sz="1600" dirty="0">
-                <a:solidFill>
-                  <a:schemeClr val="tx1"/>
-                </a:solidFill>
-              </a:rPr>
-              <a:t>Trials started; no results reported yet</a:t>
-            </a:r>
-            <a:endParaRPr lang="en-US" sz="1600" dirty="0"/>
-          </a:p>
-        </p:txBody>
-      </p:sp>
-      <p:sp>
-        <p:nvSpPr>
-          <p:cNvPr id="11" name="limit 3 circle"/>
-          <p:cNvSpPr/>
-          <p:nvPr/>
-        </p:nvSpPr>
-        <p:spPr>
-          <a:xfrm>
-            <a:off x="548640" y="2926080"/>
-            <a:ext cx="777240" cy="777240"/>
-          </a:xfrm>
-          <a:prstGeom prst="ellipse">
-            <a:avLst/>
-          </a:prstGeom>
-          <a:solidFill>
-            <a:srgbClr val="E4572E"/>
-          </a:solidFill>
-          <a:ln w="12700">
-            <a:solidFill>
-              <a:srgbClr val="E4572E"/>
-            </a:solidFill>
-            <a:prstDash val="solid"/>
-          </a:ln>
-        </p:spPr>
-      </p:sp>
-      <p:pic>
-        <p:nvPicPr>
-          <p:cNvPr id="12" name="limit 3 icon" descr="preencoded.png">    </p:cNvPr>
+          <p:cNvPr id="6" name="field test icon" descr="preencoded.png">    </p:cNvPr>
           <p:cNvPicPr>
             <a:picLocks noChangeAspect="1"/>
           </p:cNvPicPr>
@@ -7465,8 +7402,8 @@
         </p:blipFill>
         <p:spPr>
           <a:xfrm>
-            <a:off x="719633" y="3097073"/>
-            <a:ext cx="435254" cy="435254"/>
+            <a:off x="7191756" y="1522476"/>
+            <a:ext cx="384048" cy="384048"/>
           </a:xfrm>
           <a:prstGeom prst="rect">
             <a:avLst/>
@@ -7475,14 +7412,14 @@
       </p:pic>
       <p:sp>
         <p:nvSpPr>
-          <p:cNvPr id="13" name="Text 8"/>
+          <p:cNvPr id="7" name="Text 2"/>
           <p:cNvSpPr txBox="1"/>
           <p:nvPr/>
         </p:nvSpPr>
         <p:spPr>
           <a:xfrm>
-            <a:off x="1554480" y="2944368"/>
-            <a:ext cx="4389120" cy="411480"/>
+            <a:off x="7909560" y="1417320"/>
+            <a:ext cx="3657600" cy="411480"/>
           </a:xfrm>
           <a:prstGeom prst="rect">
             <a:avLst/>
@@ -7503,7 +7440,7 @@
                   <a:schemeClr val="tx2"/>
                 </a:solidFill>
               </a:rPr>
-              <a:t>Few counterfeit prints</a:t>
+              <a:t>First field test</a:t>
             </a:r>
             <a:endParaRPr lang="en-US" sz="2000" dirty="0"/>
           </a:p>
@@ -7511,14 +7448,14 @@
       </p:sp>
       <p:sp>
         <p:nvSpPr>
-          <p:cNvPr id="14" name="Text 9"/>
+          <p:cNvPr id="8" name="Text 3"/>
           <p:cNvSpPr txBox="1"/>
           <p:nvPr/>
         </p:nvSpPr>
         <p:spPr>
           <a:xfrm>
-            <a:off x="1554480" y="3383280"/>
-            <a:ext cx="4389120" cy="548640"/>
+            <a:off x="7909560" y="1874520"/>
+            <a:ext cx="3703320" cy="1645920"/>
           </a:xfrm>
           <a:prstGeom prst="rect">
             <a:avLst/>
@@ -7534,37 +7471,37 @@
               <a:buNone/>
             </a:pPr>
             <a:r>
-              <a:rPr lang="en-US" sz="1600" dirty="0">
+              <a:rPr lang="en-US" sz="1500" dirty="0">
                 <a:solidFill>
                   <a:schemeClr val="tx1"/>
                 </a:solidFill>
               </a:rPr>
-              <a:t>About 24 unseen prints: ±12 points uncertainty</a:t>
-            </a:r>
-            <a:endParaRPr lang="en-US" sz="1600" dirty="0"/>
-          </a:p>
-        </p:txBody>
-      </p:sp>
-      <p:sp>
-        <p:nvSpPr>
-          <p:cNvPr id="15" name="limit 4 circle"/>
+              <a:t>With the glass camera, currency was unreliable and Bangla text was not read. We suspect the 640×480 fixed-focus picture; the laptop webcam works.</a:t>
+            </a:r>
+            <a:endParaRPr lang="en-US" sz="1500" dirty="0"/>
+          </a:p>
+        </p:txBody>
+      </p:sp>
+      <p:sp>
+        <p:nvSpPr>
+          <p:cNvPr id="9" name="trials circle"/>
           <p:cNvSpPr/>
           <p:nvPr/>
         </p:nvSpPr>
         <p:spPr>
           <a:xfrm>
-            <a:off x="6217920" y="2926080"/>
-            <a:ext cx="777240" cy="777240"/>
+            <a:off x="7040880" y="3749040"/>
+            <a:ext cx="685800" cy="685800"/>
           </a:xfrm>
           <a:prstGeom prst="ellipse">
             <a:avLst/>
           </a:prstGeom>
           <a:solidFill>
-            <a:srgbClr val="E4572E"/>
+            <a:srgbClr val="0B6E4F"/>
           </a:solidFill>
           <a:ln w="12700">
             <a:solidFill>
-              <a:srgbClr val="E4572E"/>
+              <a:srgbClr val="0B6E4F"/>
             </a:solidFill>
             <a:prstDash val="solid"/>
           </a:ln>
@@ -7572,7 +7509,7 @@
       </p:sp>
       <p:pic>
         <p:nvPicPr>
-          <p:cNvPr id="16" name="limit 4 icon" descr="preencoded.png">    </p:cNvPr>
+          <p:cNvPr id="10" name="trials icon" descr="preencoded.png">    </p:cNvPr>
           <p:cNvPicPr>
             <a:picLocks noChangeAspect="1"/>
           </p:cNvPicPr>
@@ -7586,8 +7523,8 @@
         </p:blipFill>
         <p:spPr>
           <a:xfrm>
-            <a:off x="6388913" y="3097073"/>
-            <a:ext cx="435254" cy="435254"/>
+            <a:off x="7191756" y="3899916"/>
+            <a:ext cx="384048" cy="384048"/>
           </a:xfrm>
           <a:prstGeom prst="rect">
             <a:avLst/>
@@ -7596,14 +7533,14 @@
       </p:pic>
       <p:sp>
         <p:nvSpPr>
-          <p:cNvPr id="17" name="Text 11"/>
+          <p:cNvPr id="11" name="Text 5"/>
           <p:cNvSpPr txBox="1"/>
           <p:nvPr/>
         </p:nvSpPr>
         <p:spPr>
           <a:xfrm>
-            <a:off x="7223760" y="2944368"/>
-            <a:ext cx="4389120" cy="411480"/>
+            <a:off x="7909560" y="3794760"/>
+            <a:ext cx="3657600" cy="411480"/>
           </a:xfrm>
           <a:prstGeom prst="rect">
             <a:avLst/>
@@ -7624,7 +7561,7 @@
                   <a:schemeClr val="tx2"/>
                 </a:solidFill>
               </a:rPr>
-              <a:t>Slow OCR on the Pi</a:t>
+              <a:t>Trials and survey</a:t>
             </a:r>
             <a:endParaRPr lang="en-US" sz="2000" dirty="0"/>
           </a:p>
@@ -7632,14 +7569,14 @@
       </p:sp>
       <p:sp>
         <p:nvSpPr>
-          <p:cNvPr id="18" name="Text 12"/>
+          <p:cNvPr id="12" name="Text 6"/>
           <p:cNvSpPr txBox="1"/>
           <p:nvPr/>
         </p:nvSpPr>
         <p:spPr>
           <a:xfrm>
-            <a:off x="7223760" y="3383280"/>
-            <a:ext cx="4389120" cy="548640"/>
+            <a:off x="7909560" y="4251960"/>
+            <a:ext cx="3703320" cy="1463040"/>
           </a:xfrm>
           <a:prstGeom prst="rect">
             <a:avLst/>
@@ -7655,256 +7592,14 @@
               <a:buNone/>
             </a:pPr>
             <a:r>
-              <a:rPr lang="en-US" sz="1600" dirty="0">
+              <a:rPr lang="en-US" sz="1500" dirty="0">
                 <a:solidFill>
                   <a:schemeClr val="tx1"/>
                 </a:solidFill>
               </a:rPr>
-              <a:t>About 19 s per capture</a:t>
-            </a:r>
-            <a:endParaRPr lang="en-US" sz="1600" dirty="0"/>
-          </a:p>
-        </p:txBody>
-      </p:sp>
-      <p:sp>
-        <p:nvSpPr>
-          <p:cNvPr id="19" name="limit 5 circle"/>
-          <p:cNvSpPr/>
-          <p:nvPr/>
-        </p:nvSpPr>
-        <p:spPr>
-          <a:xfrm>
-            <a:off x="548640" y="4480560"/>
-            <a:ext cx="777240" cy="777240"/>
-          </a:xfrm>
-          <a:prstGeom prst="ellipse">
-            <a:avLst/>
-          </a:prstGeom>
-          <a:solidFill>
-            <a:srgbClr val="E4572E"/>
-          </a:solidFill>
-          <a:ln w="12700">
-            <a:solidFill>
-              <a:srgbClr val="E4572E"/>
-            </a:solidFill>
-            <a:prstDash val="solid"/>
-          </a:ln>
-        </p:spPr>
-      </p:sp>
-      <p:pic>
-        <p:nvPicPr>
-          <p:cNvPr id="20" name="limit 5 icon" descr="preencoded.png">    </p:cNvPr>
-          <p:cNvPicPr>
-            <a:picLocks noChangeAspect="1"/>
-          </p:cNvPicPr>
-          <p:nvPr/>
-        </p:nvPicPr>
-        <p:blipFill>
-          <a:blip r:embed="rId5"/>
-          <a:stretch>
-            <a:fillRect/>
-          </a:stretch>
-        </p:blipFill>
-        <p:spPr>
-          <a:xfrm>
-            <a:off x="719633" y="4651553"/>
-            <a:ext cx="435254" cy="435254"/>
-          </a:xfrm>
-          <a:prstGeom prst="rect">
-            <a:avLst/>
-          </a:prstGeom>
-        </p:spPr>
-      </p:pic>
-      <p:sp>
-        <p:nvSpPr>
-          <p:cNvPr id="21" name="Text 14"/>
-          <p:cNvSpPr txBox="1"/>
-          <p:nvPr/>
-        </p:nvSpPr>
-        <p:spPr>
-          <a:xfrm>
-            <a:off x="1554480" y="4498848"/>
-            <a:ext cx="4389120" cy="411480"/>
-          </a:xfrm>
-          <a:prstGeom prst="rect">
-            <a:avLst/>
-          </a:prstGeom>
-          <a:noFill/>
-          <a:ln/>
-        </p:spPr>
-        <p:txBody>
-          <a:bodyPr wrap="square" lIns="0" tIns="0" rIns="0" bIns="0" rtlCol="0" anchor="t"/>
-          <a:lstStyle/>
-          <a:p>
-            <a:pPr indent="0" marL="0">
-              <a:buNone/>
-            </a:pPr>
-            <a:r>
-              <a:rPr lang="en-US" sz="2000" b="1" dirty="0">
-                <a:solidFill>
-                  <a:schemeClr val="tx2"/>
-                </a:solidFill>
-              </a:rPr>
-              <a:t>Close-ups and unknown notes</a:t>
-            </a:r>
-            <a:endParaRPr lang="en-US" sz="2000" dirty="0"/>
-          </a:p>
-        </p:txBody>
-      </p:sp>
-      <p:sp>
-        <p:nvSpPr>
-          <p:cNvPr id="22" name="Text 15"/>
-          <p:cNvSpPr txBox="1"/>
-          <p:nvPr/>
-        </p:nvSpPr>
-        <p:spPr>
-          <a:xfrm>
-            <a:off x="1554480" y="4937760"/>
-            <a:ext cx="4389120" cy="548640"/>
-          </a:xfrm>
-          <a:prstGeom prst="rect">
-            <a:avLst/>
-          </a:prstGeom>
-          <a:noFill/>
-          <a:ln/>
-        </p:spPr>
-        <p:txBody>
-          <a:bodyPr wrap="square" lIns="0" tIns="0" rIns="0" bIns="0" rtlCol="0" anchor="t"/>
-          <a:lstStyle/>
-          <a:p>
-            <a:pPr indent="0" marL="0">
-              <a:buNone/>
-            </a:pPr>
-            <a:r>
-              <a:rPr lang="en-US" sz="1600" dirty="0">
-                <a:solidFill>
-                  <a:schemeClr val="tx1"/>
-                </a:solidFill>
-              </a:rPr>
-              <a:t>18.5% on hand-held close-ups</a:t>
-            </a:r>
-            <a:endParaRPr lang="en-US" sz="1600" dirty="0"/>
-          </a:p>
-        </p:txBody>
-      </p:sp>
-      <p:sp>
-        <p:nvSpPr>
-          <p:cNvPr id="23" name="limit 6 circle"/>
-          <p:cNvSpPr/>
-          <p:nvPr/>
-        </p:nvSpPr>
-        <p:spPr>
-          <a:xfrm>
-            <a:off x="6217920" y="4480560"/>
-            <a:ext cx="777240" cy="777240"/>
-          </a:xfrm>
-          <a:prstGeom prst="ellipse">
-            <a:avLst/>
-          </a:prstGeom>
-          <a:solidFill>
-            <a:srgbClr val="E4572E"/>
-          </a:solidFill>
-          <a:ln w="12700">
-            <a:solidFill>
-              <a:srgbClr val="E4572E"/>
-            </a:solidFill>
-            <a:prstDash val="solid"/>
-          </a:ln>
-        </p:spPr>
-      </p:sp>
-      <p:pic>
-        <p:nvPicPr>
-          <p:cNvPr id="24" name="limit 6 icon" descr="preencoded.png">    </p:cNvPr>
-          <p:cNvPicPr>
-            <a:picLocks noChangeAspect="1"/>
-          </p:cNvPicPr>
-          <p:nvPr/>
-        </p:nvPicPr>
-        <p:blipFill>
-          <a:blip r:embed="rId6"/>
-          <a:stretch>
-            <a:fillRect/>
-          </a:stretch>
-        </p:blipFill>
-        <p:spPr>
-          <a:xfrm>
-            <a:off x="6388913" y="4651553"/>
-            <a:ext cx="435254" cy="435254"/>
-          </a:xfrm>
-          <a:prstGeom prst="rect">
-            <a:avLst/>
-          </a:prstGeom>
-        </p:spPr>
-      </p:pic>
-      <p:sp>
-        <p:nvSpPr>
-          <p:cNvPr id="25" name="Text 17"/>
-          <p:cNvSpPr txBox="1"/>
-          <p:nvPr/>
-        </p:nvSpPr>
-        <p:spPr>
-          <a:xfrm>
-            <a:off x="7223760" y="4498848"/>
-            <a:ext cx="4389120" cy="411480"/>
-          </a:xfrm>
-          <a:prstGeom prst="rect">
-            <a:avLst/>
-          </a:prstGeom>
-          <a:noFill/>
-          <a:ln/>
-        </p:spPr>
-        <p:txBody>
-          <a:bodyPr wrap="square" lIns="0" tIns="0" rIns="0" bIns="0" rtlCol="0" anchor="t"/>
-          <a:lstStyle/>
-          <a:p>
-            <a:pPr indent="0" marL="0">
-              <a:buNone/>
-            </a:pPr>
-            <a:r>
-              <a:rPr lang="en-US" sz="2000" b="1" dirty="0">
-                <a:solidFill>
-                  <a:schemeClr val="tx2"/>
-                </a:solidFill>
-              </a:rPr>
-              <a:t>Battery life</a:t>
-            </a:r>
-            <a:endParaRPr lang="en-US" sz="2000" dirty="0"/>
-          </a:p>
-        </p:txBody>
-      </p:sp>
-      <p:sp>
-        <p:nvSpPr>
-          <p:cNvPr id="26" name="Text 18"/>
-          <p:cNvSpPr txBox="1"/>
-          <p:nvPr/>
-        </p:nvSpPr>
-        <p:spPr>
-          <a:xfrm>
-            <a:off x="7223760" y="4937760"/>
-            <a:ext cx="4389120" cy="548640"/>
-          </a:xfrm>
-          <a:prstGeom prst="rect">
-            <a:avLst/>
-          </a:prstGeom>
-          <a:noFill/>
-          <a:ln/>
-        </p:spPr>
-        <p:txBody>
-          <a:bodyPr wrap="square" lIns="0" tIns="0" rIns="0" bIns="0" rtlCol="0" anchor="t"/>
-          <a:lstStyle/>
-          <a:p>
-            <a:pPr indent="0" marL="0">
-              <a:buNone/>
-            </a:pPr>
-            <a:r>
-              <a:rPr lang="en-US" sz="1600" dirty="0">
-                <a:solidFill>
-                  <a:schemeClr val="tx1"/>
-                </a:solidFill>
-              </a:rPr>
-              <a:t>Not measured yet</a:t>
-            </a:r>
-            <a:endParaRPr lang="en-US" sz="1600" dirty="0"/>
+              <a:t>Sessions with a visually impaired participant have started. A Bangla voice questionnaire records answers; results will follow.</a:t>
+            </a:r>
+            <a:endParaRPr lang="en-US" sz="1500" dirty="0"/>
           </a:p>
         </p:txBody>
       </p:sp>
@@ -8010,7 +7705,7 @@
                   <a:schemeClr val="tx2"/>
                 </a:solidFill>
               </a:rPr>
-              <a:t>Next steps</a:t>
+              <a:t>Ongoing work and next steps</a:t>
             </a:r>
             <a:endParaRPr lang="en-US" sz="3200" dirty="0"/>
           </a:p>
@@ -8025,162 +7720,6 @@
         <p:spPr>
           <a:xfrm>
             <a:off x="1325880" y="1554480"/>
-            <a:ext cx="685800" cy="685800"/>
-          </a:xfrm>
-          <a:prstGeom prst="ellipse">
-            <a:avLst/>
-          </a:prstGeom>
-          <a:solidFill>
-            <a:srgbClr val="E4572E"/>
-          </a:solidFill>
-          <a:ln w="12700">
-            <a:solidFill>
-              <a:srgbClr val="E4572E"/>
-            </a:solidFill>
-            <a:prstDash val="solid"/>
-          </a:ln>
-        </p:spPr>
-      </p:sp>
-      <p:sp>
-        <p:nvSpPr>
-          <p:cNvPr id="4" name="Text 2"/>
-          <p:cNvSpPr txBox="1"/>
-          <p:nvPr/>
-        </p:nvSpPr>
-        <p:spPr>
-          <a:xfrm>
-            <a:off x="1325880" y="1554480"/>
-            <a:ext cx="685800" cy="685800"/>
-          </a:xfrm>
-          <a:prstGeom prst="rect">
-            <a:avLst/>
-          </a:prstGeom>
-          <a:noFill/>
-          <a:ln/>
-        </p:spPr>
-        <p:txBody>
-          <a:bodyPr wrap="square" lIns="0" tIns="0" rIns="0" bIns="0" rtlCol="0" anchor="ctr"/>
-          <a:lstStyle/>
-          <a:p>
-            <a:pPr algn="ctr" indent="0" marL="0">
-              <a:buNone/>
-            </a:pPr>
-            <a:r>
-              <a:rPr lang="en-US" sz="1800" b="1" dirty="0">
-                <a:solidFill>
-                  <a:schemeClr val="bg1"/>
-                </a:solidFill>
-              </a:rPr>
-              <a:t>1</a:t>
-            </a:r>
-            <a:endParaRPr lang="en-US" sz="1800" dirty="0"/>
-          </a:p>
-        </p:txBody>
-      </p:sp>
-      <p:sp>
-        <p:nvSpPr>
-          <p:cNvPr id="5" name="step line 1"/>
-          <p:cNvSpPr/>
-          <p:nvPr/>
-        </p:nvSpPr>
-        <p:spPr>
-          <a:xfrm>
-            <a:off x="2103120" y="1892808"/>
-            <a:ext cx="1417320" cy="0"/>
-          </a:xfrm>
-          <a:prstGeom prst="line">
-            <a:avLst/>
-          </a:prstGeom>
-          <a:noFill/>
-          <a:ln w="25400">
-            <a:solidFill>
-              <a:srgbClr val="C9D6D0"/>
-            </a:solidFill>
-            <a:prstDash val="solid"/>
-          </a:ln>
-        </p:spPr>
-      </p:sp>
-      <p:sp>
-        <p:nvSpPr>
-          <p:cNvPr id="6" name="Text 4"/>
-          <p:cNvSpPr txBox="1"/>
-          <p:nvPr/>
-        </p:nvSpPr>
-        <p:spPr>
-          <a:xfrm>
-            <a:off x="548640" y="2468880"/>
-            <a:ext cx="2103120" cy="731520"/>
-          </a:xfrm>
-          <a:prstGeom prst="rect">
-            <a:avLst/>
-          </a:prstGeom>
-          <a:noFill/>
-          <a:ln/>
-        </p:spPr>
-        <p:txBody>
-          <a:bodyPr wrap="square" lIns="0" tIns="0" rIns="0" bIns="0" rtlCol="0" anchor="t"/>
-          <a:lstStyle/>
-          <a:p>
-            <a:pPr algn="ctr" indent="0" marL="0">
-              <a:buNone/>
-            </a:pPr>
-            <a:r>
-              <a:rPr lang="en-US" sz="1800" b="1" dirty="0">
-                <a:solidFill>
-                  <a:schemeClr val="tx2"/>
-                </a:solidFill>
-              </a:rPr>
-              <a:t>Fix the glass camera</a:t>
-            </a:r>
-            <a:endParaRPr lang="en-US" sz="1800" dirty="0"/>
-          </a:p>
-        </p:txBody>
-      </p:sp>
-      <p:sp>
-        <p:nvSpPr>
-          <p:cNvPr id="7" name="Text 5"/>
-          <p:cNvSpPr txBox="1"/>
-          <p:nvPr/>
-        </p:nvSpPr>
-        <p:spPr>
-          <a:xfrm>
-            <a:off x="548640" y="3246120"/>
-            <a:ext cx="2103120" cy="1645920"/>
-          </a:xfrm>
-          <a:prstGeom prst="rect">
-            <a:avLst/>
-          </a:prstGeom>
-          <a:noFill/>
-          <a:ln/>
-        </p:spPr>
-        <p:txBody>
-          <a:bodyPr wrap="square" lIns="0" tIns="0" rIns="0" bIns="0" rtlCol="0" anchor="t"/>
-          <a:lstStyle/>
-          <a:p>
-            <a:pPr algn="ctr" indent="0" marL="0">
-              <a:buNone/>
-            </a:pPr>
-            <a:r>
-              <a:rPr lang="en-US" sz="1500" dirty="0">
-                <a:solidFill>
-                  <a:schemeClr val="tx1"/>
-                </a:solidFill>
-              </a:rPr>
-              <a:t>Higher resolution or autofocus; test set taken through the glass</a:t>
-            </a:r>
-            <a:endParaRPr lang="en-US" sz="1500" dirty="0"/>
-          </a:p>
-        </p:txBody>
-      </p:sp>
-      <p:sp>
-        <p:nvSpPr>
-          <p:cNvPr id="8" name="number 2"/>
-          <p:cNvSpPr/>
-          <p:nvPr/>
-        </p:nvSpPr>
-        <p:spPr>
-          <a:xfrm>
-            <a:off x="3611880" y="1554480"/>
             <a:ext cx="685800" cy="685800"/>
           </a:xfrm>
           <a:prstGeom prst="ellipse">
@@ -8199,13 +7738,13 @@
       </p:sp>
       <p:sp>
         <p:nvSpPr>
-          <p:cNvPr id="9" name="Text 7"/>
+          <p:cNvPr id="4" name="Text 2"/>
           <p:cNvSpPr txBox="1"/>
           <p:nvPr/>
         </p:nvSpPr>
         <p:spPr>
           <a:xfrm>
-            <a:off x="3611880" y="1554480"/>
+            <a:off x="1325880" y="1554480"/>
             <a:ext cx="685800" cy="685800"/>
           </a:xfrm>
           <a:prstGeom prst="rect">
@@ -8227,7 +7766,7 @@
                   <a:schemeClr val="bg1"/>
                 </a:solidFill>
               </a:rPr>
-              <a:t>2</a:t>
+              <a:t>1</a:t>
             </a:r>
             <a:endParaRPr lang="en-US" sz="1800" dirty="0"/>
           </a:p>
@@ -8235,13 +7774,13 @@
       </p:sp>
       <p:sp>
         <p:nvSpPr>
-          <p:cNvPr id="10" name="step line 2"/>
+          <p:cNvPr id="5" name="step line 1"/>
           <p:cNvSpPr/>
           <p:nvPr/>
         </p:nvSpPr>
         <p:spPr>
           <a:xfrm>
-            <a:off x="4389120" y="1892808"/>
+            <a:off x="2103120" y="1892808"/>
             <a:ext cx="1417320" cy="0"/>
           </a:xfrm>
           <a:prstGeom prst="line">
@@ -8258,13 +7797,13 @@
       </p:sp>
       <p:sp>
         <p:nvSpPr>
-          <p:cNvPr id="11" name="Text 9"/>
+          <p:cNvPr id="6" name="Text 4"/>
           <p:cNvSpPr txBox="1"/>
           <p:nvPr/>
         </p:nvSpPr>
         <p:spPr>
           <a:xfrm>
-            <a:off x="2834640" y="2468880"/>
+            <a:off x="548640" y="2468880"/>
             <a:ext cx="2103120" cy="731520"/>
           </a:xfrm>
           <a:prstGeom prst="rect">
@@ -8286,7 +7825,7 @@
                   <a:schemeClr val="tx2"/>
                 </a:solidFill>
               </a:rPr>
-              <a:t>Run the user study</a:t>
+              <a:t>Tune the glass camera</a:t>
             </a:r>
             <a:endParaRPr lang="en-US" sz="1800" dirty="0"/>
           </a:p>
@@ -8294,13 +7833,13 @@
       </p:sp>
       <p:sp>
         <p:nvSpPr>
-          <p:cNvPr id="12" name="Text 10"/>
+          <p:cNvPr id="7" name="Text 5"/>
           <p:cNvSpPr txBox="1"/>
           <p:nvPr/>
         </p:nvSpPr>
         <p:spPr>
           <a:xfrm>
-            <a:off x="2834640" y="3246120"/>
+            <a:off x="548640" y="3246120"/>
             <a:ext cx="2103120" cy="1645920"/>
           </a:xfrm>
           <a:prstGeom prst="rect">
@@ -8322,7 +7861,7 @@
                   <a:schemeClr val="tx1"/>
                 </a:solidFill>
               </a:rPr>
-              <a:t>8–12 participants: task time, accuracy, SUS and NASA-TLX</a:t>
+              <a:t>Higher resolution or autofocus; test set taken through the glass</a:t>
             </a:r>
             <a:endParaRPr lang="en-US" sz="1500" dirty="0"/>
           </a:p>
@@ -8330,13 +7869,13 @@
       </p:sp>
       <p:sp>
         <p:nvSpPr>
-          <p:cNvPr id="13" name="number 3"/>
+          <p:cNvPr id="8" name="number 2"/>
           <p:cNvSpPr/>
           <p:nvPr/>
         </p:nvSpPr>
         <p:spPr>
           <a:xfrm>
-            <a:off x="5897880" y="1554480"/>
+            <a:off x="3611880" y="1554480"/>
             <a:ext cx="685800" cy="685800"/>
           </a:xfrm>
           <a:prstGeom prst="ellipse">
@@ -8355,13 +7894,13 @@
       </p:sp>
       <p:sp>
         <p:nvSpPr>
-          <p:cNvPr id="14" name="Text 12"/>
+          <p:cNvPr id="9" name="Text 7"/>
           <p:cNvSpPr txBox="1"/>
           <p:nvPr/>
         </p:nvSpPr>
         <p:spPr>
           <a:xfrm>
-            <a:off x="5897880" y="1554480"/>
+            <a:off x="3611880" y="1554480"/>
             <a:ext cx="685800" cy="685800"/>
           </a:xfrm>
           <a:prstGeom prst="rect">
@@ -8383,7 +7922,7 @@
                   <a:schemeClr val="bg1"/>
                 </a:solidFill>
               </a:rPr>
-              <a:t>3</a:t>
+              <a:t>2</a:t>
             </a:r>
             <a:endParaRPr lang="en-US" sz="1800" dirty="0"/>
           </a:p>
@@ -8391,13 +7930,13 @@
       </p:sp>
       <p:sp>
         <p:nvSpPr>
-          <p:cNvPr id="15" name="step line 3"/>
+          <p:cNvPr id="10" name="step line 2"/>
           <p:cNvSpPr/>
           <p:nvPr/>
         </p:nvSpPr>
         <p:spPr>
           <a:xfrm>
-            <a:off x="6675120" y="1892808"/>
+            <a:off x="4389120" y="1892808"/>
             <a:ext cx="1417320" cy="0"/>
           </a:xfrm>
           <a:prstGeom prst="line">
@@ -8414,13 +7953,13 @@
       </p:sp>
       <p:sp>
         <p:nvSpPr>
-          <p:cNvPr id="16" name="Text 14"/>
+          <p:cNvPr id="11" name="Text 9"/>
           <p:cNvSpPr txBox="1"/>
           <p:nvPr/>
         </p:nvSpPr>
         <p:spPr>
           <a:xfrm>
-            <a:off x="5120640" y="2468880"/>
+            <a:off x="2834640" y="2468880"/>
             <a:ext cx="2103120" cy="731520"/>
           </a:xfrm>
           <a:prstGeom prst="rect">
@@ -8442,7 +7981,7 @@
                   <a:schemeClr val="tx2"/>
                 </a:solidFill>
               </a:rPr>
-              <a:t>Collect more prints</a:t>
+              <a:t>Complete the user study</a:t>
             </a:r>
             <a:endParaRPr lang="en-US" sz="1800" dirty="0"/>
           </a:p>
@@ -8450,13 +7989,13 @@
       </p:sp>
       <p:sp>
         <p:nvSpPr>
-          <p:cNvPr id="17" name="Text 15"/>
+          <p:cNvPr id="12" name="Text 10"/>
           <p:cNvSpPr txBox="1"/>
           <p:nvPr/>
         </p:nvSpPr>
         <p:spPr>
           <a:xfrm>
-            <a:off x="5120640" y="3246120"/>
+            <a:off x="2834640" y="3246120"/>
             <a:ext cx="2103120" cy="1645920"/>
           </a:xfrm>
           <a:prstGeom prst="rect">
@@ -8478,7 +8017,7 @@
                   <a:schemeClr val="tx1"/>
                 </a:solidFill>
               </a:rPr>
-              <a:t>About 100 unseen counterfeit prints with a bank or the police</a:t>
+              <a:t>Trials started; 8–12 participants: task time, accuracy, SUS and NASA-TLX</a:t>
             </a:r>
             <a:endParaRPr lang="en-US" sz="1500" dirty="0"/>
           </a:p>
@@ -8486,13 +8025,13 @@
       </p:sp>
       <p:sp>
         <p:nvSpPr>
-          <p:cNvPr id="18" name="number 4"/>
+          <p:cNvPr id="13" name="number 3"/>
           <p:cNvSpPr/>
           <p:nvPr/>
         </p:nvSpPr>
         <p:spPr>
           <a:xfrm>
-            <a:off x="8183880" y="1554480"/>
+            <a:off x="5897880" y="1554480"/>
             <a:ext cx="685800" cy="685800"/>
           </a:xfrm>
           <a:prstGeom prst="ellipse">
@@ -8511,13 +8050,13 @@
       </p:sp>
       <p:sp>
         <p:nvSpPr>
-          <p:cNvPr id="19" name="Text 17"/>
+          <p:cNvPr id="14" name="Text 12"/>
           <p:cNvSpPr txBox="1"/>
           <p:nvPr/>
         </p:nvSpPr>
         <p:spPr>
           <a:xfrm>
-            <a:off x="8183880" y="1554480"/>
+            <a:off x="5897880" y="1554480"/>
             <a:ext cx="685800" cy="685800"/>
           </a:xfrm>
           <a:prstGeom prst="rect">
@@ -8539,7 +8078,7 @@
                   <a:schemeClr val="bg1"/>
                 </a:solidFill>
               </a:rPr>
-              <a:t>4</a:t>
+              <a:t>3</a:t>
             </a:r>
             <a:endParaRPr lang="en-US" sz="1800" dirty="0"/>
           </a:p>
@@ -8547,13 +8086,13 @@
       </p:sp>
       <p:sp>
         <p:nvSpPr>
-          <p:cNvPr id="20" name="step line 4"/>
+          <p:cNvPr id="15" name="step line 3"/>
           <p:cNvSpPr/>
           <p:nvPr/>
         </p:nvSpPr>
         <p:spPr>
           <a:xfrm>
-            <a:off x="8961120" y="1892808"/>
+            <a:off x="6675120" y="1892808"/>
             <a:ext cx="1417320" cy="0"/>
           </a:xfrm>
           <a:prstGeom prst="line">
@@ -8570,6 +8109,162 @@
       </p:sp>
       <p:sp>
         <p:nvSpPr>
+          <p:cNvPr id="16" name="Text 14"/>
+          <p:cNvSpPr txBox="1"/>
+          <p:nvPr/>
+        </p:nvSpPr>
+        <p:spPr>
+          <a:xfrm>
+            <a:off x="5120640" y="2468880"/>
+            <a:ext cx="2103120" cy="731520"/>
+          </a:xfrm>
+          <a:prstGeom prst="rect">
+            <a:avLst/>
+          </a:prstGeom>
+          <a:noFill/>
+          <a:ln/>
+        </p:spPr>
+        <p:txBody>
+          <a:bodyPr wrap="square" lIns="0" tIns="0" rIns="0" bIns="0" rtlCol="0" anchor="t"/>
+          <a:lstStyle/>
+          <a:p>
+            <a:pPr algn="ctr" indent="0" marL="0">
+              <a:buNone/>
+            </a:pPr>
+            <a:r>
+              <a:rPr lang="en-US" sz="1800" b="1" dirty="0">
+                <a:solidFill>
+                  <a:schemeClr val="tx2"/>
+                </a:solidFill>
+              </a:rPr>
+              <a:t>Collect more prints</a:t>
+            </a:r>
+            <a:endParaRPr lang="en-US" sz="1800" dirty="0"/>
+          </a:p>
+        </p:txBody>
+      </p:sp>
+      <p:sp>
+        <p:nvSpPr>
+          <p:cNvPr id="17" name="Text 15"/>
+          <p:cNvSpPr txBox="1"/>
+          <p:nvPr/>
+        </p:nvSpPr>
+        <p:spPr>
+          <a:xfrm>
+            <a:off x="5120640" y="3246120"/>
+            <a:ext cx="2103120" cy="1645920"/>
+          </a:xfrm>
+          <a:prstGeom prst="rect">
+            <a:avLst/>
+          </a:prstGeom>
+          <a:noFill/>
+          <a:ln/>
+        </p:spPr>
+        <p:txBody>
+          <a:bodyPr wrap="square" lIns="0" tIns="0" rIns="0" bIns="0" rtlCol="0" anchor="t"/>
+          <a:lstStyle/>
+          <a:p>
+            <a:pPr algn="ctr" indent="0" marL="0">
+              <a:buNone/>
+            </a:pPr>
+            <a:r>
+              <a:rPr lang="en-US" sz="1500" dirty="0">
+                <a:solidFill>
+                  <a:schemeClr val="tx1"/>
+                </a:solidFill>
+              </a:rPr>
+              <a:t>About 100 unseen counterfeit prints with a bank or the police</a:t>
+            </a:r>
+            <a:endParaRPr lang="en-US" sz="1500" dirty="0"/>
+          </a:p>
+        </p:txBody>
+      </p:sp>
+      <p:sp>
+        <p:nvSpPr>
+          <p:cNvPr id="18" name="number 4"/>
+          <p:cNvSpPr/>
+          <p:nvPr/>
+        </p:nvSpPr>
+        <p:spPr>
+          <a:xfrm>
+            <a:off x="8183880" y="1554480"/>
+            <a:ext cx="685800" cy="685800"/>
+          </a:xfrm>
+          <a:prstGeom prst="ellipse">
+            <a:avLst/>
+          </a:prstGeom>
+          <a:solidFill>
+            <a:srgbClr val="0B6E4F"/>
+          </a:solidFill>
+          <a:ln w="12700">
+            <a:solidFill>
+              <a:srgbClr val="0B6E4F"/>
+            </a:solidFill>
+            <a:prstDash val="solid"/>
+          </a:ln>
+        </p:spPr>
+      </p:sp>
+      <p:sp>
+        <p:nvSpPr>
+          <p:cNvPr id="19" name="Text 17"/>
+          <p:cNvSpPr txBox="1"/>
+          <p:nvPr/>
+        </p:nvSpPr>
+        <p:spPr>
+          <a:xfrm>
+            <a:off x="8183880" y="1554480"/>
+            <a:ext cx="685800" cy="685800"/>
+          </a:xfrm>
+          <a:prstGeom prst="rect">
+            <a:avLst/>
+          </a:prstGeom>
+          <a:noFill/>
+          <a:ln/>
+        </p:spPr>
+        <p:txBody>
+          <a:bodyPr wrap="square" lIns="0" tIns="0" rIns="0" bIns="0" rtlCol="0" anchor="ctr"/>
+          <a:lstStyle/>
+          <a:p>
+            <a:pPr algn="ctr" indent="0" marL="0">
+              <a:buNone/>
+            </a:pPr>
+            <a:r>
+              <a:rPr lang="en-US" sz="1800" b="1" dirty="0">
+                <a:solidFill>
+                  <a:schemeClr val="bg1"/>
+                </a:solidFill>
+              </a:rPr>
+              <a:t>4</a:t>
+            </a:r>
+            <a:endParaRPr lang="en-US" sz="1800" dirty="0"/>
+          </a:p>
+        </p:txBody>
+      </p:sp>
+      <p:sp>
+        <p:nvSpPr>
+          <p:cNvPr id="20" name="step line 4"/>
+          <p:cNvSpPr/>
+          <p:nvPr/>
+        </p:nvSpPr>
+        <p:spPr>
+          <a:xfrm>
+            <a:off x="8961120" y="1892808"/>
+            <a:ext cx="1417320" cy="0"/>
+          </a:xfrm>
+          <a:prstGeom prst="line">
+            <a:avLst/>
+          </a:prstGeom>
+          <a:noFill/>
+          <a:ln w="25400">
+            <a:solidFill>
+              <a:srgbClr val="C9D6D0"/>
+            </a:solidFill>
+            <a:prstDash val="solid"/>
+          </a:ln>
+        </p:spPr>
+      </p:sp>
+      <p:sp>
+        <p:nvSpPr>
           <p:cNvPr id="21" name="Text 19"/>
           <p:cNvSpPr txBox="1"/>
           <p:nvPr/>
@@ -8634,7 +8329,7 @@
                   <a:schemeClr val="tx1"/>
                 </a:solidFill>
               </a:rPr>
-              <a:t>Lighter text detector; fine-tune on real photos</a:t>
+              <a:t>Line-by-line page reading; lighter text detector</a:t>
             </a:r>
             <a:endParaRPr lang="en-US" sz="1500" dirty="0"/>
           </a:p>
@@ -8971,7 +8666,7 @@
                   <a:schemeClr val="bg1"/>
                 </a:solidFill>
               </a:rPr>
-              <a:t>Honest tests: unseen prints, a safe verdict, correctly shaped Bangla</a:t>
+              <a:t>New methods: prefix training, a safe verdict, and the DMWR watermark checker</a:t>
             </a:r>
             <a:endParaRPr lang="en-US" sz="1600" dirty="0"/>
           </a:p>
@@ -8989,7 +8684,7 @@
                   <a:schemeClr val="bg1"/>
                 </a:solidFill>
               </a:rPr>
-              <a:t>Next: make it work through the glass camera and with users</a:t>
+              <a:t>Next: tune the glass camera and complete the user trials</a:t>
             </a:r>
             <a:endParaRPr lang="en-US" sz="1600" dirty="0"/>
           </a:p>
@@ -15617,13 +15312,13 @@
             <a:r>
               <a:rPr lang="en-US" sz="4000" b="1" dirty="0">
                 <a:solidFill>
-                  <a:srgbClr val="E4572E"/>
+                  <a:srgbClr val="0B6E4F"/>
                 </a:solidFill>
                 <a:latin typeface="Cambria" pitchFamily="34" charset="0"/>
                 <a:ea typeface="Cambria" pitchFamily="34" charset="-122"/>
                 <a:cs typeface="Cambria" pitchFamily="34" charset="-120"/>
               </a:rPr>
-              <a:t>18.5%</a:t>
+              <a:t>0.992</a:t>
             </a:r>
             <a:endParaRPr lang="en-US" sz="4000" dirty="0"/>
           </a:p>
@@ -15659,7 +15354,7 @@
                   <a:schemeClr val="tx1"/>
                 </a:solidFill>
               </a:rPr>
-              <a:t>on hand-held close-ups: still a weak point</a:t>
+              <a:t>mAP@0.5 on 566 pictures with new backgrounds</a:t>
             </a:r>
             <a:endParaRPr lang="en-US" sz="1400" dirty="0"/>
           </a:p>

--- a/Thesis Report and paper/thesis report/slides/SARA_Presentation.pptx
+++ b/Thesis Report and paper/thesis report/slides/SARA_Presentation.pptx
@@ -131,19 +131,19 @@
   <p:extLst>
     <p:ext uri="{521415D9-36F7-43E2-AB2F-B90AF26B5E84}">
       <p14:sectionLst xmlns:p14="http://schemas.microsoft.com/office/powerpoint/2010/main">
-        <p14:section name="Opening" id="{051d8c28-1aaf-f0bd-f2f6-9fe5e9029997}">
+        <p14:section name="Opening" id="{73b83076-bee3-737f-2367-52d43b78ce25}">
           <p14:sldIdLst>
             <p14:sldId id="256"/>
           </p14:sldIdLst>
         </p14:section>
-        <p14:section name="Problem" id="{43a554c1-3d0e-9fbc-7272-bf00cfb306b2}">
+        <p14:section name="Problem" id="{d1503e30-68c7-5239-6a3f-963fc3b9abea}">
           <p14:sldIdLst>
             <p14:sldId id="257"/>
             <p14:sldId id="258"/>
             <p14:sldId id="259"/>
           </p14:sldIdLst>
         </p14:section>
-        <p14:section name="Solution" id="{5e166af7-85a2-4865-cd5d-690d3890c6ec}">
+        <p14:section name="Solution" id="{ed5267fe-a20a-a537-fc16-8ee980386a23}">
           <p14:sldIdLst>
             <p14:sldId id="260"/>
             <p14:sldId id="261"/>
@@ -152,7 +152,7 @@
             <p14:sldId id="264"/>
           </p14:sldIdLst>
         </p14:section>
-        <p14:section name="Currency" id="{363479ff-6531-629d-1c85-f0895f669f0f}">
+        <p14:section name="Currency" id="{53e0f1e5-df92-b3f5-93ee-e1fb7c19327c}">
           <p14:sldIdLst>
             <p14:sldId id="265"/>
             <p14:sldId id="266"/>
@@ -164,20 +164,20 @@
             <p14:sldId id="272"/>
           </p14:sldIdLst>
         </p14:section>
-        <p14:section name="Reading and voice" id="{08ff1439-54a7-14e1-e553-d91d09e78c53}">
+        <p14:section name="Reading and voice" id="{7f6c0c79-b1e6-174f-5b5f-fbb1d02fe0af}">
           <p14:sldIdLst>
             <p14:sldId id="273"/>
             <p14:sldId id="274"/>
           </p14:sldIdLst>
         </p14:section>
-        <p14:section name="Device" id="{36175add-780b-36ab-dada-70c6ad88a4af}">
+        <p14:section name="Device" id="{6cc8525b-f2f5-27c8-4b8a-a8495df7017a}">
           <p14:sldIdLst>
             <p14:sldId id="275"/>
             <p14:sldId id="276"/>
             <p14:sldId id="277"/>
           </p14:sldIdLst>
         </p14:section>
-        <p14:section name="Closing" id="{e15ba6e2-6c09-60ad-88a3-c62a54fa635b}">
+        <p14:section name="Closing" id="{e804a72d-4201-50e8-e9fb-6c94d6fc7f00}">
           <p14:sldIdLst>
             <p14:sldId id="278"/>
             <p14:sldId id="279"/>
@@ -5113,7 +5113,7 @@
       </p:grpSpPr>
       <p:pic>
         <p:nvPicPr>
-          <p:cNvPr id="2" name="Prototype worn, front" descr="E:\Final SP\Thesis Report and paper\tools\deck\assets/1_1.jpg">    </p:cNvPr>
+          <p:cNvPr id="2" name="Second prototype: front, side and back" descr="E:\Final SP\Thesis Report and paper\tools\deck\assets/v2_collage.jpg">    </p:cNvPr>
           <p:cNvPicPr>
             <a:picLocks noChangeAspect="1"/>
           </p:cNvPicPr>
@@ -5126,8 +5126,8 @@
         </p:blipFill>
         <p:spPr>
           <a:xfrm>
-            <a:off x="7982712" y="0"/>
-            <a:ext cx="4206240" cy="6858000"/>
+            <a:off x="6793992" y="0"/>
+            <a:ext cx="5394960" cy="6858000"/>
           </a:xfrm>
           <a:prstGeom prst="rect">
             <a:avLst/>
@@ -5192,7 +5192,7 @@
         <p:spPr>
           <a:xfrm>
             <a:off x="685800" y="1600200"/>
-            <a:ext cx="6858000" cy="914400"/>
+            <a:ext cx="5669280" cy="914400"/>
           </a:xfrm>
           <a:prstGeom prst="rect">
             <a:avLst/>
@@ -5231,7 +5231,7 @@
         <p:spPr>
           <a:xfrm>
             <a:off x="685800" y="2560320"/>
-            <a:ext cx="6858000" cy="1280160"/>
+            <a:ext cx="5669280" cy="1645920"/>
           </a:xfrm>
           <a:prstGeom prst="rect">
             <a:avLst/>
@@ -5266,8 +5266,8 @@
         </p:nvSpPr>
         <p:spPr>
           <a:xfrm>
-            <a:off x="685800" y="4663440"/>
-            <a:ext cx="6949440" cy="1097280"/>
+            <a:off x="685800" y="4526280"/>
+            <a:ext cx="5760720" cy="1463040"/>
           </a:xfrm>
           <a:prstGeom prst="rect">
             <a:avLst/>
@@ -5291,7 +5291,24 @@
                   <a:srgbClr val="CFE2DA"/>
                 </a:solidFill>
               </a:rPr>
-              <a:t>MD Abdun Fattah Lam (2220014)  ·  Mukut Protim Memo (2020086)  ·  Tanjila Hossain Tapti (2130561)</a:t>
+              <a:t>MD Abdun Fattah Lam (2220014)  ·  Mukut Protim Memo (2020086)</a:t>
+            </a:r>
+            <a:endParaRPr lang="en-US" sz="1300" dirty="0"/>
+          </a:p>
+          <a:p>
+            <a:pPr indent="0" marL="0">
+              <a:spcAft>
+                <a:spcPts val="400"/>
+              </a:spcAft>
+              <a:buNone/>
+            </a:pPr>
+            <a:r>
+              <a:rPr lang="en-US" sz="1300" dirty="0">
+                <a:solidFill>
+                  <a:srgbClr val="CFE2DA"/>
+                </a:solidFill>
+              </a:rPr>
+              <a:t>Tanjila Hossain Tapti (2130561)</a:t>
             </a:r>
             <a:endParaRPr lang="en-US" sz="1300" dirty="0"/>
           </a:p>
@@ -20703,7 +20720,7 @@
       </p:sp>
       <p:pic>
         <p:nvPicPr>
-          <p:cNvPr id="7" name="Side: five buttons, bone-conduction earphone" descr="E:\Final SP\Thesis Report and paper\tools\deck\assets/1_2.jpg">    </p:cNvPr>
+          <p:cNvPr id="7" name="Side: five buttons, bone-conduction earphone" descr="E:\Final SP\Thesis Report and paper\tools\deck\assets/v2_side_portrait.jpg">    </p:cNvPr>
           <p:cNvPicPr>
             <a:picLocks noChangeAspect="1"/>
           </p:cNvPicPr>

--- a/Thesis Report and paper/thesis report/slides/SARA_Presentation.pptx
+++ b/Thesis Report and paper/thesis report/slides/SARA_Presentation.pptx
@@ -131,19 +131,19 @@
   <p:extLst>
     <p:ext uri="{521415D9-36F7-43E2-AB2F-B90AF26B5E84}">
       <p14:sectionLst xmlns:p14="http://schemas.microsoft.com/office/powerpoint/2010/main">
-        <p14:section name="Opening" id="{73b83076-bee3-737f-2367-52d43b78ce25}">
+        <p14:section name="Opening" id="{f71352d4-cb90-e2ad-2285-6f1c251677bb}">
           <p14:sldIdLst>
             <p14:sldId id="256"/>
           </p14:sldIdLst>
         </p14:section>
-        <p14:section name="Problem" id="{d1503e30-68c7-5239-6a3f-963fc3b9abea}">
+        <p14:section name="Problem" id="{1b19392e-939b-0906-2a53-b7561541320d}">
           <p14:sldIdLst>
             <p14:sldId id="257"/>
             <p14:sldId id="258"/>
             <p14:sldId id="259"/>
           </p14:sldIdLst>
         </p14:section>
-        <p14:section name="Solution" id="{ed5267fe-a20a-a537-fc16-8ee980386a23}">
+        <p14:section name="Solution" id="{961c3baa-f6aa-fc18-7590-45acee1e6e49}">
           <p14:sldIdLst>
             <p14:sldId id="260"/>
             <p14:sldId id="261"/>
@@ -152,7 +152,7 @@
             <p14:sldId id="264"/>
           </p14:sldIdLst>
         </p14:section>
-        <p14:section name="Currency" id="{53e0f1e5-df92-b3f5-93ee-e1fb7c19327c}">
+        <p14:section name="Currency" id="{45d2a85c-41bd-5404-4e63-b06b0f8f4462}">
           <p14:sldIdLst>
             <p14:sldId id="265"/>
             <p14:sldId id="266"/>
@@ -164,20 +164,20 @@
             <p14:sldId id="272"/>
           </p14:sldIdLst>
         </p14:section>
-        <p14:section name="Reading and voice" id="{7f6c0c79-b1e6-174f-5b5f-fbb1d02fe0af}">
+        <p14:section name="Reading and voice" id="{11df2ad6-7f0c-82af-6cd8-bdf19c669d00}">
           <p14:sldIdLst>
             <p14:sldId id="273"/>
             <p14:sldId id="274"/>
           </p14:sldIdLst>
         </p14:section>
-        <p14:section name="Device" id="{6cc8525b-f2f5-27c8-4b8a-a8495df7017a}">
+        <p14:section name="Device" id="{ea384135-455f-14dd-04ea-58bb32ccc9d5}">
           <p14:sldIdLst>
             <p14:sldId id="275"/>
             <p14:sldId id="276"/>
             <p14:sldId id="277"/>
           </p14:sldIdLst>
         </p14:section>
-        <p14:section name="Closing" id="{e804a72d-4201-50e8-e9fb-6c94d6fc7f00}">
+        <p14:section name="Closing" id="{e9aef73e-6546-704a-e1bf-16f3324e75ab}">
           <p14:sldIdLst>
             <p14:sldId id="278"/>
             <p14:sldId id="279"/>
@@ -6690,7 +6690,7 @@
                   <a:schemeClr val="accent5"/>
                 </a:solidFill>
               </a:rPr>
-              <a:t>Data: [14] Piyas et al., JaalTaka benchmark, Mendeley Data 2025 (1,390 notes, six views each).</a:t>
+              <a:t>Data: [14, 15] Piyas et al., JaalTaka dataset and article, 2025-2026 (1,390 notes, six views each; counterfeits seized by the Rapid Action Battalion).</a:t>
             </a:r>
             <a:endParaRPr lang="en-US" sz="1000" dirty="0"/>
           </a:p>
@@ -6964,7 +6964,7 @@
                   <a:schemeClr val="accent5"/>
                 </a:solidFill>
               </a:rPr>
-              <a:t>Data: [14] JaalTaka; serial-number audit and print-disjoint split are ours.</a:t>
+              <a:t>Data: [14] JaalTaka; serial-number audit and print-disjoint split are ours. Earlier Taka counterfeit work: [16] SVM on security features; [17] CNNs; [19] UV flecks + RPN.</a:t>
             </a:r>
             <a:endParaRPr lang="en-US" sz="1000" dirty="0"/>
           </a:p>
@@ -7340,7 +7340,7 @@
                   <a:schemeClr val="tx1"/>
                 </a:solidFill>
               </a:rPr>
-              <a:t>parameters (0.21 MB): 46× smaller than MobileNetV2 [15]</a:t>
+              <a:t>parameters (0.21 MB): 46× smaller than MobileNetV2 [18]</a:t>
             </a:r>
             <a:endParaRPr lang="en-US" sz="1300" dirty="0"/>
           </a:p>
@@ -7451,7 +7451,7 @@
                   <a:schemeClr val="accent5"/>
                 </a:solidFill>
               </a:rPr>
-              <a:t>Baseline [15] Sandler et al., MobileNetV2, CVPR 2018; data [14] JaalTaka. DMWR (denomination-matched watermark residual) is our method.</a:t>
+              <a:t>Baseline [18] Sandler et al., MobileNetV2, CVPR 2018; data [14] JaalTaka. DMWR (denomination-matched watermark residual) is our method.</a:t>
             </a:r>
             <a:endParaRPr lang="en-US" sz="1000" dirty="0"/>
           </a:p>
@@ -8206,7 +8206,7 @@
                 <a:ea typeface="Cambria" pitchFamily="34" charset="-122"/>
                 <a:cs typeface="Cambria" pitchFamily="34" charset="-120"/>
               </a:rPr>
-              <a:t>UV fibre check: the security fibres light up</a:t>
+              <a:t>UV fibre check: the glass carries its own UV lamp</a:t>
             </a:r>
             <a:endParaRPr lang="en-US" sz="3000" dirty="0"/>
           </a:p>
@@ -8388,7 +8388,43 @@
       </p:sp>
       <p:sp>
         <p:nvSpPr>
-          <p:cNvPr id="8" name="UV caveat"/>
+          <p:cNvPr id="8" name="Sources"/>
+          <p:cNvSpPr txBox="1"/>
+          <p:nvPr/>
+        </p:nvSpPr>
+        <p:spPr>
+          <a:xfrm>
+            <a:off x="548640" y="6053328"/>
+            <a:ext cx="11064240" cy="292608"/>
+          </a:xfrm>
+          <a:prstGeom prst="rect">
+            <a:avLst/>
+          </a:prstGeom>
+          <a:noFill/>
+          <a:ln/>
+        </p:spPr>
+        <p:txBody>
+          <a:bodyPr wrap="square" lIns="0" tIns="0" rIns="0" bIns="0" rtlCol="0" anchor="ctr"/>
+          <a:lstStyle/>
+          <a:p>
+            <a:pPr indent="0" marL="0">
+              <a:buNone/>
+            </a:pPr>
+            <a:r>
+              <a:rPr lang="en-US" sz="1000" i="1" dirty="0">
+                <a:solidFill>
+                  <a:schemeClr val="accent5"/>
+                </a:solidFill>
+              </a:rPr>
+              <a:t>Prior work on Taka under UV light: [19] Chowdhury et al., ICCA 2022 (96.3% with an RPN on UV images). Fibre check (ENFR) and photographs are ours.</a:t>
+            </a:r>
+            <a:endParaRPr lang="en-US" sz="1000" dirty="0"/>
+          </a:p>
+        </p:txBody>
+      </p:sp>
+      <p:sp>
+        <p:nvSpPr>
+          <p:cNvPr id="9" name="UV caveat"/>
           <p:cNvSpPr txBox="1"/>
           <p:nvPr/>
         </p:nvSpPr>
@@ -8769,7 +8805,7 @@
                   <a:schemeClr val="accent5"/>
                 </a:solidFill>
               </a:rPr>
-              <a:t>Engine [6] EasyOCR with [5] CRAFT; real words from [16] ICDAR 2019 MLT (1,000 test words). Every choice made on validation data.</a:t>
+              <a:t>Engine [6] EasyOCR with [5] CRAFT; real words from [20] ICDAR 2019 MLT (1,000 test words). Every choice made on validation data.</a:t>
             </a:r>
             <a:endParaRPr lang="en-US" sz="1000" dirty="0"/>
           </a:p>
@@ -9309,7 +9345,7 @@
                   <a:schemeClr val="accent5"/>
                 </a:solidFill>
               </a:rPr>
-              <a:t>Recogniser [17] Vosk; noise from [18] Piczak, ESC-50; voices [10, 11]. Results: paper_evidence/VOICE_COMMANDS_FAST.md.</a:t>
+              <a:t>Recogniser [21] Vosk; noise from [22] Piczak, ESC-50; voices [10, 11]. Results: paper_evidence/VOICE_COMMANDS_FAST.md.</a:t>
             </a:r>
             <a:endParaRPr lang="en-US" sz="1000" dirty="0"/>
           </a:p>
@@ -12607,28 +12643,6 @@
             </a:r>
             <a:endParaRPr lang="en-US" sz="1100" dirty="0"/>
           </a:p>
-        </p:txBody>
-      </p:sp>
-      <p:sp>
-        <p:nvSpPr>
-          <p:cNvPr id="4" name="References 2"/>
-          <p:cNvSpPr txBox="1"/>
-          <p:nvPr/>
-        </p:nvSpPr>
-        <p:spPr>
-          <a:xfrm>
-            <a:off x="6172200" y="1280160"/>
-            <a:ext cx="5440680" cy="4800600"/>
-          </a:xfrm>
-          <a:prstGeom prst="rect">
-            <a:avLst/>
-          </a:prstGeom>
-          <a:noFill/>
-          <a:ln/>
-        </p:spPr>
-        <p:txBody>
-          <a:bodyPr wrap="square" lIns="0" tIns="0" rIns="0" bIns="0" rtlCol="0" anchor="t"/>
-          <a:lstStyle/>
           <a:p>
             <a:pPr indent="0" marL="0">
               <a:spcAft>
@@ -12663,6 +12677,28 @@
             </a:r>
             <a:endParaRPr lang="en-US" sz="1100" dirty="0"/>
           </a:p>
+        </p:txBody>
+      </p:sp>
+      <p:sp>
+        <p:nvSpPr>
+          <p:cNvPr id="4" name="References 2"/>
+          <p:cNvSpPr txBox="1"/>
+          <p:nvPr/>
+        </p:nvSpPr>
+        <p:spPr>
+          <a:xfrm>
+            <a:off x="6172200" y="1280160"/>
+            <a:ext cx="5440680" cy="4800600"/>
+          </a:xfrm>
+          <a:prstGeom prst="rect">
+            <a:avLst/>
+          </a:prstGeom>
+          <a:noFill/>
+          <a:ln/>
+        </p:spPr>
+        <p:txBody>
+          <a:bodyPr wrap="square" lIns="0" tIns="0" rIns="0" bIns="0" rtlCol="0" anchor="t"/>
+          <a:lstStyle/>
           <a:p>
             <a:pPr indent="0" marL="0">
               <a:spcAft>
@@ -12727,7 +12763,7 @@
                   <a:schemeClr val="tx1"/>
                 </a:solidFill>
               </a:rPr>
-              <a:t>[15]  Sandler, M. et al. MobileNetV2: inverted residuals and linear bottlenecks. CVPR, 2018.</a:t>
+              <a:t>[15]  Piyas, B. R. C. et al. JaalTaka: a benchmark dataset for detecting counterfeit Bangladeshi banknotes. Data in Brief 64, 112377, 2026.</a:t>
             </a:r>
             <a:endParaRPr lang="en-US" sz="1100" dirty="0"/>
           </a:p>
@@ -12744,7 +12780,7 @@
                   <a:schemeClr val="tx1"/>
                 </a:solidFill>
               </a:rPr>
-              <a:t>[16]  Nayef, N. et al. ICDAR2019 robust reading challenge on multi-lingual scene text (RRC-MLT-2019). ICDAR, 2019.</a:t>
+              <a:t>[16]  Uddin, M. S., Das, P. P., Roney, M. S. A. Image-based approach for the detection of counterfeit banknotes of Bangladesh. ICIEV, 2016.</a:t>
             </a:r>
             <a:endParaRPr lang="en-US" sz="1100" dirty="0"/>
           </a:p>
@@ -12761,7 +12797,7 @@
                   <a:schemeClr val="tx1"/>
                 </a:solidFill>
               </a:rPr>
-              <a:t>[17]  Alpha Cephei. Vosk offline speech recognition toolkit.</a:t>
+              <a:t>[17]  Pathak, A. et al. Enhanced counterfeit detection of Bangladesh currency through convolutional neural networks. IJIRCST 12(2), 2024.</a:t>
             </a:r>
             <a:endParaRPr lang="en-US" sz="1100" dirty="0"/>
           </a:p>
@@ -12778,7 +12814,75 @@
                   <a:schemeClr val="tx1"/>
                 </a:solidFill>
               </a:rPr>
-              <a:t>[18]  Piczak, K. J. ESC: dataset for environmental sound classification. ACM Multimedia, 2015.</a:t>
+              <a:t>[18]  Sandler, M. et al. MobileNetV2: inverted residuals and linear bottlenecks. CVPR, 2018.</a:t>
+            </a:r>
+            <a:endParaRPr lang="en-US" sz="1100" dirty="0"/>
+          </a:p>
+          <a:p>
+            <a:pPr indent="0" marL="0">
+              <a:spcAft>
+                <a:spcPts val="500"/>
+              </a:spcAft>
+              <a:buNone/>
+            </a:pPr>
+            <a:r>
+              <a:rPr lang="en-US" sz="1100" dirty="0">
+                <a:solidFill>
+                  <a:schemeClr val="tx1"/>
+                </a:solidFill>
+              </a:rPr>
+              <a:t>[19]  Chowdhury, A. A. et al. Evaluation of deep learning models on UV ink: a fake money detection scheme with RPN. ICCA (ACM), 2022.</a:t>
+            </a:r>
+            <a:endParaRPr lang="en-US" sz="1100" dirty="0"/>
+          </a:p>
+          <a:p>
+            <a:pPr indent="0" marL="0">
+              <a:spcAft>
+                <a:spcPts val="500"/>
+              </a:spcAft>
+              <a:buNone/>
+            </a:pPr>
+            <a:r>
+              <a:rPr lang="en-US" sz="1100" dirty="0">
+                <a:solidFill>
+                  <a:schemeClr val="tx1"/>
+                </a:solidFill>
+              </a:rPr>
+              <a:t>[20]  Nayef, N. et al. ICDAR2019 robust reading challenge on multi-lingual scene text (RRC-MLT-2019). ICDAR, 2019.</a:t>
+            </a:r>
+            <a:endParaRPr lang="en-US" sz="1100" dirty="0"/>
+          </a:p>
+          <a:p>
+            <a:pPr indent="0" marL="0">
+              <a:spcAft>
+                <a:spcPts val="500"/>
+              </a:spcAft>
+              <a:buNone/>
+            </a:pPr>
+            <a:r>
+              <a:rPr lang="en-US" sz="1100" dirty="0">
+                <a:solidFill>
+                  <a:schemeClr val="tx1"/>
+                </a:solidFill>
+              </a:rPr>
+              <a:t>[21]  Alpha Cephei. Vosk offline speech recognition toolkit.</a:t>
+            </a:r>
+            <a:endParaRPr lang="en-US" sz="1100" dirty="0"/>
+          </a:p>
+          <a:p>
+            <a:pPr indent="0" marL="0">
+              <a:spcAft>
+                <a:spcPts val="500"/>
+              </a:spcAft>
+              <a:buNone/>
+            </a:pPr>
+            <a:r>
+              <a:rPr lang="en-US" sz="1100" dirty="0">
+                <a:solidFill>
+                  <a:schemeClr val="tx1"/>
+                </a:solidFill>
+              </a:rPr>
+              <a:t>[22]  Piczak, K. J. ESC: dataset for environmental sound classification. ACM Multimedia, 2015.</a:t>
             </a:r>
             <a:endParaRPr lang="en-US" sz="1100" dirty="0"/>
           </a:p>
@@ -20661,7 +20765,7 @@
       </p:sp>
       <p:pic>
         <p:nvPicPr>
-          <p:cNvPr id="5" name="Front: camera and LED on the bridge" descr="E:\Final SP\Thesis Report and paper\tools\deck\assets/1_20.jpg">    </p:cNvPr>
+          <p:cNvPr id="5" name="Front: camera and UV lamp (blue light)" descr="E:\Final SP\Thesis Report and paper\tools\deck\assets/1_20.jpg">    </p:cNvPr>
           <p:cNvPicPr>
             <a:picLocks noChangeAspect="1"/>
           </p:cNvPicPr>
@@ -20712,7 +20816,7 @@
                   <a:schemeClr val="accent5"/>
                 </a:solidFill>
               </a:rPr>
-              <a:t>Front: camera and LED on the bridge</a:t>
+              <a:t>Front: camera and UV lamp (blue light)</a:t>
             </a:r>
             <a:endParaRPr lang="en-US" sz="1200" dirty="0"/>
           </a:p>

--- a/Thesis Report and paper/thesis report/slides/SARA_Presentation.pptx
+++ b/Thesis Report and paper/thesis report/slides/SARA_Presentation.pptx
@@ -131,19 +131,19 @@
   <p:extLst>
     <p:ext uri="{521415D9-36F7-43E2-AB2F-B90AF26B5E84}">
       <p14:sectionLst xmlns:p14="http://schemas.microsoft.com/office/powerpoint/2010/main">
-        <p14:section name="Opening" id="{f71352d4-cb90-e2ad-2285-6f1c251677bb}">
+        <p14:section name="Opening" id="{2bf96422-0567-58c3-2575-3fa2b3b695e6}">
           <p14:sldIdLst>
             <p14:sldId id="256"/>
           </p14:sldIdLst>
         </p14:section>
-        <p14:section name="Problem" id="{1b19392e-939b-0906-2a53-b7561541320d}">
+        <p14:section name="Problem" id="{08978f1b-9606-4ac2-fdbe-e9db9638c4c9}">
           <p14:sldIdLst>
             <p14:sldId id="257"/>
             <p14:sldId id="258"/>
             <p14:sldId id="259"/>
           </p14:sldIdLst>
         </p14:section>
-        <p14:section name="Solution" id="{961c3baa-f6aa-fc18-7590-45acee1e6e49}">
+        <p14:section name="Solution" id="{99067a14-0c4c-3960-289a-2fcde1bb5a0a}">
           <p14:sldIdLst>
             <p14:sldId id="260"/>
             <p14:sldId id="261"/>
@@ -152,7 +152,7 @@
             <p14:sldId id="264"/>
           </p14:sldIdLst>
         </p14:section>
-        <p14:section name="Currency" id="{45d2a85c-41bd-5404-4e63-b06b0f8f4462}">
+        <p14:section name="Currency" id="{3f702cab-29e5-7953-d5e2-94b3c49e999a}">
           <p14:sldIdLst>
             <p14:sldId id="265"/>
             <p14:sldId id="266"/>
@@ -164,20 +164,20 @@
             <p14:sldId id="272"/>
           </p14:sldIdLst>
         </p14:section>
-        <p14:section name="Reading and voice" id="{11df2ad6-7f0c-82af-6cd8-bdf19c669d00}">
+        <p14:section name="Reading and voice" id="{c8c1939f-2e84-1788-bf46-1a272bd7650d}">
           <p14:sldIdLst>
             <p14:sldId id="273"/>
             <p14:sldId id="274"/>
           </p14:sldIdLst>
         </p14:section>
-        <p14:section name="Device" id="{ea384135-455f-14dd-04ea-58bb32ccc9d5}">
+        <p14:section name="Device" id="{ea2661e4-f4c6-1334-9c4c-d975e68fcaf1}">
           <p14:sldIdLst>
             <p14:sldId id="275"/>
             <p14:sldId id="276"/>
             <p14:sldId id="277"/>
           </p14:sldIdLst>
         </p14:section>
-        <p14:section name="Closing" id="{e9aef73e-6546-704a-e1bf-16f3324e75ab}">
+        <p14:section name="Closing" id="{52686d80-f57a-024e-cfa3-e04424d05064}">
           <p14:sldIdLst>
             <p14:sldId id="278"/>
             <p14:sldId id="279"/>
@@ -8416,7 +8416,7 @@
                   <a:schemeClr val="accent5"/>
                 </a:solidFill>
               </a:rPr>
-              <a:t>Prior work on Taka under UV light: [19] Chowdhury et al., ICCA 2022 (96.3% with an RPN on UV images). Fibre check (ENFR) and photographs are ours.</a:t>
+              <a:t>The glass's lamp emits 360-395 nm, covering the 365 nm used for banknote checks; banknote paper stays dark while its fibres glow [20]. Prior Taka UV work: [19] (96.3%). Fibre check and photos are ours.</a:t>
             </a:r>
             <a:endParaRPr lang="en-US" sz="1000" dirty="0"/>
           </a:p>
@@ -8805,7 +8805,7 @@
                   <a:schemeClr val="accent5"/>
                 </a:solidFill>
               </a:rPr>
-              <a:t>Engine [6] EasyOCR with [5] CRAFT; real words from [20] ICDAR 2019 MLT (1,000 test words). Every choice made on validation data.</a:t>
+              <a:t>Engine [6] EasyOCR with [5] CRAFT; real words from [21] ICDAR 2019 MLT (1,000 test words). Every choice made on validation data.</a:t>
             </a:r>
             <a:endParaRPr lang="en-US" sz="1000" dirty="0"/>
           </a:p>
@@ -9345,7 +9345,7 @@
                   <a:schemeClr val="accent5"/>
                 </a:solidFill>
               </a:rPr>
-              <a:t>Recogniser [21] Vosk; noise from [22] Piczak, ESC-50; voices [10, 11]. Results: paper_evidence/VOICE_COMMANDS_FAST.md.</a:t>
+              <a:t>Recogniser [22] Vosk; noise from [23] Piczak, ESC-50; voices [10, 11]. Results: paper_evidence/VOICE_COMMANDS_FAST.md.</a:t>
             </a:r>
             <a:endParaRPr lang="en-US" sz="1000" dirty="0"/>
           </a:p>
@@ -12677,28 +12677,6 @@
             </a:r>
             <a:endParaRPr lang="en-US" sz="1100" dirty="0"/>
           </a:p>
-        </p:txBody>
-      </p:sp>
-      <p:sp>
-        <p:nvSpPr>
-          <p:cNvPr id="4" name="References 2"/>
-          <p:cNvSpPr txBox="1"/>
-          <p:nvPr/>
-        </p:nvSpPr>
-        <p:spPr>
-          <a:xfrm>
-            <a:off x="6172200" y="1280160"/>
-            <a:ext cx="5440680" cy="4800600"/>
-          </a:xfrm>
-          <a:prstGeom prst="rect">
-            <a:avLst/>
-          </a:prstGeom>
-          <a:noFill/>
-          <a:ln/>
-        </p:spPr>
-        <p:txBody>
-          <a:bodyPr wrap="square" lIns="0" tIns="0" rIns="0" bIns="0" rtlCol="0" anchor="t"/>
-          <a:lstStyle/>
           <a:p>
             <a:pPr indent="0" marL="0">
               <a:spcAft>
@@ -12716,6 +12694,28 @@
             </a:r>
             <a:endParaRPr lang="en-US" sz="1100" dirty="0"/>
           </a:p>
+        </p:txBody>
+      </p:sp>
+      <p:sp>
+        <p:nvSpPr>
+          <p:cNvPr id="4" name="References 2"/>
+          <p:cNvSpPr txBox="1"/>
+          <p:nvPr/>
+        </p:nvSpPr>
+        <p:spPr>
+          <a:xfrm>
+            <a:off x="6172200" y="1280160"/>
+            <a:ext cx="5440680" cy="4800600"/>
+          </a:xfrm>
+          <a:prstGeom prst="rect">
+            <a:avLst/>
+          </a:prstGeom>
+          <a:noFill/>
+          <a:ln/>
+        </p:spPr>
+        <p:txBody>
+          <a:bodyPr wrap="square" lIns="0" tIns="0" rIns="0" bIns="0" rtlCol="0" anchor="t"/>
+          <a:lstStyle/>
           <a:p>
             <a:pPr indent="0" marL="0">
               <a:spcAft>
@@ -12848,7 +12848,7 @@
                   <a:schemeClr val="tx1"/>
                 </a:solidFill>
               </a:rPr>
-              <a:t>[20]  Nayef, N. et al. ICDAR2019 robust reading challenge on multi-lingual scene text (RRC-MLT-2019). ICDAR, 2019.</a:t>
+              <a:t>[20]  Mutanen, J., Jaaskelainen, T., Parkkinen, J. P. S. Luminescent security properties of banknotes. IS&amp;T PICS Conference, 2003, pp. 421-424.</a:t>
             </a:r>
             <a:endParaRPr lang="en-US" sz="1100" dirty="0"/>
           </a:p>
@@ -12865,7 +12865,7 @@
                   <a:schemeClr val="tx1"/>
                 </a:solidFill>
               </a:rPr>
-              <a:t>[21]  Alpha Cephei. Vosk offline speech recognition toolkit.</a:t>
+              <a:t>[21]  Nayef, N. et al. ICDAR2019 robust reading challenge on multi-lingual scene text (RRC-MLT-2019). ICDAR, 2019.</a:t>
             </a:r>
             <a:endParaRPr lang="en-US" sz="1100" dirty="0"/>
           </a:p>
@@ -12882,7 +12882,24 @@
                   <a:schemeClr val="tx1"/>
                 </a:solidFill>
               </a:rPr>
-              <a:t>[22]  Piczak, K. J. ESC: dataset for environmental sound classification. ACM Multimedia, 2015.</a:t>
+              <a:t>[22]  Alpha Cephei. Vosk offline speech recognition toolkit.</a:t>
+            </a:r>
+            <a:endParaRPr lang="en-US" sz="1100" dirty="0"/>
+          </a:p>
+          <a:p>
+            <a:pPr indent="0" marL="0">
+              <a:spcAft>
+                <a:spcPts val="500"/>
+              </a:spcAft>
+              <a:buNone/>
+            </a:pPr>
+            <a:r>
+              <a:rPr lang="en-US" sz="1100" dirty="0">
+                <a:solidFill>
+                  <a:schemeClr val="tx1"/>
+                </a:solidFill>
+              </a:rPr>
+              <a:t>[23]  Piczak, K. J. ESC: dataset for environmental sound classification. ACM Multimedia, 2015.</a:t>
             </a:r>
             <a:endParaRPr lang="en-US" sz="1100" dirty="0"/>
           </a:p>
